--- a/docs/Kavach-SIH2026-Deck.pptx
+++ b/docs/Kavach-SIH2026-Deck.pptx
@@ -5630,7 +5630,7 @@
                 <a:ea typeface="Arial" pitchFamily="34" charset="-122"/>
                 <a:cs typeface="Arial" pitchFamily="34" charset="-120"/>
               </a:rPr>
-              <a:t>MEASURED, NOT PROMISED</a:t>
+              <a:t>THE BENCHMARK</a:t>
             </a:r>
             <a:endParaRPr lang="en-US" sz="1100" dirty="0"/>
           </a:p>
@@ -5669,9 +5669,563 @@
                 <a:ea typeface="Arial" pitchFamily="34" charset="-122"/>
                 <a:cs typeface="Arial" pitchFamily="34" charset="-120"/>
               </a:rPr>
-              <a:t>RedactBench-Web: our benchmark, our numbers, as CI gates</a:t>
+              <a:t>Every claim measured, every number a CI gate</a:t>
             </a:r>
             <a:endParaRPr lang="en-US" sz="2600" dirty="0"/>
+          </a:p>
+        </p:txBody>
+      </p:sp>
+      <p:sp>
+        <p:nvSpPr>
+          <p:cNvPr id="4" name="Shape 2"/>
+          <p:cNvSpPr/>
+          <p:nvPr/>
+        </p:nvSpPr>
+        <p:spPr>
+          <a:xfrm>
+            <a:off x="502920" y="1207008"/>
+            <a:ext cx="2121408" cy="914400"/>
+          </a:xfrm>
+          <a:prstGeom prst="rect">
+            <a:avLst/>
+          </a:prstGeom>
+          <a:solidFill>
+            <a:srgbClr val="EEF3F8"/>
+          </a:solidFill>
+          <a:ln w="9525">
+            <a:solidFill>
+              <a:srgbClr val="D6DAE0"/>
+            </a:solidFill>
+            <a:prstDash val="solid"/>
+          </a:ln>
+        </p:spPr>
+      </p:sp>
+      <p:sp>
+        <p:nvSpPr>
+          <p:cNvPr id="5" name="Text 3"/>
+          <p:cNvSpPr/>
+          <p:nvPr/>
+        </p:nvSpPr>
+        <p:spPr>
+          <a:xfrm>
+            <a:off x="502920" y="1280160"/>
+            <a:ext cx="2121408" cy="457200"/>
+          </a:xfrm>
+          <a:prstGeom prst="rect">
+            <a:avLst/>
+          </a:prstGeom>
+          <a:noFill/>
+          <a:ln/>
+        </p:spPr>
+        <p:txBody>
+          <a:bodyPr wrap="square" rtlCol="0" anchor="ctr"/>
+          <a:lstStyle/>
+          <a:p>
+            <a:pPr algn="ctr" indent="0" marL="0">
+              <a:buNone/>
+            </a:pPr>
+            <a:r>
+              <a:rPr lang="en-US" sz="2100" b="1" dirty="0">
+                <a:solidFill>
+                  <a:srgbClr val="3D5A3D"/>
+                </a:solidFill>
+                <a:latin typeface="Arial" pitchFamily="34" charset="0"/>
+                <a:ea typeface="Arial" pitchFamily="34" charset="-122"/>
+                <a:cs typeface="Arial" pitchFamily="34" charset="-120"/>
+              </a:rPr>
+              <a:t>100%</a:t>
+            </a:r>
+            <a:endParaRPr lang="en-US" sz="2100" dirty="0"/>
+          </a:p>
+        </p:txBody>
+      </p:sp>
+      <p:sp>
+        <p:nvSpPr>
+          <p:cNvPr id="6" name="Text 4"/>
+          <p:cNvSpPr/>
+          <p:nvPr/>
+        </p:nvSpPr>
+        <p:spPr>
+          <a:xfrm>
+            <a:off x="557784" y="1700784"/>
+            <a:ext cx="2011680" cy="384048"/>
+          </a:xfrm>
+          <a:prstGeom prst="rect">
+            <a:avLst/>
+          </a:prstGeom>
+          <a:noFill/>
+          <a:ln/>
+        </p:spPr>
+        <p:txBody>
+          <a:bodyPr wrap="square" rtlCol="0" anchor="ctr"/>
+          <a:lstStyle/>
+          <a:p>
+            <a:pPr algn="ctr" indent="0" marL="0">
+              <a:buNone/>
+            </a:pPr>
+            <a:r>
+              <a:rPr lang="en-US" sz="880" dirty="0">
+                <a:solidFill>
+                  <a:srgbClr val="5A6470"/>
+                </a:solidFill>
+                <a:latin typeface="Arial" pitchFamily="34" charset="0"/>
+                <a:ea typeface="Arial" pitchFamily="34" charset="-122"/>
+                <a:cs typeface="Arial" pitchFamily="34" charset="-120"/>
+              </a:rPr>
+              <a:t>micro precision, Shield</a:t>
+            </a:r>
+            <a:endParaRPr lang="en-US" sz="880" dirty="0"/>
+          </a:p>
+        </p:txBody>
+      </p:sp>
+      <p:sp>
+        <p:nvSpPr>
+          <p:cNvPr id="7" name="Shape 5"/>
+          <p:cNvSpPr/>
+          <p:nvPr/>
+        </p:nvSpPr>
+        <p:spPr>
+          <a:xfrm>
+            <a:off x="2761488" y="1207008"/>
+            <a:ext cx="2121408" cy="914400"/>
+          </a:xfrm>
+          <a:prstGeom prst="rect">
+            <a:avLst/>
+          </a:prstGeom>
+          <a:solidFill>
+            <a:srgbClr val="EEF3F8"/>
+          </a:solidFill>
+          <a:ln w="9525">
+            <a:solidFill>
+              <a:srgbClr val="D6DAE0"/>
+            </a:solidFill>
+            <a:prstDash val="solid"/>
+          </a:ln>
+        </p:spPr>
+      </p:sp>
+      <p:sp>
+        <p:nvSpPr>
+          <p:cNvPr id="8" name="Text 6"/>
+          <p:cNvSpPr/>
+          <p:nvPr/>
+        </p:nvSpPr>
+        <p:spPr>
+          <a:xfrm>
+            <a:off x="2761488" y="1280160"/>
+            <a:ext cx="2121408" cy="457200"/>
+          </a:xfrm>
+          <a:prstGeom prst="rect">
+            <a:avLst/>
+          </a:prstGeom>
+          <a:noFill/>
+          <a:ln/>
+        </p:spPr>
+        <p:txBody>
+          <a:bodyPr wrap="square" rtlCol="0" anchor="ctr"/>
+          <a:lstStyle/>
+          <a:p>
+            <a:pPr algn="ctr" indent="0" marL="0">
+              <a:buNone/>
+            </a:pPr>
+            <a:r>
+              <a:rPr lang="en-US" sz="2100" b="1" dirty="0">
+                <a:solidFill>
+                  <a:srgbClr val="3D5A3D"/>
+                </a:solidFill>
+                <a:latin typeface="Arial" pitchFamily="34" charset="0"/>
+                <a:ea typeface="Arial" pitchFamily="34" charset="-122"/>
+                <a:cs typeface="Arial" pitchFamily="34" charset="-120"/>
+              </a:rPr>
+              <a:t>0</a:t>
+            </a:r>
+            <a:endParaRPr lang="en-US" sz="2100" dirty="0"/>
+          </a:p>
+        </p:txBody>
+      </p:sp>
+      <p:sp>
+        <p:nvSpPr>
+          <p:cNvPr id="9" name="Text 7"/>
+          <p:cNvSpPr/>
+          <p:nvPr/>
+        </p:nvSpPr>
+        <p:spPr>
+          <a:xfrm>
+            <a:off x="2816352" y="1700784"/>
+            <a:ext cx="2011680" cy="384048"/>
+          </a:xfrm>
+          <a:prstGeom prst="rect">
+            <a:avLst/>
+          </a:prstGeom>
+          <a:noFill/>
+          <a:ln/>
+        </p:spPr>
+        <p:txBody>
+          <a:bodyPr wrap="square" rtlCol="0" anchor="ctr"/>
+          <a:lstStyle/>
+          <a:p>
+            <a:pPr algn="ctr" indent="0" marL="0">
+              <a:buNone/>
+            </a:pPr>
+            <a:r>
+              <a:rPr lang="en-US" sz="880" dirty="0">
+                <a:solidFill>
+                  <a:srgbClr val="5A6470"/>
+                </a:solidFill>
+                <a:latin typeface="Arial" pitchFamily="34" charset="0"/>
+                <a:ea typeface="Arial" pitchFamily="34" charset="-122"/>
+                <a:cs typeface="Arial" pitchFamily="34" charset="-120"/>
+              </a:rPr>
+              <a:t>invariant-class leaks</a:t>
+            </a:r>
+            <a:endParaRPr lang="en-US" sz="880" dirty="0"/>
+          </a:p>
+        </p:txBody>
+      </p:sp>
+      <p:sp>
+        <p:nvSpPr>
+          <p:cNvPr id="10" name="Shape 8"/>
+          <p:cNvSpPr/>
+          <p:nvPr/>
+        </p:nvSpPr>
+        <p:spPr>
+          <a:xfrm>
+            <a:off x="5020056" y="1207008"/>
+            <a:ext cx="2121408" cy="914400"/>
+          </a:xfrm>
+          <a:prstGeom prst="rect">
+            <a:avLst/>
+          </a:prstGeom>
+          <a:solidFill>
+            <a:srgbClr val="EEF3F8"/>
+          </a:solidFill>
+          <a:ln w="9525">
+            <a:solidFill>
+              <a:srgbClr val="D6DAE0"/>
+            </a:solidFill>
+            <a:prstDash val="solid"/>
+          </a:ln>
+        </p:spPr>
+      </p:sp>
+      <p:sp>
+        <p:nvSpPr>
+          <p:cNvPr id="11" name="Text 9"/>
+          <p:cNvSpPr/>
+          <p:nvPr/>
+        </p:nvSpPr>
+        <p:spPr>
+          <a:xfrm>
+            <a:off x="5020056" y="1280160"/>
+            <a:ext cx="2121408" cy="457200"/>
+          </a:xfrm>
+          <a:prstGeom prst="rect">
+            <a:avLst/>
+          </a:prstGeom>
+          <a:noFill/>
+          <a:ln/>
+        </p:spPr>
+        <p:txBody>
+          <a:bodyPr wrap="square" rtlCol="0" anchor="ctr"/>
+          <a:lstStyle/>
+          <a:p>
+            <a:pPr algn="ctr" indent="0" marL="0">
+              <a:buNone/>
+            </a:pPr>
+            <a:r>
+              <a:rPr lang="en-US" sz="2100" b="1" dirty="0">
+                <a:solidFill>
+                  <a:srgbClr val="3D5A3D"/>
+                </a:solidFill>
+                <a:latin typeface="Arial" pitchFamily="34" charset="0"/>
+                <a:ea typeface="Arial" pitchFamily="34" charset="-122"/>
+                <a:cs typeface="Arial" pitchFamily="34" charset="-120"/>
+              </a:rPr>
+              <a:t>0</a:t>
+            </a:r>
+            <a:endParaRPr lang="en-US" sz="2100" dirty="0"/>
+          </a:p>
+        </p:txBody>
+      </p:sp>
+      <p:sp>
+        <p:nvSpPr>
+          <p:cNvPr id="12" name="Text 10"/>
+          <p:cNvSpPr/>
+          <p:nvPr/>
+        </p:nvSpPr>
+        <p:spPr>
+          <a:xfrm>
+            <a:off x="5074920" y="1700784"/>
+            <a:ext cx="2011680" cy="384048"/>
+          </a:xfrm>
+          <a:prstGeom prst="rect">
+            <a:avLst/>
+          </a:prstGeom>
+          <a:noFill/>
+          <a:ln/>
+        </p:spPr>
+        <p:txBody>
+          <a:bodyPr wrap="square" rtlCol="0" anchor="ctr"/>
+          <a:lstStyle/>
+          <a:p>
+            <a:pPr algn="ctr" indent="0" marL="0">
+              <a:buNone/>
+            </a:pPr>
+            <a:r>
+              <a:rPr lang="en-US" sz="880" dirty="0">
+                <a:solidFill>
+                  <a:srgbClr val="5A6470"/>
+                </a:solidFill>
+                <a:latin typeface="Arial" pitchFamily="34" charset="0"/>
+                <a:ea typeface="Arial" pitchFamily="34" charset="-122"/>
+                <a:cs typeface="Arial" pitchFamily="34" charset="-120"/>
+              </a:rPr>
+              <a:t>false alarms on negatives</a:t>
+            </a:r>
+            <a:endParaRPr lang="en-US" sz="880" dirty="0"/>
+          </a:p>
+        </p:txBody>
+      </p:sp>
+      <p:sp>
+        <p:nvSpPr>
+          <p:cNvPr id="13" name="Shape 11"/>
+          <p:cNvSpPr/>
+          <p:nvPr/>
+        </p:nvSpPr>
+        <p:spPr>
+          <a:xfrm>
+            <a:off x="7278624" y="1207008"/>
+            <a:ext cx="2121408" cy="914400"/>
+          </a:xfrm>
+          <a:prstGeom prst="rect">
+            <a:avLst/>
+          </a:prstGeom>
+          <a:solidFill>
+            <a:srgbClr val="EEF3F8"/>
+          </a:solidFill>
+          <a:ln w="9525">
+            <a:solidFill>
+              <a:srgbClr val="D6DAE0"/>
+            </a:solidFill>
+            <a:prstDash val="solid"/>
+          </a:ln>
+        </p:spPr>
+      </p:sp>
+      <p:sp>
+        <p:nvSpPr>
+          <p:cNvPr id="14" name="Text 12"/>
+          <p:cNvSpPr/>
+          <p:nvPr/>
+        </p:nvSpPr>
+        <p:spPr>
+          <a:xfrm>
+            <a:off x="7278624" y="1280160"/>
+            <a:ext cx="2121408" cy="457200"/>
+          </a:xfrm>
+          <a:prstGeom prst="rect">
+            <a:avLst/>
+          </a:prstGeom>
+          <a:noFill/>
+          <a:ln/>
+        </p:spPr>
+        <p:txBody>
+          <a:bodyPr wrap="square" rtlCol="0" anchor="ctr"/>
+          <a:lstStyle/>
+          <a:p>
+            <a:pPr algn="ctr" indent="0" marL="0">
+              <a:buNone/>
+            </a:pPr>
+            <a:r>
+              <a:rPr lang="en-US" sz="2100" b="1" dirty="0">
+                <a:solidFill>
+                  <a:srgbClr val="1F4E79"/>
+                </a:solidFill>
+                <a:latin typeface="Arial" pitchFamily="34" charset="0"/>
+                <a:ea typeface="Arial" pitchFamily="34" charset="-122"/>
+                <a:cs typeface="Arial" pitchFamily="34" charset="-120"/>
+              </a:rPr>
+              <a:t>15.9 ms</a:t>
+            </a:r>
+            <a:endParaRPr lang="en-US" sz="2100" dirty="0"/>
+          </a:p>
+        </p:txBody>
+      </p:sp>
+      <p:sp>
+        <p:nvSpPr>
+          <p:cNvPr id="15" name="Text 13"/>
+          <p:cNvSpPr/>
+          <p:nvPr/>
+        </p:nvSpPr>
+        <p:spPr>
+          <a:xfrm>
+            <a:off x="7333488" y="1700784"/>
+            <a:ext cx="2011680" cy="384048"/>
+          </a:xfrm>
+          <a:prstGeom prst="rect">
+            <a:avLst/>
+          </a:prstGeom>
+          <a:noFill/>
+          <a:ln/>
+        </p:spPr>
+        <p:txBody>
+          <a:bodyPr wrap="square" rtlCol="0" anchor="ctr"/>
+          <a:lstStyle/>
+          <a:p>
+            <a:pPr algn="ctr" indent="0" marL="0">
+              <a:buNone/>
+            </a:pPr>
+            <a:r>
+              <a:rPr lang="en-US" sz="880" dirty="0">
+                <a:solidFill>
+                  <a:srgbClr val="5A6470"/>
+                </a:solidFill>
+                <a:latin typeface="Arial" pitchFamily="34" charset="0"/>
+                <a:ea typeface="Arial" pitchFamily="34" charset="-122"/>
+                <a:cs typeface="Arial" pitchFamily="34" charset="-120"/>
+              </a:rPr>
+              <a:t>local pipeline p50 (175 ms budget)</a:t>
+            </a:r>
+            <a:endParaRPr lang="en-US" sz="880" dirty="0"/>
+          </a:p>
+        </p:txBody>
+      </p:sp>
+      <p:sp>
+        <p:nvSpPr>
+          <p:cNvPr id="16" name="Shape 14"/>
+          <p:cNvSpPr/>
+          <p:nvPr/>
+        </p:nvSpPr>
+        <p:spPr>
+          <a:xfrm>
+            <a:off x="9537192" y="1207008"/>
+            <a:ext cx="2121408" cy="914400"/>
+          </a:xfrm>
+          <a:prstGeom prst="rect">
+            <a:avLst/>
+          </a:prstGeom>
+          <a:solidFill>
+            <a:srgbClr val="EEF3F8"/>
+          </a:solidFill>
+          <a:ln w="9525">
+            <a:solidFill>
+              <a:srgbClr val="D6DAE0"/>
+            </a:solidFill>
+            <a:prstDash val="solid"/>
+          </a:ln>
+        </p:spPr>
+      </p:sp>
+      <p:sp>
+        <p:nvSpPr>
+          <p:cNvPr id="17" name="Text 15"/>
+          <p:cNvSpPr/>
+          <p:nvPr/>
+        </p:nvSpPr>
+        <p:spPr>
+          <a:xfrm>
+            <a:off x="9537192" y="1280160"/>
+            <a:ext cx="2121408" cy="457200"/>
+          </a:xfrm>
+          <a:prstGeom prst="rect">
+            <a:avLst/>
+          </a:prstGeom>
+          <a:noFill/>
+          <a:ln/>
+        </p:spPr>
+        <p:txBody>
+          <a:bodyPr wrap="square" rtlCol="0" anchor="ctr"/>
+          <a:lstStyle/>
+          <a:p>
+            <a:pPr algn="ctr" indent="0" marL="0">
+              <a:buNone/>
+            </a:pPr>
+            <a:r>
+              <a:rPr lang="en-US" sz="2100" b="1" dirty="0">
+                <a:solidFill>
+                  <a:srgbClr val="1F4E79"/>
+                </a:solidFill>
+                <a:latin typeface="Arial" pitchFamily="34" charset="0"/>
+                <a:ea typeface="Arial" pitchFamily="34" charset="-122"/>
+                <a:cs typeface="Arial" pitchFamily="34" charset="-120"/>
+              </a:rPr>
+              <a:t>10 / 10</a:t>
+            </a:r>
+            <a:endParaRPr lang="en-US" sz="2100" dirty="0"/>
+          </a:p>
+        </p:txBody>
+      </p:sp>
+      <p:sp>
+        <p:nvSpPr>
+          <p:cNvPr id="18" name="Text 16"/>
+          <p:cNvSpPr/>
+          <p:nvPr/>
+        </p:nvSpPr>
+        <p:spPr>
+          <a:xfrm>
+            <a:off x="9592056" y="1700784"/>
+            <a:ext cx="2011680" cy="384048"/>
+          </a:xfrm>
+          <a:prstGeom prst="rect">
+            <a:avLst/>
+          </a:prstGeom>
+          <a:noFill/>
+          <a:ln/>
+        </p:spPr>
+        <p:txBody>
+          <a:bodyPr wrap="square" rtlCol="0" anchor="ctr"/>
+          <a:lstStyle/>
+          <a:p>
+            <a:pPr algn="ctr" indent="0" marL="0">
+              <a:buNone/>
+            </a:pPr>
+            <a:r>
+              <a:rPr lang="en-US" sz="880" dirty="0">
+                <a:solidFill>
+                  <a:srgbClr val="5A6470"/>
+                </a:solidFill>
+                <a:latin typeface="Arial" pitchFamily="34" charset="0"/>
+                <a:ea typeface="Arial" pitchFamily="34" charset="-122"/>
+                <a:cs typeface="Arial" pitchFamily="34" charset="-120"/>
+              </a:rPr>
+              <a:t>red team defences hold</a:t>
+            </a:r>
+            <a:endParaRPr lang="en-US" sz="880" dirty="0"/>
+          </a:p>
+        </p:txBody>
+      </p:sp>
+      <p:sp>
+        <p:nvSpPr>
+          <p:cNvPr id="19" name="Text 17"/>
+          <p:cNvSpPr/>
+          <p:nvPr/>
+        </p:nvSpPr>
+        <p:spPr>
+          <a:xfrm>
+            <a:off x="502920" y="2331720"/>
+            <a:ext cx="5760720" cy="274320"/>
+          </a:xfrm>
+          <a:prstGeom prst="rect">
+            <a:avLst/>
+          </a:prstGeom>
+          <a:noFill/>
+          <a:ln/>
+        </p:spPr>
+        <p:txBody>
+          <a:bodyPr wrap="square" rtlCol="0" anchor="ctr"/>
+          <a:lstStyle/>
+          <a:p>
+            <a:pPr indent="0" marL="0">
+              <a:buNone/>
+            </a:pPr>
+            <a:r>
+              <a:rPr lang="en-US" sz="1200" b="1" dirty="0">
+                <a:solidFill>
+                  <a:srgbClr val="1F4E79"/>
+                </a:solidFill>
+                <a:latin typeface="Arial" pitchFamily="34" charset="0"/>
+                <a:ea typeface="Arial" pitchFamily="34" charset="-122"/>
+                <a:cs typeface="Arial" pitchFamily="34" charset="-120"/>
+              </a:rPr>
+              <a:t>Detection quality (RedactBench-Web, Shield tier)</a:t>
+            </a:r>
+            <a:endParaRPr lang="en-US" sz="1200" dirty="0"/>
           </a:p>
         </p:txBody>
       </p:sp>
@@ -5690,21 +6244,20 @@
           </p:nvPr>
         </p:nvGraphicFramePr>
         <p:xfrm>
-          <a:off x="502920" y="1371600"/>
-          <a:ext cx="11155680" cy="914400"/>
+          <a:off x="502920" y="2651760"/>
+          <a:ext cx="5760720" cy="914400"/>
         </p:xfrm>
         <a:graphic>
           <a:graphicData uri="http://schemas.openxmlformats.org/drawingml/2006/table">
             <a:tbl>
               <a:tblPr/>
               <a:tblGrid>
-                <a:gridCol w="2231136"/>
-                <a:gridCol w="2231136"/>
-                <a:gridCol w="2231136"/>
-                <a:gridCol w="2231136"/>
-                <a:gridCol w="2231136"/>
+                <a:gridCol w="3291840"/>
+                <a:gridCol w="731520"/>
+                <a:gridCol w="868680"/>
+                <a:gridCol w="868680"/>
               </a:tblGrid>
-              <a:tr h="502920">
+              <a:tr h="365760">
                 <a:tc>
                   <a:txBody>
                     <a:bodyPr/>
@@ -5722,7 +6275,7 @@
                           <a:ea typeface="Arial" pitchFamily="34" charset="-122"/>
                           <a:cs typeface="Arial" pitchFamily="34" charset="-120"/>
                         </a:rPr>
-                        <a:t>Mode</a:t>
+                        <a:t>Class group</a:t>
                       </a:r>
                       <a:endParaRPr lang="en-US" sz="1100" dirty="0">
                         <a:latin typeface="Arial" charset="0"/>
@@ -5790,7 +6343,7 @@
                           <a:ea typeface="Arial" pitchFamily="34" charset="-122"/>
                           <a:cs typeface="Arial" pitchFamily="34" charset="-120"/>
                         </a:rPr>
-                        <a:t>Micro precision</a:t>
+                        <a:t>Support</a:t>
                       </a:r>
                       <a:endParaRPr lang="en-US" sz="1100" dirty="0">
                         <a:latin typeface="Arial" charset="0"/>
@@ -5858,7 +6411,7 @@
                           <a:ea typeface="Arial" pitchFamily="34" charset="-122"/>
                           <a:cs typeface="Arial" pitchFamily="34" charset="-120"/>
                         </a:rPr>
-                        <a:t>Micro recall</a:t>
+                        <a:t>Precision</a:t>
                       </a:r>
                       <a:endParaRPr lang="en-US" sz="1100" dirty="0">
                         <a:latin typeface="Arial" charset="0"/>
@@ -5926,7 +6479,7 @@
                           <a:ea typeface="Arial" pitchFamily="34" charset="-122"/>
                           <a:cs typeface="Arial" pitchFamily="34" charset="-120"/>
                         </a:rPr>
-                        <a:t>Invariant-class leaks</a:t>
+                        <a:t>Recall</a:t>
                       </a:r>
                       <a:endParaRPr lang="en-US" sz="1100" dirty="0">
                         <a:latin typeface="Arial" charset="0"/>
@@ -5975,6 +6528,73 @@
                     <a:solidFill>
                       <a:srgbClr val="1F4E79"/>
                     </a:solidFill>
+                  </a:tcPr>
+                </a:tc>
+              </a:tr>
+              <a:tr h="365760">
+                <a:tc>
+                  <a:txBody>
+                    <a:bodyPr/>
+                    <a:lstStyle/>
+                    <a:p>
+                      <a:pPr indent="0" marL="0">
+                        <a:buNone/>
+                      </a:pPr>
+                      <a:r>
+                        <a:rPr lang="en-US" sz="1050" dirty="0">
+                          <a:solidFill>
+                            <a:srgbClr val="16181D"/>
+                          </a:solidFill>
+                          <a:latin typeface="Arial" pitchFamily="34" charset="0"/>
+                          <a:ea typeface="Arial" pitchFamily="34" charset="-122"/>
+                          <a:cs typeface="Arial" pitchFamily="34" charset="-120"/>
+                        </a:rPr>
+                        <a:t>Govt IDs: Aadhaar, PAN, GSTIN (checksums)</a:t>
+                      </a:r>
+                      <a:endParaRPr lang="en-US" sz="1050" dirty="0">
+                        <a:latin typeface="Arial" charset="0"/>
+                        <a:ea typeface="Arial" charset="0"/>
+                        <a:cs typeface="Arial" charset="0"/>
+                      </a:endParaRPr>
+                    </a:p>
+                  </a:txBody>
+                  <a:tcPr marL="91440" marR="91440" marT="45720" marB="45720" anchor="ctr">
+                    <a:lnL w="6350" cap="flat" cmpd="sng" algn="ctr">
+                      <a:solidFill>
+                        <a:srgbClr val="D6DAE0"/>
+                      </a:solidFill>
+                      <a:prstDash val="solid"/>
+                      <a:round/>
+                      <a:headEnd type="none" w="med" len="med"/>
+                      <a:tailEnd type="none" w="med" len="med"/>
+                    </a:lnL>
+                    <a:lnR w="6350" cap="flat" cmpd="sng" algn="ctr">
+                      <a:solidFill>
+                        <a:srgbClr val="D6DAE0"/>
+                      </a:solidFill>
+                      <a:prstDash val="solid"/>
+                      <a:round/>
+                      <a:headEnd type="none" w="med" len="med"/>
+                      <a:tailEnd type="none" w="med" len="med"/>
+                    </a:lnR>
+                    <a:lnT w="6350" cap="flat" cmpd="sng" algn="ctr">
+                      <a:solidFill>
+                        <a:srgbClr val="D6DAE0"/>
+                      </a:solidFill>
+                      <a:prstDash val="solid"/>
+                      <a:round/>
+                      <a:headEnd type="none" w="med" len="med"/>
+                      <a:tailEnd type="none" w="med" len="med"/>
+                    </a:lnT>
+                    <a:lnB w="6350" cap="flat" cmpd="sng" algn="ctr">
+                      <a:solidFill>
+                        <a:srgbClr val="D6DAE0"/>
+                      </a:solidFill>
+                      <a:prstDash val="solid"/>
+                      <a:round/>
+                      <a:headEnd type="none" w="med" len="med"/>
+                      <a:tailEnd type="none" w="med" len="med"/>
+                    </a:lnB>
                   </a:tcPr>
                 </a:tc>
                 <a:tc>
@@ -5986,77 +6606,7 @@
                         <a:buNone/>
                       </a:pPr>
                       <a:r>
-                        <a:rPr lang="en-US" sz="1100" b="1" dirty="0">
-                          <a:solidFill>
-                            <a:srgbClr val="FFFFFF"/>
-                          </a:solidFill>
-                          <a:latin typeface="Arial" pitchFamily="34" charset="0"/>
-                          <a:ea typeface="Arial" pitchFamily="34" charset="-122"/>
-                          <a:cs typeface="Arial" pitchFamily="34" charset="-120"/>
-                        </a:rPr>
-                        <a:t>False alarms on negatives</a:t>
-                      </a:r>
-                      <a:endParaRPr lang="en-US" sz="1100" dirty="0">
-                        <a:latin typeface="Arial" charset="0"/>
-                        <a:ea typeface="Arial" charset="0"/>
-                        <a:cs typeface="Arial" charset="0"/>
-                      </a:endParaRPr>
-                    </a:p>
-                  </a:txBody>
-                  <a:tcPr marL="91440" marR="91440" marT="45720" marB="45720" anchor="ctr">
-                    <a:lnL w="6350" cap="flat" cmpd="sng" algn="ctr">
-                      <a:solidFill>
-                        <a:srgbClr val="D6DAE0"/>
-                      </a:solidFill>
-                      <a:prstDash val="solid"/>
-                      <a:round/>
-                      <a:headEnd type="none" w="med" len="med"/>
-                      <a:tailEnd type="none" w="med" len="med"/>
-                    </a:lnL>
-                    <a:lnR w="6350" cap="flat" cmpd="sng" algn="ctr">
-                      <a:solidFill>
-                        <a:srgbClr val="D6DAE0"/>
-                      </a:solidFill>
-                      <a:prstDash val="solid"/>
-                      <a:round/>
-                      <a:headEnd type="none" w="med" len="med"/>
-                      <a:tailEnd type="none" w="med" len="med"/>
-                    </a:lnR>
-                    <a:lnT w="6350" cap="flat" cmpd="sng" algn="ctr">
-                      <a:solidFill>
-                        <a:srgbClr val="D6DAE0"/>
-                      </a:solidFill>
-                      <a:prstDash val="solid"/>
-                      <a:round/>
-                      <a:headEnd type="none" w="med" len="med"/>
-                      <a:tailEnd type="none" w="med" len="med"/>
-                    </a:lnT>
-                    <a:lnB w="6350" cap="flat" cmpd="sng" algn="ctr">
-                      <a:solidFill>
-                        <a:srgbClr val="D6DAE0"/>
-                      </a:solidFill>
-                      <a:prstDash val="solid"/>
-                      <a:round/>
-                      <a:headEnd type="none" w="med" len="med"/>
-                      <a:tailEnd type="none" w="med" len="med"/>
-                    </a:lnB>
-                    <a:solidFill>
-                      <a:srgbClr val="1F4E79"/>
-                    </a:solidFill>
-                  </a:tcPr>
-                </a:tc>
-              </a:tr>
-              <a:tr h="502920">
-                <a:tc>
-                  <a:txBody>
-                    <a:bodyPr/>
-                    <a:lstStyle/>
-                    <a:p>
-                      <a:pPr indent="0" marL="0">
-                        <a:buNone/>
-                      </a:pPr>
-                      <a:r>
-                        <a:rPr lang="en-US" sz="1050" b="1" dirty="0">
+                        <a:rPr lang="en-US" sz="1050" dirty="0">
                           <a:solidFill>
                             <a:srgbClr val="16181D"/>
                           </a:solidFill>
@@ -6064,7 +6614,7 @@
                           <a:ea typeface="Arial" pitchFamily="34" charset="-122"/>
                           <a:cs typeface="Arial" pitchFamily="34" charset="-120"/>
                         </a:rPr>
-                        <a:t>Shield</a:t>
+                        <a:t>7</a:t>
                       </a:r>
                       <a:endParaRPr lang="en-US" sz="1050" dirty="0">
                         <a:latin typeface="Arial" charset="0"/>
@@ -6186,6 +6736,73 @@
                         <a:buNone/>
                       </a:pPr>
                       <a:r>
+                        <a:rPr lang="en-US" sz="1050" b="1" dirty="0">
+                          <a:solidFill>
+                            <a:srgbClr val="3D5A3D"/>
+                          </a:solidFill>
+                          <a:latin typeface="Arial" pitchFamily="34" charset="0"/>
+                          <a:ea typeface="Arial" pitchFamily="34" charset="-122"/>
+                          <a:cs typeface="Arial" pitchFamily="34" charset="-120"/>
+                        </a:rPr>
+                        <a:t>100%</a:t>
+                      </a:r>
+                      <a:endParaRPr lang="en-US" sz="1050" dirty="0">
+                        <a:latin typeface="Arial" charset="0"/>
+                        <a:ea typeface="Arial" charset="0"/>
+                        <a:cs typeface="Arial" charset="0"/>
+                      </a:endParaRPr>
+                    </a:p>
+                  </a:txBody>
+                  <a:tcPr marL="91440" marR="91440" marT="45720" marB="45720" anchor="ctr">
+                    <a:lnL w="6350" cap="flat" cmpd="sng" algn="ctr">
+                      <a:solidFill>
+                        <a:srgbClr val="D6DAE0"/>
+                      </a:solidFill>
+                      <a:prstDash val="solid"/>
+                      <a:round/>
+                      <a:headEnd type="none" w="med" len="med"/>
+                      <a:tailEnd type="none" w="med" len="med"/>
+                    </a:lnL>
+                    <a:lnR w="6350" cap="flat" cmpd="sng" algn="ctr">
+                      <a:solidFill>
+                        <a:srgbClr val="D6DAE0"/>
+                      </a:solidFill>
+                      <a:prstDash val="solid"/>
+                      <a:round/>
+                      <a:headEnd type="none" w="med" len="med"/>
+                      <a:tailEnd type="none" w="med" len="med"/>
+                    </a:lnR>
+                    <a:lnT w="6350" cap="flat" cmpd="sng" algn="ctr">
+                      <a:solidFill>
+                        <a:srgbClr val="D6DAE0"/>
+                      </a:solidFill>
+                      <a:prstDash val="solid"/>
+                      <a:round/>
+                      <a:headEnd type="none" w="med" len="med"/>
+                      <a:tailEnd type="none" w="med" len="med"/>
+                    </a:lnT>
+                    <a:lnB w="6350" cap="flat" cmpd="sng" algn="ctr">
+                      <a:solidFill>
+                        <a:srgbClr val="D6DAE0"/>
+                      </a:solidFill>
+                      <a:prstDash val="solid"/>
+                      <a:round/>
+                      <a:headEnd type="none" w="med" len="med"/>
+                      <a:tailEnd type="none" w="med" len="med"/>
+                    </a:lnB>
+                  </a:tcPr>
+                </a:tc>
+              </a:tr>
+              <a:tr h="365760">
+                <a:tc>
+                  <a:txBody>
+                    <a:bodyPr/>
+                    <a:lstStyle/>
+                    <a:p>
+                      <a:pPr indent="0" marL="0">
+                        <a:buNone/>
+                      </a:pPr>
+                      <a:r>
                         <a:rPr lang="en-US" sz="1050" dirty="0">
                           <a:solidFill>
                             <a:srgbClr val="16181D"/>
@@ -6194,7 +6811,72 @@
                           <a:ea typeface="Arial" pitchFamily="34" charset="-122"/>
                           <a:cs typeface="Arial" pitchFamily="34" charset="-120"/>
                         </a:rPr>
-                        <a:t>91.4%</a:t>
+                        <a:t>Financial: card, IFSC, bank a/c, UPI, amounts</a:t>
+                      </a:r>
+                      <a:endParaRPr lang="en-US" sz="1050" dirty="0">
+                        <a:latin typeface="Arial" charset="0"/>
+                        <a:ea typeface="Arial" charset="0"/>
+                        <a:cs typeface="Arial" charset="0"/>
+                      </a:endParaRPr>
+                    </a:p>
+                  </a:txBody>
+                  <a:tcPr marL="91440" marR="91440" marT="45720" marB="45720" anchor="ctr">
+                    <a:lnL w="6350" cap="flat" cmpd="sng" algn="ctr">
+                      <a:solidFill>
+                        <a:srgbClr val="D6DAE0"/>
+                      </a:solidFill>
+                      <a:prstDash val="solid"/>
+                      <a:round/>
+                      <a:headEnd type="none" w="med" len="med"/>
+                      <a:tailEnd type="none" w="med" len="med"/>
+                    </a:lnL>
+                    <a:lnR w="6350" cap="flat" cmpd="sng" algn="ctr">
+                      <a:solidFill>
+                        <a:srgbClr val="D6DAE0"/>
+                      </a:solidFill>
+                      <a:prstDash val="solid"/>
+                      <a:round/>
+                      <a:headEnd type="none" w="med" len="med"/>
+                      <a:tailEnd type="none" w="med" len="med"/>
+                    </a:lnR>
+                    <a:lnT w="6350" cap="flat" cmpd="sng" algn="ctr">
+                      <a:solidFill>
+                        <a:srgbClr val="D6DAE0"/>
+                      </a:solidFill>
+                      <a:prstDash val="solid"/>
+                      <a:round/>
+                      <a:headEnd type="none" w="med" len="med"/>
+                      <a:tailEnd type="none" w="med" len="med"/>
+                    </a:lnT>
+                    <a:lnB w="6350" cap="flat" cmpd="sng" algn="ctr">
+                      <a:solidFill>
+                        <a:srgbClr val="D6DAE0"/>
+                      </a:solidFill>
+                      <a:prstDash val="solid"/>
+                      <a:round/>
+                      <a:headEnd type="none" w="med" len="med"/>
+                      <a:tailEnd type="none" w="med" len="med"/>
+                    </a:lnB>
+                  </a:tcPr>
+                </a:tc>
+                <a:tc>
+                  <a:txBody>
+                    <a:bodyPr/>
+                    <a:lstStyle/>
+                    <a:p>
+                      <a:pPr indent="0" marL="0">
+                        <a:buNone/>
+                      </a:pPr>
+                      <a:r>
+                        <a:rPr lang="en-US" sz="1050" dirty="0">
+                          <a:solidFill>
+                            <a:srgbClr val="16181D"/>
+                          </a:solidFill>
+                          <a:latin typeface="Arial" pitchFamily="34" charset="0"/>
+                          <a:ea typeface="Arial" pitchFamily="34" charset="-122"/>
+                          <a:cs typeface="Arial" pitchFamily="34" charset="-120"/>
+                        </a:rPr>
+                        <a:t>8</a:t>
                       </a:r>
                       <a:endParaRPr lang="en-US" sz="1050" dirty="0">
                         <a:latin typeface="Arial" charset="0"/>
@@ -6259,7 +6941,7 @@
                           <a:ea typeface="Arial" pitchFamily="34" charset="-122"/>
                           <a:cs typeface="Arial" pitchFamily="34" charset="-120"/>
                         </a:rPr>
-                        <a:t>0</a:t>
+                        <a:t>100%</a:t>
                       </a:r>
                       <a:endParaRPr lang="en-US" sz="1050" dirty="0">
                         <a:latin typeface="Arial" charset="0"/>
@@ -6324,7 +7006,7 @@
                           <a:ea typeface="Arial" pitchFamily="34" charset="-122"/>
                           <a:cs typeface="Arial" pitchFamily="34" charset="-120"/>
                         </a:rPr>
-                        <a:t>0</a:t>
+                        <a:t>100%</a:t>
                       </a:r>
                       <a:endParaRPr lang="en-US" sz="1050" dirty="0">
                         <a:latin typeface="Arial" charset="0"/>
@@ -6373,7 +7055,7 @@
                   </a:tcPr>
                 </a:tc>
               </a:tr>
-              <a:tr h="502920">
+              <a:tr h="365760">
                 <a:tc>
                   <a:txBody>
                     <a:bodyPr/>
@@ -6383,7 +7065,7 @@
                         <a:buNone/>
                       </a:pPr>
                       <a:r>
-                        <a:rPr lang="en-US" sz="1050" b="1" dirty="0">
+                        <a:rPr lang="en-US" sz="1050" dirty="0">
                           <a:solidFill>
                             <a:srgbClr val="16181D"/>
                           </a:solidFill>
@@ -6391,7 +7073,7 @@
                           <a:ea typeface="Arial" pitchFamily="34" charset="-122"/>
                           <a:cs typeface="Arial" pitchFamily="34" charset="-120"/>
                         </a:rPr>
-                        <a:t>Fortress</a:t>
+                        <a:t>Contact: email, phone (IN)</a:t>
                       </a:r>
                       <a:endParaRPr lang="en-US" sz="1050" dirty="0">
                         <a:latin typeface="Arial" charset="0"/>
@@ -6456,7 +7138,204 @@
                           <a:ea typeface="Arial" pitchFamily="34" charset="-122"/>
                           <a:cs typeface="Arial" pitchFamily="34" charset="-120"/>
                         </a:rPr>
-                        <a:t>97.1%</a:t>
+                        <a:t>9</a:t>
+                      </a:r>
+                      <a:endParaRPr lang="en-US" sz="1050" dirty="0">
+                        <a:latin typeface="Arial" charset="0"/>
+                        <a:ea typeface="Arial" charset="0"/>
+                        <a:cs typeface="Arial" charset="0"/>
+                      </a:endParaRPr>
+                    </a:p>
+                  </a:txBody>
+                  <a:tcPr marL="91440" marR="91440" marT="45720" marB="45720" anchor="ctr">
+                    <a:lnL w="6350" cap="flat" cmpd="sng" algn="ctr">
+                      <a:solidFill>
+                        <a:srgbClr val="D6DAE0"/>
+                      </a:solidFill>
+                      <a:prstDash val="solid"/>
+                      <a:round/>
+                      <a:headEnd type="none" w="med" len="med"/>
+                      <a:tailEnd type="none" w="med" len="med"/>
+                    </a:lnL>
+                    <a:lnR w="6350" cap="flat" cmpd="sng" algn="ctr">
+                      <a:solidFill>
+                        <a:srgbClr val="D6DAE0"/>
+                      </a:solidFill>
+                      <a:prstDash val="solid"/>
+                      <a:round/>
+                      <a:headEnd type="none" w="med" len="med"/>
+                      <a:tailEnd type="none" w="med" len="med"/>
+                    </a:lnR>
+                    <a:lnT w="6350" cap="flat" cmpd="sng" algn="ctr">
+                      <a:solidFill>
+                        <a:srgbClr val="D6DAE0"/>
+                      </a:solidFill>
+                      <a:prstDash val="solid"/>
+                      <a:round/>
+                      <a:headEnd type="none" w="med" len="med"/>
+                      <a:tailEnd type="none" w="med" len="med"/>
+                    </a:lnT>
+                    <a:lnB w="6350" cap="flat" cmpd="sng" algn="ctr">
+                      <a:solidFill>
+                        <a:srgbClr val="D6DAE0"/>
+                      </a:solidFill>
+                      <a:prstDash val="solid"/>
+                      <a:round/>
+                      <a:headEnd type="none" w="med" len="med"/>
+                      <a:tailEnd type="none" w="med" len="med"/>
+                    </a:lnB>
+                  </a:tcPr>
+                </a:tc>
+                <a:tc>
+                  <a:txBody>
+                    <a:bodyPr/>
+                    <a:lstStyle/>
+                    <a:p>
+                      <a:pPr indent="0" marL="0">
+                        <a:buNone/>
+                      </a:pPr>
+                      <a:r>
+                        <a:rPr lang="en-US" sz="1050" b="1" dirty="0">
+                          <a:solidFill>
+                            <a:srgbClr val="3D5A3D"/>
+                          </a:solidFill>
+                          <a:latin typeface="Arial" pitchFamily="34" charset="0"/>
+                          <a:ea typeface="Arial" pitchFamily="34" charset="-122"/>
+                          <a:cs typeface="Arial" pitchFamily="34" charset="-120"/>
+                        </a:rPr>
+                        <a:t>100%</a:t>
+                      </a:r>
+                      <a:endParaRPr lang="en-US" sz="1050" dirty="0">
+                        <a:latin typeface="Arial" charset="0"/>
+                        <a:ea typeface="Arial" charset="0"/>
+                        <a:cs typeface="Arial" charset="0"/>
+                      </a:endParaRPr>
+                    </a:p>
+                  </a:txBody>
+                  <a:tcPr marL="91440" marR="91440" marT="45720" marB="45720" anchor="ctr">
+                    <a:lnL w="6350" cap="flat" cmpd="sng" algn="ctr">
+                      <a:solidFill>
+                        <a:srgbClr val="D6DAE0"/>
+                      </a:solidFill>
+                      <a:prstDash val="solid"/>
+                      <a:round/>
+                      <a:headEnd type="none" w="med" len="med"/>
+                      <a:tailEnd type="none" w="med" len="med"/>
+                    </a:lnL>
+                    <a:lnR w="6350" cap="flat" cmpd="sng" algn="ctr">
+                      <a:solidFill>
+                        <a:srgbClr val="D6DAE0"/>
+                      </a:solidFill>
+                      <a:prstDash val="solid"/>
+                      <a:round/>
+                      <a:headEnd type="none" w="med" len="med"/>
+                      <a:tailEnd type="none" w="med" len="med"/>
+                    </a:lnR>
+                    <a:lnT w="6350" cap="flat" cmpd="sng" algn="ctr">
+                      <a:solidFill>
+                        <a:srgbClr val="D6DAE0"/>
+                      </a:solidFill>
+                      <a:prstDash val="solid"/>
+                      <a:round/>
+                      <a:headEnd type="none" w="med" len="med"/>
+                      <a:tailEnd type="none" w="med" len="med"/>
+                    </a:lnT>
+                    <a:lnB w="6350" cap="flat" cmpd="sng" algn="ctr">
+                      <a:solidFill>
+                        <a:srgbClr val="D6DAE0"/>
+                      </a:solidFill>
+                      <a:prstDash val="solid"/>
+                      <a:round/>
+                      <a:headEnd type="none" w="med" len="med"/>
+                      <a:tailEnd type="none" w="med" len="med"/>
+                    </a:lnB>
+                  </a:tcPr>
+                </a:tc>
+                <a:tc>
+                  <a:txBody>
+                    <a:bodyPr/>
+                    <a:lstStyle/>
+                    <a:p>
+                      <a:pPr indent="0" marL="0">
+                        <a:buNone/>
+                      </a:pPr>
+                      <a:r>
+                        <a:rPr lang="en-US" sz="1050" b="1" dirty="0">
+                          <a:solidFill>
+                            <a:srgbClr val="3D5A3D"/>
+                          </a:solidFill>
+                          <a:latin typeface="Arial" pitchFamily="34" charset="0"/>
+                          <a:ea typeface="Arial" pitchFamily="34" charset="-122"/>
+                          <a:cs typeface="Arial" pitchFamily="34" charset="-120"/>
+                        </a:rPr>
+                        <a:t>100%</a:t>
+                      </a:r>
+                      <a:endParaRPr lang="en-US" sz="1050" dirty="0">
+                        <a:latin typeface="Arial" charset="0"/>
+                        <a:ea typeface="Arial" charset="0"/>
+                        <a:cs typeface="Arial" charset="0"/>
+                      </a:endParaRPr>
+                    </a:p>
+                  </a:txBody>
+                  <a:tcPr marL="91440" marR="91440" marT="45720" marB="45720" anchor="ctr">
+                    <a:lnL w="6350" cap="flat" cmpd="sng" algn="ctr">
+                      <a:solidFill>
+                        <a:srgbClr val="D6DAE0"/>
+                      </a:solidFill>
+                      <a:prstDash val="solid"/>
+                      <a:round/>
+                      <a:headEnd type="none" w="med" len="med"/>
+                      <a:tailEnd type="none" w="med" len="med"/>
+                    </a:lnL>
+                    <a:lnR w="6350" cap="flat" cmpd="sng" algn="ctr">
+                      <a:solidFill>
+                        <a:srgbClr val="D6DAE0"/>
+                      </a:solidFill>
+                      <a:prstDash val="solid"/>
+                      <a:round/>
+                      <a:headEnd type="none" w="med" len="med"/>
+                      <a:tailEnd type="none" w="med" len="med"/>
+                    </a:lnR>
+                    <a:lnT w="6350" cap="flat" cmpd="sng" algn="ctr">
+                      <a:solidFill>
+                        <a:srgbClr val="D6DAE0"/>
+                      </a:solidFill>
+                      <a:prstDash val="solid"/>
+                      <a:round/>
+                      <a:headEnd type="none" w="med" len="med"/>
+                      <a:tailEnd type="none" w="med" len="med"/>
+                    </a:lnT>
+                    <a:lnB w="6350" cap="flat" cmpd="sng" algn="ctr">
+                      <a:solidFill>
+                        <a:srgbClr val="D6DAE0"/>
+                      </a:solidFill>
+                      <a:prstDash val="solid"/>
+                      <a:round/>
+                      <a:headEnd type="none" w="med" len="med"/>
+                      <a:tailEnd type="none" w="med" len="med"/>
+                    </a:lnB>
+                  </a:tcPr>
+                </a:tc>
+              </a:tr>
+              <a:tr h="365760">
+                <a:tc>
+                  <a:txBody>
+                    <a:bodyPr/>
+                    <a:lstStyle/>
+                    <a:p>
+                      <a:pPr indent="0" marL="0">
+                        <a:buNone/>
+                      </a:pPr>
+                      <a:r>
+                        <a:rPr lang="en-US" sz="1050" dirty="0">
+                          <a:solidFill>
+                            <a:srgbClr val="16181D"/>
+                          </a:solidFill>
+                          <a:latin typeface="Arial" pitchFamily="34" charset="0"/>
+                          <a:ea typeface="Arial" pitchFamily="34" charset="-122"/>
+                          <a:cs typeface="Arial" pitchFamily="34" charset="-120"/>
+                        </a:rPr>
+                        <a:t>Visual: faces, QR, unexplained media</a:t>
                       </a:r>
                       <a:endParaRPr lang="en-US" sz="1050" dirty="0">
                         <a:latin typeface="Arial" charset="0"/>
@@ -6521,7 +7400,7 @@
                           <a:ea typeface="Arial" pitchFamily="34" charset="-122"/>
                           <a:cs typeface="Arial" pitchFamily="34" charset="-120"/>
                         </a:rPr>
-                        <a:t>94.3%</a:t>
+                        <a:t>5</a:t>
                       </a:r>
                       <a:endParaRPr lang="en-US" sz="1050" dirty="0">
                         <a:latin typeface="Arial" charset="0"/>
@@ -6586,7 +7465,139 @@
                           <a:ea typeface="Arial" pitchFamily="34" charset="-122"/>
                           <a:cs typeface="Arial" pitchFamily="34" charset="-120"/>
                         </a:rPr>
-                        <a:t>0</a:t>
+                        <a:t>100%</a:t>
+                      </a:r>
+                      <a:endParaRPr lang="en-US" sz="1050" dirty="0">
+                        <a:latin typeface="Arial" charset="0"/>
+                        <a:ea typeface="Arial" charset="0"/>
+                        <a:cs typeface="Arial" charset="0"/>
+                      </a:endParaRPr>
+                    </a:p>
+                  </a:txBody>
+                  <a:tcPr marL="91440" marR="91440" marT="45720" marB="45720" anchor="ctr">
+                    <a:lnL w="6350" cap="flat" cmpd="sng" algn="ctr">
+                      <a:solidFill>
+                        <a:srgbClr val="D6DAE0"/>
+                      </a:solidFill>
+                      <a:prstDash val="solid"/>
+                      <a:round/>
+                      <a:headEnd type="none" w="med" len="med"/>
+                      <a:tailEnd type="none" w="med" len="med"/>
+                    </a:lnL>
+                    <a:lnR w="6350" cap="flat" cmpd="sng" algn="ctr">
+                      <a:solidFill>
+                        <a:srgbClr val="D6DAE0"/>
+                      </a:solidFill>
+                      <a:prstDash val="solid"/>
+                      <a:round/>
+                      <a:headEnd type="none" w="med" len="med"/>
+                      <a:tailEnd type="none" w="med" len="med"/>
+                    </a:lnR>
+                    <a:lnT w="6350" cap="flat" cmpd="sng" algn="ctr">
+                      <a:solidFill>
+                        <a:srgbClr val="D6DAE0"/>
+                      </a:solidFill>
+                      <a:prstDash val="solid"/>
+                      <a:round/>
+                      <a:headEnd type="none" w="med" len="med"/>
+                      <a:tailEnd type="none" w="med" len="med"/>
+                    </a:lnT>
+                    <a:lnB w="6350" cap="flat" cmpd="sng" algn="ctr">
+                      <a:solidFill>
+                        <a:srgbClr val="D6DAE0"/>
+                      </a:solidFill>
+                      <a:prstDash val="solid"/>
+                      <a:round/>
+                      <a:headEnd type="none" w="med" len="med"/>
+                      <a:tailEnd type="none" w="med" len="med"/>
+                    </a:lnB>
+                  </a:tcPr>
+                </a:tc>
+                <a:tc>
+                  <a:txBody>
+                    <a:bodyPr/>
+                    <a:lstStyle/>
+                    <a:p>
+                      <a:pPr indent="0" marL="0">
+                        <a:buNone/>
+                      </a:pPr>
+                      <a:r>
+                        <a:rPr lang="en-US" sz="1050" b="1" dirty="0">
+                          <a:solidFill>
+                            <a:srgbClr val="3D5A3D"/>
+                          </a:solidFill>
+                          <a:latin typeface="Arial" pitchFamily="34" charset="0"/>
+                          <a:ea typeface="Arial" pitchFamily="34" charset="-122"/>
+                          <a:cs typeface="Arial" pitchFamily="34" charset="-120"/>
+                        </a:rPr>
+                        <a:t>100%</a:t>
+                      </a:r>
+                      <a:endParaRPr lang="en-US" sz="1050" dirty="0">
+                        <a:latin typeface="Arial" charset="0"/>
+                        <a:ea typeface="Arial" charset="0"/>
+                        <a:cs typeface="Arial" charset="0"/>
+                      </a:endParaRPr>
+                    </a:p>
+                  </a:txBody>
+                  <a:tcPr marL="91440" marR="91440" marT="45720" marB="45720" anchor="ctr">
+                    <a:lnL w="6350" cap="flat" cmpd="sng" algn="ctr">
+                      <a:solidFill>
+                        <a:srgbClr val="D6DAE0"/>
+                      </a:solidFill>
+                      <a:prstDash val="solid"/>
+                      <a:round/>
+                      <a:headEnd type="none" w="med" len="med"/>
+                      <a:tailEnd type="none" w="med" len="med"/>
+                    </a:lnL>
+                    <a:lnR w="6350" cap="flat" cmpd="sng" algn="ctr">
+                      <a:solidFill>
+                        <a:srgbClr val="D6DAE0"/>
+                      </a:solidFill>
+                      <a:prstDash val="solid"/>
+                      <a:round/>
+                      <a:headEnd type="none" w="med" len="med"/>
+                      <a:tailEnd type="none" w="med" len="med"/>
+                    </a:lnR>
+                    <a:lnT w="6350" cap="flat" cmpd="sng" algn="ctr">
+                      <a:solidFill>
+                        <a:srgbClr val="D6DAE0"/>
+                      </a:solidFill>
+                      <a:prstDash val="solid"/>
+                      <a:round/>
+                      <a:headEnd type="none" w="med" len="med"/>
+                      <a:tailEnd type="none" w="med" len="med"/>
+                    </a:lnT>
+                    <a:lnB w="6350" cap="flat" cmpd="sng" algn="ctr">
+                      <a:solidFill>
+                        <a:srgbClr val="D6DAE0"/>
+                      </a:solidFill>
+                      <a:prstDash val="solid"/>
+                      <a:round/>
+                      <a:headEnd type="none" w="med" len="med"/>
+                      <a:tailEnd type="none" w="med" len="med"/>
+                    </a:lnB>
+                  </a:tcPr>
+                </a:tc>
+              </a:tr>
+              <a:tr h="365760">
+                <a:tc>
+                  <a:txBody>
+                    <a:bodyPr/>
+                    <a:lstStyle/>
+                    <a:p>
+                      <a:pPr indent="0" marL="0">
+                        <a:buNone/>
+                      </a:pPr>
+                      <a:r>
+                        <a:rPr lang="en-US" sz="1050" dirty="0">
+                          <a:solidFill>
+                            <a:srgbClr val="16181D"/>
+                          </a:solidFill>
+                          <a:latin typeface="Arial" pitchFamily="34" charset="0"/>
+                          <a:ea typeface="Arial" pitchFamily="34" charset="-122"/>
+                          <a:cs typeface="Arial" pitchFamily="34" charset="-120"/>
+                        </a:rPr>
+                        <a:t>DOB, vehicle registration</a:t>
                       </a:r>
                       <a:endParaRPr lang="en-US" sz="1050" dirty="0">
                         <a:latin typeface="Arial" charset="0"/>
@@ -6651,7 +7662,7 @@
                           <a:ea typeface="Arial" pitchFamily="34" charset="-122"/>
                           <a:cs typeface="Arial" pitchFamily="34" charset="-120"/>
                         </a:rPr>
-                        <a:t>1 (an appointment date)</a:t>
+                        <a:t>2</a:t>
                       </a:r>
                       <a:endParaRPr lang="en-US" sz="1050" dirty="0">
                         <a:latin typeface="Arial" charset="0"/>
@@ -6699,6 +7710,922 @@
                     </a:lnB>
                   </a:tcPr>
                 </a:tc>
+                <a:tc>
+                  <a:txBody>
+                    <a:bodyPr/>
+                    <a:lstStyle/>
+                    <a:p>
+                      <a:pPr indent="0" marL="0">
+                        <a:buNone/>
+                      </a:pPr>
+                      <a:r>
+                        <a:rPr lang="en-US" sz="1050" b="1" dirty="0">
+                          <a:solidFill>
+                            <a:srgbClr val="3D5A3D"/>
+                          </a:solidFill>
+                          <a:latin typeface="Arial" pitchFamily="34" charset="0"/>
+                          <a:ea typeface="Arial" pitchFamily="34" charset="-122"/>
+                          <a:cs typeface="Arial" pitchFamily="34" charset="-120"/>
+                        </a:rPr>
+                        <a:t>100%</a:t>
+                      </a:r>
+                      <a:endParaRPr lang="en-US" sz="1050" dirty="0">
+                        <a:latin typeface="Arial" charset="0"/>
+                        <a:ea typeface="Arial" charset="0"/>
+                        <a:cs typeface="Arial" charset="0"/>
+                      </a:endParaRPr>
+                    </a:p>
+                  </a:txBody>
+                  <a:tcPr marL="91440" marR="91440" marT="45720" marB="45720" anchor="ctr">
+                    <a:lnL w="6350" cap="flat" cmpd="sng" algn="ctr">
+                      <a:solidFill>
+                        <a:srgbClr val="D6DAE0"/>
+                      </a:solidFill>
+                      <a:prstDash val="solid"/>
+                      <a:round/>
+                      <a:headEnd type="none" w="med" len="med"/>
+                      <a:tailEnd type="none" w="med" len="med"/>
+                    </a:lnL>
+                    <a:lnR w="6350" cap="flat" cmpd="sng" algn="ctr">
+                      <a:solidFill>
+                        <a:srgbClr val="D6DAE0"/>
+                      </a:solidFill>
+                      <a:prstDash val="solid"/>
+                      <a:round/>
+                      <a:headEnd type="none" w="med" len="med"/>
+                      <a:tailEnd type="none" w="med" len="med"/>
+                    </a:lnR>
+                    <a:lnT w="6350" cap="flat" cmpd="sng" algn="ctr">
+                      <a:solidFill>
+                        <a:srgbClr val="D6DAE0"/>
+                      </a:solidFill>
+                      <a:prstDash val="solid"/>
+                      <a:round/>
+                      <a:headEnd type="none" w="med" len="med"/>
+                      <a:tailEnd type="none" w="med" len="med"/>
+                    </a:lnT>
+                    <a:lnB w="6350" cap="flat" cmpd="sng" algn="ctr">
+                      <a:solidFill>
+                        <a:srgbClr val="D6DAE0"/>
+                      </a:solidFill>
+                      <a:prstDash val="solid"/>
+                      <a:round/>
+                      <a:headEnd type="none" w="med" len="med"/>
+                      <a:tailEnd type="none" w="med" len="med"/>
+                    </a:lnB>
+                  </a:tcPr>
+                </a:tc>
+                <a:tc>
+                  <a:txBody>
+                    <a:bodyPr/>
+                    <a:lstStyle/>
+                    <a:p>
+                      <a:pPr indent="0" marL="0">
+                        <a:buNone/>
+                      </a:pPr>
+                      <a:r>
+                        <a:rPr lang="en-US" sz="1050" b="1" dirty="0">
+                          <a:solidFill>
+                            <a:srgbClr val="3D5A3D"/>
+                          </a:solidFill>
+                          <a:latin typeface="Arial" pitchFamily="34" charset="0"/>
+                          <a:ea typeface="Arial" pitchFamily="34" charset="-122"/>
+                          <a:cs typeface="Arial" pitchFamily="34" charset="-120"/>
+                        </a:rPr>
+                        <a:t>100%</a:t>
+                      </a:r>
+                      <a:endParaRPr lang="en-US" sz="1050" dirty="0">
+                        <a:latin typeface="Arial" charset="0"/>
+                        <a:ea typeface="Arial" charset="0"/>
+                        <a:cs typeface="Arial" charset="0"/>
+                      </a:endParaRPr>
+                    </a:p>
+                  </a:txBody>
+                  <a:tcPr marL="91440" marR="91440" marT="45720" marB="45720" anchor="ctr">
+                    <a:lnL w="6350" cap="flat" cmpd="sng" algn="ctr">
+                      <a:solidFill>
+                        <a:srgbClr val="D6DAE0"/>
+                      </a:solidFill>
+                      <a:prstDash val="solid"/>
+                      <a:round/>
+                      <a:headEnd type="none" w="med" len="med"/>
+                      <a:tailEnd type="none" w="med" len="med"/>
+                    </a:lnL>
+                    <a:lnR w="6350" cap="flat" cmpd="sng" algn="ctr">
+                      <a:solidFill>
+                        <a:srgbClr val="D6DAE0"/>
+                      </a:solidFill>
+                      <a:prstDash val="solid"/>
+                      <a:round/>
+                      <a:headEnd type="none" w="med" len="med"/>
+                      <a:tailEnd type="none" w="med" len="med"/>
+                    </a:lnR>
+                    <a:lnT w="6350" cap="flat" cmpd="sng" algn="ctr">
+                      <a:solidFill>
+                        <a:srgbClr val="D6DAE0"/>
+                      </a:solidFill>
+                      <a:prstDash val="solid"/>
+                      <a:round/>
+                      <a:headEnd type="none" w="med" len="med"/>
+                      <a:tailEnd type="none" w="med" len="med"/>
+                    </a:lnT>
+                    <a:lnB w="6350" cap="flat" cmpd="sng" algn="ctr">
+                      <a:solidFill>
+                        <a:srgbClr val="D6DAE0"/>
+                      </a:solidFill>
+                      <a:prstDash val="solid"/>
+                      <a:round/>
+                      <a:headEnd type="none" w="med" len="med"/>
+                      <a:tailEnd type="none" w="med" len="med"/>
+                    </a:lnB>
+                  </a:tcPr>
+                </a:tc>
+              </a:tr>
+              <a:tr h="365760">
+                <a:tc>
+                  <a:txBody>
+                    <a:bodyPr/>
+                    <a:lstStyle/>
+                    <a:p>
+                      <a:pPr indent="0" marL="0">
+                        <a:buNone/>
+                      </a:pPr>
+                      <a:r>
+                        <a:rPr lang="en-US" sz="1050" dirty="0">
+                          <a:solidFill>
+                            <a:srgbClr val="16181D"/>
+                          </a:solidFill>
+                          <a:latin typeface="Arial" pitchFamily="34" charset="0"/>
+                          <a:ea typeface="Arial" pitchFamily="34" charset="-122"/>
+                          <a:cs typeface="Arial" pitchFamily="34" charset="-120"/>
+                        </a:rPr>
+                        <a:t>Address in free text (NER tier pending)</a:t>
+                      </a:r>
+                      <a:endParaRPr lang="en-US" sz="1050" dirty="0">
+                        <a:latin typeface="Arial" charset="0"/>
+                        <a:ea typeface="Arial" charset="0"/>
+                        <a:cs typeface="Arial" charset="0"/>
+                      </a:endParaRPr>
+                    </a:p>
+                  </a:txBody>
+                  <a:tcPr marL="91440" marR="91440" marT="45720" marB="45720" anchor="ctr">
+                    <a:lnL w="6350" cap="flat" cmpd="sng" algn="ctr">
+                      <a:solidFill>
+                        <a:srgbClr val="D6DAE0"/>
+                      </a:solidFill>
+                      <a:prstDash val="solid"/>
+                      <a:round/>
+                      <a:headEnd type="none" w="med" len="med"/>
+                      <a:tailEnd type="none" w="med" len="med"/>
+                    </a:lnL>
+                    <a:lnR w="6350" cap="flat" cmpd="sng" algn="ctr">
+                      <a:solidFill>
+                        <a:srgbClr val="D6DAE0"/>
+                      </a:solidFill>
+                      <a:prstDash val="solid"/>
+                      <a:round/>
+                      <a:headEnd type="none" w="med" len="med"/>
+                      <a:tailEnd type="none" w="med" len="med"/>
+                    </a:lnR>
+                    <a:lnT w="6350" cap="flat" cmpd="sng" algn="ctr">
+                      <a:solidFill>
+                        <a:srgbClr val="D6DAE0"/>
+                      </a:solidFill>
+                      <a:prstDash val="solid"/>
+                      <a:round/>
+                      <a:headEnd type="none" w="med" len="med"/>
+                      <a:tailEnd type="none" w="med" len="med"/>
+                    </a:lnT>
+                    <a:lnB w="6350" cap="flat" cmpd="sng" algn="ctr">
+                      <a:solidFill>
+                        <a:srgbClr val="D6DAE0"/>
+                      </a:solidFill>
+                      <a:prstDash val="solid"/>
+                      <a:round/>
+                      <a:headEnd type="none" w="med" len="med"/>
+                      <a:tailEnd type="none" w="med" len="med"/>
+                    </a:lnB>
+                  </a:tcPr>
+                </a:tc>
+                <a:tc>
+                  <a:txBody>
+                    <a:bodyPr/>
+                    <a:lstStyle/>
+                    <a:p>
+                      <a:pPr indent="0" marL="0">
+                        <a:buNone/>
+                      </a:pPr>
+                      <a:r>
+                        <a:rPr lang="en-US" sz="1050" dirty="0">
+                          <a:solidFill>
+                            <a:srgbClr val="16181D"/>
+                          </a:solidFill>
+                          <a:latin typeface="Arial" pitchFamily="34" charset="0"/>
+                          <a:ea typeface="Arial" pitchFamily="34" charset="-122"/>
+                          <a:cs typeface="Arial" pitchFamily="34" charset="-120"/>
+                        </a:rPr>
+                        <a:t>2</a:t>
+                      </a:r>
+                      <a:endParaRPr lang="en-US" sz="1050" dirty="0">
+                        <a:latin typeface="Arial" charset="0"/>
+                        <a:ea typeface="Arial" charset="0"/>
+                        <a:cs typeface="Arial" charset="0"/>
+                      </a:endParaRPr>
+                    </a:p>
+                  </a:txBody>
+                  <a:tcPr marL="91440" marR="91440" marT="45720" marB="45720" anchor="ctr">
+                    <a:lnL w="6350" cap="flat" cmpd="sng" algn="ctr">
+                      <a:solidFill>
+                        <a:srgbClr val="D6DAE0"/>
+                      </a:solidFill>
+                      <a:prstDash val="solid"/>
+                      <a:round/>
+                      <a:headEnd type="none" w="med" len="med"/>
+                      <a:tailEnd type="none" w="med" len="med"/>
+                    </a:lnL>
+                    <a:lnR w="6350" cap="flat" cmpd="sng" algn="ctr">
+                      <a:solidFill>
+                        <a:srgbClr val="D6DAE0"/>
+                      </a:solidFill>
+                      <a:prstDash val="solid"/>
+                      <a:round/>
+                      <a:headEnd type="none" w="med" len="med"/>
+                      <a:tailEnd type="none" w="med" len="med"/>
+                    </a:lnR>
+                    <a:lnT w="6350" cap="flat" cmpd="sng" algn="ctr">
+                      <a:solidFill>
+                        <a:srgbClr val="D6DAE0"/>
+                      </a:solidFill>
+                      <a:prstDash val="solid"/>
+                      <a:round/>
+                      <a:headEnd type="none" w="med" len="med"/>
+                      <a:tailEnd type="none" w="med" len="med"/>
+                    </a:lnT>
+                    <a:lnB w="6350" cap="flat" cmpd="sng" algn="ctr">
+                      <a:solidFill>
+                        <a:srgbClr val="D6DAE0"/>
+                      </a:solidFill>
+                      <a:prstDash val="solid"/>
+                      <a:round/>
+                      <a:headEnd type="none" w="med" len="med"/>
+                      <a:tailEnd type="none" w="med" len="med"/>
+                    </a:lnB>
+                  </a:tcPr>
+                </a:tc>
+                <a:tc>
+                  <a:txBody>
+                    <a:bodyPr/>
+                    <a:lstStyle/>
+                    <a:p>
+                      <a:pPr indent="0" marL="0">
+                        <a:buNone/>
+                      </a:pPr>
+                      <a:r>
+                        <a:rPr lang="en-US" sz="1050" dirty="0">
+                          <a:solidFill>
+                            <a:srgbClr val="16181D"/>
+                          </a:solidFill>
+                          <a:latin typeface="Arial" pitchFamily="34" charset="0"/>
+                          <a:ea typeface="Arial" pitchFamily="34" charset="-122"/>
+                          <a:cs typeface="Arial" pitchFamily="34" charset="-120"/>
+                        </a:rPr>
+                        <a:t>100%</a:t>
+                      </a:r>
+                      <a:endParaRPr lang="en-US" sz="1050" dirty="0">
+                        <a:latin typeface="Arial" charset="0"/>
+                        <a:ea typeface="Arial" charset="0"/>
+                        <a:cs typeface="Arial" charset="0"/>
+                      </a:endParaRPr>
+                    </a:p>
+                  </a:txBody>
+                  <a:tcPr marL="91440" marR="91440" marT="45720" marB="45720" anchor="ctr">
+                    <a:lnL w="6350" cap="flat" cmpd="sng" algn="ctr">
+                      <a:solidFill>
+                        <a:srgbClr val="D6DAE0"/>
+                      </a:solidFill>
+                      <a:prstDash val="solid"/>
+                      <a:round/>
+                      <a:headEnd type="none" w="med" len="med"/>
+                      <a:tailEnd type="none" w="med" len="med"/>
+                    </a:lnL>
+                    <a:lnR w="6350" cap="flat" cmpd="sng" algn="ctr">
+                      <a:solidFill>
+                        <a:srgbClr val="D6DAE0"/>
+                      </a:solidFill>
+                      <a:prstDash val="solid"/>
+                      <a:round/>
+                      <a:headEnd type="none" w="med" len="med"/>
+                      <a:tailEnd type="none" w="med" len="med"/>
+                    </a:lnR>
+                    <a:lnT w="6350" cap="flat" cmpd="sng" algn="ctr">
+                      <a:solidFill>
+                        <a:srgbClr val="D6DAE0"/>
+                      </a:solidFill>
+                      <a:prstDash val="solid"/>
+                      <a:round/>
+                      <a:headEnd type="none" w="med" len="med"/>
+                      <a:tailEnd type="none" w="med" len="med"/>
+                    </a:lnT>
+                    <a:lnB w="6350" cap="flat" cmpd="sng" algn="ctr">
+                      <a:solidFill>
+                        <a:srgbClr val="D6DAE0"/>
+                      </a:solidFill>
+                      <a:prstDash val="solid"/>
+                      <a:round/>
+                      <a:headEnd type="none" w="med" len="med"/>
+                      <a:tailEnd type="none" w="med" len="med"/>
+                    </a:lnB>
+                  </a:tcPr>
+                </a:tc>
+                <a:tc>
+                  <a:txBody>
+                    <a:bodyPr/>
+                    <a:lstStyle/>
+                    <a:p>
+                      <a:pPr indent="0" marL="0">
+                        <a:buNone/>
+                      </a:pPr>
+                      <a:r>
+                        <a:rPr lang="en-US" sz="1050" dirty="0">
+                          <a:solidFill>
+                            <a:srgbClr val="16181D"/>
+                          </a:solidFill>
+                          <a:latin typeface="Arial" pitchFamily="34" charset="0"/>
+                          <a:ea typeface="Arial" pitchFamily="34" charset="-122"/>
+                          <a:cs typeface="Arial" pitchFamily="34" charset="-120"/>
+                        </a:rPr>
+                        <a:t>50%</a:t>
+                      </a:r>
+                      <a:endParaRPr lang="en-US" sz="1050" dirty="0">
+                        <a:latin typeface="Arial" charset="0"/>
+                        <a:ea typeface="Arial" charset="0"/>
+                        <a:cs typeface="Arial" charset="0"/>
+                      </a:endParaRPr>
+                    </a:p>
+                  </a:txBody>
+                  <a:tcPr marL="91440" marR="91440" marT="45720" marB="45720" anchor="ctr">
+                    <a:lnL w="6350" cap="flat" cmpd="sng" algn="ctr">
+                      <a:solidFill>
+                        <a:srgbClr val="D6DAE0"/>
+                      </a:solidFill>
+                      <a:prstDash val="solid"/>
+                      <a:round/>
+                      <a:headEnd type="none" w="med" len="med"/>
+                      <a:tailEnd type="none" w="med" len="med"/>
+                    </a:lnL>
+                    <a:lnR w="6350" cap="flat" cmpd="sng" algn="ctr">
+                      <a:solidFill>
+                        <a:srgbClr val="D6DAE0"/>
+                      </a:solidFill>
+                      <a:prstDash val="solid"/>
+                      <a:round/>
+                      <a:headEnd type="none" w="med" len="med"/>
+                      <a:tailEnd type="none" w="med" len="med"/>
+                    </a:lnR>
+                    <a:lnT w="6350" cap="flat" cmpd="sng" algn="ctr">
+                      <a:solidFill>
+                        <a:srgbClr val="D6DAE0"/>
+                      </a:solidFill>
+                      <a:prstDash val="solid"/>
+                      <a:round/>
+                      <a:headEnd type="none" w="med" len="med"/>
+                      <a:tailEnd type="none" w="med" len="med"/>
+                    </a:lnT>
+                    <a:lnB w="6350" cap="flat" cmpd="sng" algn="ctr">
+                      <a:solidFill>
+                        <a:srgbClr val="D6DAE0"/>
+                      </a:solidFill>
+                      <a:prstDash val="solid"/>
+                      <a:round/>
+                      <a:headEnd type="none" w="med" len="med"/>
+                      <a:tailEnd type="none" w="med" len="med"/>
+                    </a:lnB>
+                  </a:tcPr>
+                </a:tc>
+              </a:tr>
+              <a:tr h="365760">
+                <a:tc>
+                  <a:txBody>
+                    <a:bodyPr/>
+                    <a:lstStyle/>
+                    <a:p>
+                      <a:pPr indent="0" marL="0">
+                        <a:buNone/>
+                      </a:pPr>
+                      <a:r>
+                        <a:rPr lang="en-US" sz="1050" dirty="0">
+                          <a:solidFill>
+                            <a:srgbClr val="16181D"/>
+                          </a:solidFill>
+                          <a:latin typeface="Arial" pitchFamily="34" charset="0"/>
+                          <a:ea typeface="Arial" pitchFamily="34" charset="-122"/>
+                          <a:cs typeface="Arial" pitchFamily="34" charset="-120"/>
+                        </a:rPr>
+                        <a:t>Bare names, PIN code (documented gaps)</a:t>
+                      </a:r>
+                      <a:endParaRPr lang="en-US" sz="1050" dirty="0">
+                        <a:latin typeface="Arial" charset="0"/>
+                        <a:ea typeface="Arial" charset="0"/>
+                        <a:cs typeface="Arial" charset="0"/>
+                      </a:endParaRPr>
+                    </a:p>
+                  </a:txBody>
+                  <a:tcPr marL="91440" marR="91440" marT="45720" marB="45720" anchor="ctr">
+                    <a:lnL w="6350" cap="flat" cmpd="sng" algn="ctr">
+                      <a:solidFill>
+                        <a:srgbClr val="D6DAE0"/>
+                      </a:solidFill>
+                      <a:prstDash val="solid"/>
+                      <a:round/>
+                      <a:headEnd type="none" w="med" len="med"/>
+                      <a:tailEnd type="none" w="med" len="med"/>
+                    </a:lnL>
+                    <a:lnR w="6350" cap="flat" cmpd="sng" algn="ctr">
+                      <a:solidFill>
+                        <a:srgbClr val="D6DAE0"/>
+                      </a:solidFill>
+                      <a:prstDash val="solid"/>
+                      <a:round/>
+                      <a:headEnd type="none" w="med" len="med"/>
+                      <a:tailEnd type="none" w="med" len="med"/>
+                    </a:lnR>
+                    <a:lnT w="6350" cap="flat" cmpd="sng" algn="ctr">
+                      <a:solidFill>
+                        <a:srgbClr val="D6DAE0"/>
+                      </a:solidFill>
+                      <a:prstDash val="solid"/>
+                      <a:round/>
+                      <a:headEnd type="none" w="med" len="med"/>
+                      <a:tailEnd type="none" w="med" len="med"/>
+                    </a:lnT>
+                    <a:lnB w="6350" cap="flat" cmpd="sng" algn="ctr">
+                      <a:solidFill>
+                        <a:srgbClr val="D6DAE0"/>
+                      </a:solidFill>
+                      <a:prstDash val="solid"/>
+                      <a:round/>
+                      <a:headEnd type="none" w="med" len="med"/>
+                      <a:tailEnd type="none" w="med" len="med"/>
+                    </a:lnB>
+                  </a:tcPr>
+                </a:tc>
+                <a:tc>
+                  <a:txBody>
+                    <a:bodyPr/>
+                    <a:lstStyle/>
+                    <a:p>
+                      <a:pPr indent="0" marL="0">
+                        <a:buNone/>
+                      </a:pPr>
+                      <a:r>
+                        <a:rPr lang="en-US" sz="1050" dirty="0">
+                          <a:solidFill>
+                            <a:srgbClr val="16181D"/>
+                          </a:solidFill>
+                          <a:latin typeface="Arial" pitchFamily="34" charset="0"/>
+                          <a:ea typeface="Arial" pitchFamily="34" charset="-122"/>
+                          <a:cs typeface="Arial" pitchFamily="34" charset="-120"/>
+                        </a:rPr>
+                        <a:t>2</a:t>
+                      </a:r>
+                      <a:endParaRPr lang="en-US" sz="1050" dirty="0">
+                        <a:latin typeface="Arial" charset="0"/>
+                        <a:ea typeface="Arial" charset="0"/>
+                        <a:cs typeface="Arial" charset="0"/>
+                      </a:endParaRPr>
+                    </a:p>
+                  </a:txBody>
+                  <a:tcPr marL="91440" marR="91440" marT="45720" marB="45720" anchor="ctr">
+                    <a:lnL w="6350" cap="flat" cmpd="sng" algn="ctr">
+                      <a:solidFill>
+                        <a:srgbClr val="D6DAE0"/>
+                      </a:solidFill>
+                      <a:prstDash val="solid"/>
+                      <a:round/>
+                      <a:headEnd type="none" w="med" len="med"/>
+                      <a:tailEnd type="none" w="med" len="med"/>
+                    </a:lnL>
+                    <a:lnR w="6350" cap="flat" cmpd="sng" algn="ctr">
+                      <a:solidFill>
+                        <a:srgbClr val="D6DAE0"/>
+                      </a:solidFill>
+                      <a:prstDash val="solid"/>
+                      <a:round/>
+                      <a:headEnd type="none" w="med" len="med"/>
+                      <a:tailEnd type="none" w="med" len="med"/>
+                    </a:lnR>
+                    <a:lnT w="6350" cap="flat" cmpd="sng" algn="ctr">
+                      <a:solidFill>
+                        <a:srgbClr val="D6DAE0"/>
+                      </a:solidFill>
+                      <a:prstDash val="solid"/>
+                      <a:round/>
+                      <a:headEnd type="none" w="med" len="med"/>
+                      <a:tailEnd type="none" w="med" len="med"/>
+                    </a:lnT>
+                    <a:lnB w="6350" cap="flat" cmpd="sng" algn="ctr">
+                      <a:solidFill>
+                        <a:srgbClr val="D6DAE0"/>
+                      </a:solidFill>
+                      <a:prstDash val="solid"/>
+                      <a:round/>
+                      <a:headEnd type="none" w="med" len="med"/>
+                      <a:tailEnd type="none" w="med" len="med"/>
+                    </a:lnB>
+                  </a:tcPr>
+                </a:tc>
+                <a:tc>
+                  <a:txBody>
+                    <a:bodyPr/>
+                    <a:lstStyle/>
+                    <a:p>
+                      <a:pPr indent="0" marL="0">
+                        <a:buNone/>
+                      </a:pPr>
+                      <a:r>
+                        <a:rPr lang="en-US" sz="1050" dirty="0">
+                          <a:solidFill>
+                            <a:srgbClr val="16181D"/>
+                          </a:solidFill>
+                          <a:latin typeface="Arial" pitchFamily="34" charset="0"/>
+                          <a:ea typeface="Arial" pitchFamily="34" charset="-122"/>
+                          <a:cs typeface="Arial" pitchFamily="34" charset="-120"/>
+                        </a:rPr>
+                        <a:t>n/a</a:t>
+                      </a:r>
+                      <a:endParaRPr lang="en-US" sz="1050" dirty="0">
+                        <a:latin typeface="Arial" charset="0"/>
+                        <a:ea typeface="Arial" charset="0"/>
+                        <a:cs typeface="Arial" charset="0"/>
+                      </a:endParaRPr>
+                    </a:p>
+                  </a:txBody>
+                  <a:tcPr marL="91440" marR="91440" marT="45720" marB="45720" anchor="ctr">
+                    <a:lnL w="6350" cap="flat" cmpd="sng" algn="ctr">
+                      <a:solidFill>
+                        <a:srgbClr val="D6DAE0"/>
+                      </a:solidFill>
+                      <a:prstDash val="solid"/>
+                      <a:round/>
+                      <a:headEnd type="none" w="med" len="med"/>
+                      <a:tailEnd type="none" w="med" len="med"/>
+                    </a:lnL>
+                    <a:lnR w="6350" cap="flat" cmpd="sng" algn="ctr">
+                      <a:solidFill>
+                        <a:srgbClr val="D6DAE0"/>
+                      </a:solidFill>
+                      <a:prstDash val="solid"/>
+                      <a:round/>
+                      <a:headEnd type="none" w="med" len="med"/>
+                      <a:tailEnd type="none" w="med" len="med"/>
+                    </a:lnR>
+                    <a:lnT w="6350" cap="flat" cmpd="sng" algn="ctr">
+                      <a:solidFill>
+                        <a:srgbClr val="D6DAE0"/>
+                      </a:solidFill>
+                      <a:prstDash val="solid"/>
+                      <a:round/>
+                      <a:headEnd type="none" w="med" len="med"/>
+                      <a:tailEnd type="none" w="med" len="med"/>
+                    </a:lnT>
+                    <a:lnB w="6350" cap="flat" cmpd="sng" algn="ctr">
+                      <a:solidFill>
+                        <a:srgbClr val="D6DAE0"/>
+                      </a:solidFill>
+                      <a:prstDash val="solid"/>
+                      <a:round/>
+                      <a:headEnd type="none" w="med" len="med"/>
+                      <a:tailEnd type="none" w="med" len="med"/>
+                    </a:lnB>
+                  </a:tcPr>
+                </a:tc>
+                <a:tc>
+                  <a:txBody>
+                    <a:bodyPr/>
+                    <a:lstStyle/>
+                    <a:p>
+                      <a:pPr indent="0" marL="0">
+                        <a:buNone/>
+                      </a:pPr>
+                      <a:r>
+                        <a:rPr lang="en-US" sz="1050" dirty="0">
+                          <a:solidFill>
+                            <a:srgbClr val="16181D"/>
+                          </a:solidFill>
+                          <a:latin typeface="Arial" pitchFamily="34" charset="0"/>
+                          <a:ea typeface="Arial" pitchFamily="34" charset="-122"/>
+                          <a:cs typeface="Arial" pitchFamily="34" charset="-120"/>
+                        </a:rPr>
+                        <a:t>0%</a:t>
+                      </a:r>
+                      <a:endParaRPr lang="en-US" sz="1050" dirty="0">
+                        <a:latin typeface="Arial" charset="0"/>
+                        <a:ea typeface="Arial" charset="0"/>
+                        <a:cs typeface="Arial" charset="0"/>
+                      </a:endParaRPr>
+                    </a:p>
+                  </a:txBody>
+                  <a:tcPr marL="91440" marR="91440" marT="45720" marB="45720" anchor="ctr">
+                    <a:lnL w="6350" cap="flat" cmpd="sng" algn="ctr">
+                      <a:solidFill>
+                        <a:srgbClr val="D6DAE0"/>
+                      </a:solidFill>
+                      <a:prstDash val="solid"/>
+                      <a:round/>
+                      <a:headEnd type="none" w="med" len="med"/>
+                      <a:tailEnd type="none" w="med" len="med"/>
+                    </a:lnL>
+                    <a:lnR w="6350" cap="flat" cmpd="sng" algn="ctr">
+                      <a:solidFill>
+                        <a:srgbClr val="D6DAE0"/>
+                      </a:solidFill>
+                      <a:prstDash val="solid"/>
+                      <a:round/>
+                      <a:headEnd type="none" w="med" len="med"/>
+                      <a:tailEnd type="none" w="med" len="med"/>
+                    </a:lnR>
+                    <a:lnT w="6350" cap="flat" cmpd="sng" algn="ctr">
+                      <a:solidFill>
+                        <a:srgbClr val="D6DAE0"/>
+                      </a:solidFill>
+                      <a:prstDash val="solid"/>
+                      <a:round/>
+                      <a:headEnd type="none" w="med" len="med"/>
+                      <a:tailEnd type="none" w="med" len="med"/>
+                    </a:lnT>
+                    <a:lnB w="6350" cap="flat" cmpd="sng" algn="ctr">
+                      <a:solidFill>
+                        <a:srgbClr val="D6DAE0"/>
+                      </a:solidFill>
+                      <a:prstDash val="solid"/>
+                      <a:round/>
+                      <a:headEnd type="none" w="med" len="med"/>
+                      <a:tailEnd type="none" w="med" len="med"/>
+                    </a:lnB>
+                  </a:tcPr>
+                </a:tc>
+              </a:tr>
+              <a:tr h="365760">
+                <a:tc>
+                  <a:txBody>
+                    <a:bodyPr/>
+                    <a:lstStyle/>
+                    <a:p>
+                      <a:pPr indent="0" marL="0">
+                        <a:buNone/>
+                      </a:pPr>
+                      <a:r>
+                        <a:rPr lang="en-US" sz="1050" b="1" dirty="0">
+                          <a:solidFill>
+                            <a:srgbClr val="16181D"/>
+                          </a:solidFill>
+                          <a:latin typeface="Arial" pitchFamily="34" charset="0"/>
+                          <a:ea typeface="Arial" pitchFamily="34" charset="-122"/>
+                          <a:cs typeface="Arial" pitchFamily="34" charset="-120"/>
+                        </a:rPr>
+                        <a:t>micro average</a:t>
+                      </a:r>
+                      <a:endParaRPr lang="en-US" sz="1050" dirty="0">
+                        <a:latin typeface="Arial" charset="0"/>
+                        <a:ea typeface="Arial" charset="0"/>
+                        <a:cs typeface="Arial" charset="0"/>
+                      </a:endParaRPr>
+                    </a:p>
+                  </a:txBody>
+                  <a:tcPr marL="91440" marR="91440" marT="45720" marB="45720" anchor="ctr">
+                    <a:lnL w="6350" cap="flat" cmpd="sng" algn="ctr">
+                      <a:solidFill>
+                        <a:srgbClr val="D6DAE0"/>
+                      </a:solidFill>
+                      <a:prstDash val="solid"/>
+                      <a:round/>
+                      <a:headEnd type="none" w="med" len="med"/>
+                      <a:tailEnd type="none" w="med" len="med"/>
+                    </a:lnL>
+                    <a:lnR w="6350" cap="flat" cmpd="sng" algn="ctr">
+                      <a:solidFill>
+                        <a:srgbClr val="D6DAE0"/>
+                      </a:solidFill>
+                      <a:prstDash val="solid"/>
+                      <a:round/>
+                      <a:headEnd type="none" w="med" len="med"/>
+                      <a:tailEnd type="none" w="med" len="med"/>
+                    </a:lnR>
+                    <a:lnT w="6350" cap="flat" cmpd="sng" algn="ctr">
+                      <a:solidFill>
+                        <a:srgbClr val="D6DAE0"/>
+                      </a:solidFill>
+                      <a:prstDash val="solid"/>
+                      <a:round/>
+                      <a:headEnd type="none" w="med" len="med"/>
+                      <a:tailEnd type="none" w="med" len="med"/>
+                    </a:lnT>
+                    <a:lnB w="6350" cap="flat" cmpd="sng" algn="ctr">
+                      <a:solidFill>
+                        <a:srgbClr val="D6DAE0"/>
+                      </a:solidFill>
+                      <a:prstDash val="solid"/>
+                      <a:round/>
+                      <a:headEnd type="none" w="med" len="med"/>
+                      <a:tailEnd type="none" w="med" len="med"/>
+                    </a:lnB>
+                  </a:tcPr>
+                </a:tc>
+                <a:tc>
+                  <a:txBody>
+                    <a:bodyPr/>
+                    <a:lstStyle/>
+                    <a:p>
+                      <a:pPr indent="0" marL="0">
+                        <a:buNone/>
+                      </a:pPr>
+                      <a:r>
+                        <a:rPr lang="en-US" sz="1050" b="1" dirty="0">
+                          <a:solidFill>
+                            <a:srgbClr val="16181D"/>
+                          </a:solidFill>
+                          <a:latin typeface="Arial" pitchFamily="34" charset="0"/>
+                          <a:ea typeface="Arial" pitchFamily="34" charset="-122"/>
+                          <a:cs typeface="Arial" pitchFamily="34" charset="-120"/>
+                        </a:rPr>
+                        <a:t>35</a:t>
+                      </a:r>
+                      <a:endParaRPr lang="en-US" sz="1050" dirty="0">
+                        <a:latin typeface="Arial" charset="0"/>
+                        <a:ea typeface="Arial" charset="0"/>
+                        <a:cs typeface="Arial" charset="0"/>
+                      </a:endParaRPr>
+                    </a:p>
+                  </a:txBody>
+                  <a:tcPr marL="91440" marR="91440" marT="45720" marB="45720" anchor="ctr">
+                    <a:lnL w="6350" cap="flat" cmpd="sng" algn="ctr">
+                      <a:solidFill>
+                        <a:srgbClr val="D6DAE0"/>
+                      </a:solidFill>
+                      <a:prstDash val="solid"/>
+                      <a:round/>
+                      <a:headEnd type="none" w="med" len="med"/>
+                      <a:tailEnd type="none" w="med" len="med"/>
+                    </a:lnL>
+                    <a:lnR w="6350" cap="flat" cmpd="sng" algn="ctr">
+                      <a:solidFill>
+                        <a:srgbClr val="D6DAE0"/>
+                      </a:solidFill>
+                      <a:prstDash val="solid"/>
+                      <a:round/>
+                      <a:headEnd type="none" w="med" len="med"/>
+                      <a:tailEnd type="none" w="med" len="med"/>
+                    </a:lnR>
+                    <a:lnT w="6350" cap="flat" cmpd="sng" algn="ctr">
+                      <a:solidFill>
+                        <a:srgbClr val="D6DAE0"/>
+                      </a:solidFill>
+                      <a:prstDash val="solid"/>
+                      <a:round/>
+                      <a:headEnd type="none" w="med" len="med"/>
+                      <a:tailEnd type="none" w="med" len="med"/>
+                    </a:lnT>
+                    <a:lnB w="6350" cap="flat" cmpd="sng" algn="ctr">
+                      <a:solidFill>
+                        <a:srgbClr val="D6DAE0"/>
+                      </a:solidFill>
+                      <a:prstDash val="solid"/>
+                      <a:round/>
+                      <a:headEnd type="none" w="med" len="med"/>
+                      <a:tailEnd type="none" w="med" len="med"/>
+                    </a:lnB>
+                  </a:tcPr>
+                </a:tc>
+                <a:tc>
+                  <a:txBody>
+                    <a:bodyPr/>
+                    <a:lstStyle/>
+                    <a:p>
+                      <a:pPr indent="0" marL="0">
+                        <a:buNone/>
+                      </a:pPr>
+                      <a:r>
+                        <a:rPr lang="en-US" sz="1050" b="1" dirty="0">
+                          <a:solidFill>
+                            <a:srgbClr val="3D5A3D"/>
+                          </a:solidFill>
+                          <a:latin typeface="Arial" pitchFamily="34" charset="0"/>
+                          <a:ea typeface="Arial" pitchFamily="34" charset="-122"/>
+                          <a:cs typeface="Arial" pitchFamily="34" charset="-120"/>
+                        </a:rPr>
+                        <a:t>100%</a:t>
+                      </a:r>
+                      <a:endParaRPr lang="en-US" sz="1050" dirty="0">
+                        <a:latin typeface="Arial" charset="0"/>
+                        <a:ea typeface="Arial" charset="0"/>
+                        <a:cs typeface="Arial" charset="0"/>
+                      </a:endParaRPr>
+                    </a:p>
+                  </a:txBody>
+                  <a:tcPr marL="91440" marR="91440" marT="45720" marB="45720" anchor="ctr">
+                    <a:lnL w="6350" cap="flat" cmpd="sng" algn="ctr">
+                      <a:solidFill>
+                        <a:srgbClr val="D6DAE0"/>
+                      </a:solidFill>
+                      <a:prstDash val="solid"/>
+                      <a:round/>
+                      <a:headEnd type="none" w="med" len="med"/>
+                      <a:tailEnd type="none" w="med" len="med"/>
+                    </a:lnL>
+                    <a:lnR w="6350" cap="flat" cmpd="sng" algn="ctr">
+                      <a:solidFill>
+                        <a:srgbClr val="D6DAE0"/>
+                      </a:solidFill>
+                      <a:prstDash val="solid"/>
+                      <a:round/>
+                      <a:headEnd type="none" w="med" len="med"/>
+                      <a:tailEnd type="none" w="med" len="med"/>
+                    </a:lnR>
+                    <a:lnT w="6350" cap="flat" cmpd="sng" algn="ctr">
+                      <a:solidFill>
+                        <a:srgbClr val="D6DAE0"/>
+                      </a:solidFill>
+                      <a:prstDash val="solid"/>
+                      <a:round/>
+                      <a:headEnd type="none" w="med" len="med"/>
+                      <a:tailEnd type="none" w="med" len="med"/>
+                    </a:lnT>
+                    <a:lnB w="6350" cap="flat" cmpd="sng" algn="ctr">
+                      <a:solidFill>
+                        <a:srgbClr val="D6DAE0"/>
+                      </a:solidFill>
+                      <a:prstDash val="solid"/>
+                      <a:round/>
+                      <a:headEnd type="none" w="med" len="med"/>
+                      <a:tailEnd type="none" w="med" len="med"/>
+                    </a:lnB>
+                  </a:tcPr>
+                </a:tc>
+                <a:tc>
+                  <a:txBody>
+                    <a:bodyPr/>
+                    <a:lstStyle/>
+                    <a:p>
+                      <a:pPr indent="0" marL="0">
+                        <a:buNone/>
+                      </a:pPr>
+                      <a:r>
+                        <a:rPr lang="en-US" sz="1050" b="1" dirty="0">
+                          <a:solidFill>
+                            <a:srgbClr val="16181D"/>
+                          </a:solidFill>
+                          <a:latin typeface="Arial" pitchFamily="34" charset="0"/>
+                          <a:ea typeface="Arial" pitchFamily="34" charset="-122"/>
+                          <a:cs typeface="Arial" pitchFamily="34" charset="-120"/>
+                        </a:rPr>
+                        <a:t>91.4%</a:t>
+                      </a:r>
+                      <a:endParaRPr lang="en-US" sz="1050" dirty="0">
+                        <a:latin typeface="Arial" charset="0"/>
+                        <a:ea typeface="Arial" charset="0"/>
+                        <a:cs typeface="Arial" charset="0"/>
+                      </a:endParaRPr>
+                    </a:p>
+                  </a:txBody>
+                  <a:tcPr marL="91440" marR="91440" marT="45720" marB="45720" anchor="ctr">
+                    <a:lnL w="6350" cap="flat" cmpd="sng" algn="ctr">
+                      <a:solidFill>
+                        <a:srgbClr val="D6DAE0"/>
+                      </a:solidFill>
+                      <a:prstDash val="solid"/>
+                      <a:round/>
+                      <a:headEnd type="none" w="med" len="med"/>
+                      <a:tailEnd type="none" w="med" len="med"/>
+                    </a:lnL>
+                    <a:lnR w="6350" cap="flat" cmpd="sng" algn="ctr">
+                      <a:solidFill>
+                        <a:srgbClr val="D6DAE0"/>
+                      </a:solidFill>
+                      <a:prstDash val="solid"/>
+                      <a:round/>
+                      <a:headEnd type="none" w="med" len="med"/>
+                      <a:tailEnd type="none" w="med" len="med"/>
+                    </a:lnR>
+                    <a:lnT w="6350" cap="flat" cmpd="sng" algn="ctr">
+                      <a:solidFill>
+                        <a:srgbClr val="D6DAE0"/>
+                      </a:solidFill>
+                      <a:prstDash val="solid"/>
+                      <a:round/>
+                      <a:headEnd type="none" w="med" len="med"/>
+                      <a:tailEnd type="none" w="med" len="med"/>
+                    </a:lnT>
+                    <a:lnB w="6350" cap="flat" cmpd="sng" algn="ctr">
+                      <a:solidFill>
+                        <a:srgbClr val="D6DAE0"/>
+                      </a:solidFill>
+                      <a:prstDash val="solid"/>
+                      <a:round/>
+                      <a:headEnd type="none" w="med" len="med"/>
+                      <a:tailEnd type="none" w="med" len="med"/>
+                    </a:lnB>
+                  </a:tcPr>
+                </a:tc>
               </a:tr>
             </a:tbl>
           </a:graphicData>
@@ -6706,14 +8633,14 @@
       </p:graphicFrame>
       <p:sp>
         <p:nvSpPr>
-          <p:cNvPr id="5" name="Text 2"/>
+          <p:cNvPr id="21" name="Text 18"/>
           <p:cNvSpPr/>
           <p:nvPr/>
         </p:nvSpPr>
         <p:spPr>
           <a:xfrm>
-            <a:off x="502920" y="3200400"/>
-            <a:ext cx="11155680" cy="4937760"/>
+            <a:off x="502920" y="6035040"/>
+            <a:ext cx="5760720" cy="685800"/>
           </a:xfrm>
           <a:prstGeom prst="rect">
             <a:avLst/>
@@ -6722,115 +8649,51 @@
           <a:ln/>
         </p:spPr>
         <p:txBody>
-          <a:bodyPr wrap="square" rtlCol="0" anchor="t"/>
+          <a:bodyPr wrap="square" rtlCol="0" anchor="ctr"/>
           <a:lstStyle/>
           <a:p>
-            <a:pPr marL="152400" indent="-152400">
-              <a:lnSpc>
-                <a:spcPct val="118000"/>
-              </a:lnSpc>
-              <a:buSzPct val="100000"/>
-              <a:buChar char="•"/>
+            <a:pPr indent="0" marL="0">
+              <a:buNone/>
             </a:pPr>
             <a:r>
-              <a:rPr lang="en-US" sz="1250" dirty="0">
-                <a:solidFill>
-                  <a:srgbClr val="16181D"/>
+              <a:rPr lang="en-US" sz="950" i="1" dirty="0">
+                <a:solidFill>
+                  <a:srgbClr val="5A6470"/>
                 </a:solidFill>
                 <a:latin typeface="Arial" pitchFamily="34" charset="0"/>
                 <a:ea typeface="Arial" pitchFamily="34" charset="-122"/>
                 <a:cs typeface="Arial" pitchFamily="34" charset="-120"/>
               </a:rPr>
-              <a:t>12-slice corpus: government, banking, payments, mail, commerce, social, healthcare, enterprise, hard cases. Synthetic personas only; UIDAI test ranges for Aadhaar.</a:t>
-            </a:r>
-            <a:endParaRPr lang="en-US" sz="1250" dirty="0"/>
-          </a:p>
-          <a:p>
-            <a:pPr marL="152400" indent="-152400">
-              <a:lnSpc>
-                <a:spcPct val="118000"/>
-              </a:lnSpc>
-              <a:buSzPct val="100000"/>
-              <a:buChar char="•"/>
-            </a:pPr>
-            <a:r>
-              <a:rPr lang="en-US" sz="1250" dirty="0">
-                <a:solidFill>
-                  <a:srgbClr val="16181D"/>
-                </a:solidFill>
-                <a:latin typeface="Arial" pitchFamily="34" charset="0"/>
-                <a:ea typeface="Arial" pitchFamily="34" charset="-122"/>
-                <a:cs typeface="Arial" pitchFamily="34" charset="-120"/>
-              </a:rPr>
-              <a:t>Declared negatives make precision real: order IDs, toll-free helplines, appointment dates and employee IDs must NOT be masked, and are not.</a:t>
-            </a:r>
-            <a:endParaRPr lang="en-US" sz="1250" dirty="0"/>
-          </a:p>
-          <a:p>
-            <a:pPr marL="152400" indent="-152400">
-              <a:lnSpc>
-                <a:spcPct val="118000"/>
-              </a:lnSpc>
-              <a:buSzPct val="100000"/>
-              <a:buChar char="•"/>
-            </a:pPr>
-            <a:r>
-              <a:rPr lang="en-US" sz="1250" b="1" dirty="0">
-                <a:solidFill>
-                  <a:srgbClr val="16181D"/>
-                </a:solidFill>
-                <a:latin typeface="Arial" pitchFamily="34" charset="0"/>
-                <a:ea typeface="Arial" pitchFamily="34" charset="-122"/>
-                <a:cs typeface="Arial" pitchFamily="34" charset="-120"/>
-              </a:rPr>
-              <a:t>Checksum-validated classes (Aadhaar, PAN, GSTIN, cards, IFSC): 100% precision and recall.</a:t>
-            </a:r>
-            <a:endParaRPr lang="en-US" sz="1250" dirty="0"/>
-          </a:p>
-          <a:p>
-            <a:pPr marL="152400" indent="-152400">
-              <a:lnSpc>
-                <a:spcPct val="118000"/>
-              </a:lnSpc>
-              <a:buSzPct val="100000"/>
-              <a:buChar char="•"/>
-            </a:pPr>
-            <a:r>
-              <a:rPr lang="en-US" sz="1250" dirty="0">
-                <a:solidFill>
-                  <a:srgbClr val="16181D"/>
-                </a:solidFill>
-                <a:latin typeface="Arial" pitchFamily="34" charset="0"/>
-                <a:ea typeface="Arial" pitchFamily="34" charset="-122"/>
-                <a:cs typeface="Arial" pitchFamily="34" charset="-120"/>
-              </a:rPr>
-              <a:t>Known gaps are published, not hidden: free-text addresses and bare names await the NER tier. A CI test asserts the gap list is exactly that, so nothing regresses silently.</a:t>
-            </a:r>
-            <a:endParaRPr lang="en-US" sz="1250" dirty="0"/>
-          </a:p>
-          <a:p>
-            <a:pPr lvl="1" marL="254000" indent="-127000">
-              <a:lnSpc>
-                <a:spcPct val="118000"/>
-              </a:lnSpc>
-              <a:buSzPct val="100000"/>
-              <a:buChar char="–"/>
-            </a:pPr>
-            <a:r>
-              <a:rPr lang="en-US" sz="1200" dirty="0">
-                <a:solidFill>
-                  <a:srgbClr val="5A6470"/>
-                </a:solidFill>
-                <a:latin typeface="Arial" pitchFamily="34" charset="0"/>
-                <a:ea typeface="Arial" pitchFamily="34" charset="-122"/>
-                <a:cs typeface="Arial" pitchFamily="34" charset="-120"/>
-              </a:rPr>
-              <a:t>Reproduce: npm run bench</a:t>
-            </a:r>
-            <a:endParaRPr lang="en-US" sz="1250" dirty="0"/>
+              <a:t>Fortress mode: recall 94.3% (catches the PIN code) at the cost of one bounded false alarm. Negatives (order ids, helplines, appointment dates) must NOT be masked, and are not. Reproduce: npm run bench</a:t>
+            </a:r>
+            <a:endParaRPr lang="en-US" sz="950" dirty="0"/>
           </a:p>
         </p:txBody>
       </p:sp>
+      <p:pic>
+        <p:nvPicPr>
+          <p:cNvPr id="22" name="Image 0" descr="/Users/bhoomi/workspace/SIH 2026/browser-vision-agent/tools/deck/assets/chart-latency.png">    </p:cNvPr>
+          <p:cNvPicPr>
+            <a:picLocks noChangeAspect="1"/>
+          </p:cNvPicPr>
+          <p:nvPr/>
+        </p:nvPicPr>
+        <p:blipFill>
+          <a:blip r:embed="rId1"/>
+          <a:stretch>
+            <a:fillRect/>
+          </a:stretch>
+        </p:blipFill>
+        <p:spPr>
+          <a:xfrm>
+            <a:off x="6446520" y="2152864"/>
+            <a:ext cx="5257800" cy="4198192"/>
+          </a:xfrm>
+          <a:prstGeom prst="rect">
+            <a:avLst/>
+          </a:prstGeom>
+        </p:spPr>
+      </p:pic>
       <p:sp>
         <p:nvSpPr>
           <p:cNvPr id="25" name="Slide Number Placeholder 0"/>
@@ -6937,7 +8800,7 @@
                 <a:ea typeface="Arial" pitchFamily="34" charset="-122"/>
                 <a:cs typeface="Arial" pitchFamily="34" charset="-120"/>
               </a:rPr>
-              <a:t>FAST ENOUGH TO DISAPPEAR</a:t>
+              <a:t>THE BENCHMARK, CONTINUED</a:t>
             </a:r>
             <a:endParaRPr lang="en-US" sz="1100" dirty="0"/>
           </a:p>
@@ -6976,9 +8839,72 @@
                 <a:ea typeface="Arial" pitchFamily="34" charset="-122"/>
                 <a:cs typeface="Arial" pitchFamily="34" charset="-120"/>
               </a:rPr>
-              <a:t>Local pipeline: 16 ms measured against a 175 ms budget</a:t>
+              <a:t>Recall per class, and what the numbers protect</a:t>
             </a:r>
             <a:endParaRPr lang="en-US" sz="2600" dirty="0"/>
+          </a:p>
+        </p:txBody>
+      </p:sp>
+      <p:pic>
+        <p:nvPicPr>
+          <p:cNvPr id="4" name="Image 0" descr="/Users/bhoomi/workspace/SIH 2026/browser-vision-agent/tools/deck/assets/chart-recall.png">    </p:cNvPr>
+          <p:cNvPicPr>
+            <a:picLocks noChangeAspect="1"/>
+          </p:cNvPicPr>
+          <p:nvPr/>
+        </p:nvPicPr>
+        <p:blipFill>
+          <a:blip r:embed="rId1"/>
+          <a:stretch>
+            <a:fillRect/>
+          </a:stretch>
+        </p:blipFill>
+        <p:spPr>
+          <a:xfrm>
+            <a:off x="542962" y="1188720"/>
+            <a:ext cx="5680636" cy="5212080"/>
+          </a:xfrm>
+          <a:prstGeom prst="rect">
+            <a:avLst/>
+          </a:prstGeom>
+        </p:spPr>
+      </p:pic>
+      <p:sp>
+        <p:nvSpPr>
+          <p:cNvPr id="5" name="Text 2"/>
+          <p:cNvSpPr/>
+          <p:nvPr/>
+        </p:nvSpPr>
+        <p:spPr>
+          <a:xfrm>
+            <a:off x="6629400" y="1325880"/>
+            <a:ext cx="5029200" cy="274320"/>
+          </a:xfrm>
+          <a:prstGeom prst="rect">
+            <a:avLst/>
+          </a:prstGeom>
+          <a:noFill/>
+          <a:ln/>
+        </p:spPr>
+        <p:txBody>
+          <a:bodyPr wrap="square" rtlCol="0" anchor="ctr"/>
+          <a:lstStyle/>
+          <a:p>
+            <a:pPr indent="0" marL="0">
+              <a:buNone/>
+            </a:pPr>
+            <a:r>
+              <a:rPr lang="en-US" sz="1200" b="1" dirty="0">
+                <a:solidFill>
+                  <a:srgbClr val="1F4E79"/>
+                </a:solidFill>
+                <a:latin typeface="Arial" pitchFamily="34" charset="0"/>
+                <a:ea typeface="Arial" pitchFamily="34" charset="-122"/>
+                <a:cs typeface="Arial" pitchFamily="34" charset="-120"/>
+              </a:rPr>
+              <a:t>Blur-recovery attack (metric: redaction precision)</a:t>
+            </a:r>
+            <a:endParaRPr lang="en-US" sz="1200" dirty="0"/>
           </a:p>
         </p:txBody>
       </p:sp>
@@ -6997,19 +8923,19 @@
           </p:nvPr>
         </p:nvGraphicFramePr>
         <p:xfrm>
-          <a:off x="502920" y="1371600"/>
-          <a:ext cx="7498080" cy="914400"/>
+          <a:off x="6629400" y="1645920"/>
+          <a:ext cx="5029200" cy="914400"/>
         </p:xfrm>
         <a:graphic>
           <a:graphicData uri="http://schemas.openxmlformats.org/drawingml/2006/table">
             <a:tbl>
               <a:tblPr/>
               <a:tblGrid>
-                <a:gridCol w="5120640"/>
-                <a:gridCol w="1188720"/>
-                <a:gridCol w="1188720"/>
+                <a:gridCol w="1920240"/>
+                <a:gridCol w="1737360"/>
+                <a:gridCol w="1371600"/>
               </a:tblGrid>
-              <a:tr h="411480">
+              <a:tr h="384048">
                 <a:tc>
                   <a:txBody>
                     <a:bodyPr/>
@@ -7027,7 +8953,7 @@
                           <a:ea typeface="Arial" pitchFamily="34" charset="-122"/>
                           <a:cs typeface="Arial" pitchFamily="34" charset="-120"/>
                         </a:rPr>
-                        <a:t>Stage (real code paths)</a:t>
+                        <a:t>Redaction</a:t>
                       </a:r>
                       <a:endParaRPr lang="en-US" sz="1100" dirty="0">
                         <a:latin typeface="Arial" charset="0"/>
@@ -7095,7 +9021,7 @@
                           <a:ea typeface="Arial" pitchFamily="34" charset="-122"/>
                           <a:cs typeface="Arial" pitchFamily="34" charset="-120"/>
                         </a:rPr>
-                        <a:t>p50</a:t>
+                        <a:t>Digits recovered</a:t>
                       </a:r>
                       <a:endParaRPr lang="en-US" sz="1100" dirty="0">
                         <a:latin typeface="Arial" charset="0"/>
@@ -7163,7 +9089,7 @@
                           <a:ea typeface="Arial" pitchFamily="34" charset="-122"/>
                           <a:cs typeface="Arial" pitchFamily="34" charset="-120"/>
                         </a:rPr>
-                        <a:t>p95</a:t>
+                        <a:t>Signal</a:t>
                       </a:r>
                       <a:endParaRPr lang="en-US" sz="1100" dirty="0">
                         <a:latin typeface="Arial" charset="0"/>
@@ -7215,7 +9141,7 @@
                   </a:tcPr>
                 </a:tc>
               </a:tr>
-              <a:tr h="411480">
+              <a:tr h="384048">
                 <a:tc>
                   <a:txBody>
                     <a:bodyPr/>
@@ -7233,7 +9159,72 @@
                           <a:ea typeface="Arial" pitchFamily="34" charset="-122"/>
                           <a:cs typeface="Arial" pitchFamily="34" charset="-120"/>
                         </a:rPr>
-                        <a:t>Policy engine (full 12-capture corpus)</a:t>
+                        <a:t>Gaussian blur (sigma 14)</a:t>
+                      </a:r>
+                      <a:endParaRPr lang="en-US" sz="1050" dirty="0">
+                        <a:latin typeface="Arial" charset="0"/>
+                        <a:ea typeface="Arial" charset="0"/>
+                        <a:cs typeface="Arial" charset="0"/>
+                      </a:endParaRPr>
+                    </a:p>
+                  </a:txBody>
+                  <a:tcPr marL="91440" marR="91440" marT="45720" marB="45720" anchor="ctr">
+                    <a:lnL w="6350" cap="flat" cmpd="sng" algn="ctr">
+                      <a:solidFill>
+                        <a:srgbClr val="D6DAE0"/>
+                      </a:solidFill>
+                      <a:prstDash val="solid"/>
+                      <a:round/>
+                      <a:headEnd type="none" w="med" len="med"/>
+                      <a:tailEnd type="none" w="med" len="med"/>
+                    </a:lnL>
+                    <a:lnR w="6350" cap="flat" cmpd="sng" algn="ctr">
+                      <a:solidFill>
+                        <a:srgbClr val="D6DAE0"/>
+                      </a:solidFill>
+                      <a:prstDash val="solid"/>
+                      <a:round/>
+                      <a:headEnd type="none" w="med" len="med"/>
+                      <a:tailEnd type="none" w="med" len="med"/>
+                    </a:lnR>
+                    <a:lnT w="6350" cap="flat" cmpd="sng" algn="ctr">
+                      <a:solidFill>
+                        <a:srgbClr val="D6DAE0"/>
+                      </a:solidFill>
+                      <a:prstDash val="solid"/>
+                      <a:round/>
+                      <a:headEnd type="none" w="med" len="med"/>
+                      <a:tailEnd type="none" w="med" len="med"/>
+                    </a:lnT>
+                    <a:lnB w="6350" cap="flat" cmpd="sng" algn="ctr">
+                      <a:solidFill>
+                        <a:srgbClr val="D6DAE0"/>
+                      </a:solidFill>
+                      <a:prstDash val="solid"/>
+                      <a:round/>
+                      <a:headEnd type="none" w="med" len="med"/>
+                      <a:tailEnd type="none" w="med" len="med"/>
+                    </a:lnB>
+                  </a:tcPr>
+                </a:tc>
+                <a:tc>
+                  <a:txBody>
+                    <a:bodyPr/>
+                    <a:lstStyle/>
+                    <a:p>
+                      <a:pPr indent="0" marL="0">
+                        <a:buNone/>
+                      </a:pPr>
+                      <a:r>
+                        <a:rPr lang="en-US" sz="1050" b="1" dirty="0">
+                          <a:solidFill>
+                            <a:srgbClr val="7B2D26"/>
+                          </a:solidFill>
+                          <a:latin typeface="Arial" pitchFamily="34" charset="0"/>
+                          <a:ea typeface="Arial" pitchFamily="34" charset="-122"/>
+                          <a:cs typeface="Arial" pitchFamily="34" charset="-120"/>
+                        </a:rPr>
+                        <a:t>16 / 16 (100%)</a:t>
                       </a:r>
                       <a:endParaRPr lang="en-US" sz="1050" dirty="0">
                         <a:latin typeface="Arial" charset="0"/>
@@ -7298,7 +9289,139 @@
                           <a:ea typeface="Arial" pitchFamily="34" charset="-122"/>
                           <a:cs typeface="Arial" pitchFamily="34" charset="-120"/>
                         </a:rPr>
-                        <a:t>0.32 ms</a:t>
+                        <a:t>fully recoverable</a:t>
+                      </a:r>
+                      <a:endParaRPr lang="en-US" sz="1050" dirty="0">
+                        <a:latin typeface="Arial" charset="0"/>
+                        <a:ea typeface="Arial" charset="0"/>
+                        <a:cs typeface="Arial" charset="0"/>
+                      </a:endParaRPr>
+                    </a:p>
+                  </a:txBody>
+                  <a:tcPr marL="91440" marR="91440" marT="45720" marB="45720" anchor="ctr">
+                    <a:lnL w="6350" cap="flat" cmpd="sng" algn="ctr">
+                      <a:solidFill>
+                        <a:srgbClr val="D6DAE0"/>
+                      </a:solidFill>
+                      <a:prstDash val="solid"/>
+                      <a:round/>
+                      <a:headEnd type="none" w="med" len="med"/>
+                      <a:tailEnd type="none" w="med" len="med"/>
+                    </a:lnL>
+                    <a:lnR w="6350" cap="flat" cmpd="sng" algn="ctr">
+                      <a:solidFill>
+                        <a:srgbClr val="D6DAE0"/>
+                      </a:solidFill>
+                      <a:prstDash val="solid"/>
+                      <a:round/>
+                      <a:headEnd type="none" w="med" len="med"/>
+                      <a:tailEnd type="none" w="med" len="med"/>
+                    </a:lnR>
+                    <a:lnT w="6350" cap="flat" cmpd="sng" algn="ctr">
+                      <a:solidFill>
+                        <a:srgbClr val="D6DAE0"/>
+                      </a:solidFill>
+                      <a:prstDash val="solid"/>
+                      <a:round/>
+                      <a:headEnd type="none" w="med" len="med"/>
+                      <a:tailEnd type="none" w="med" len="med"/>
+                    </a:lnT>
+                    <a:lnB w="6350" cap="flat" cmpd="sng" algn="ctr">
+                      <a:solidFill>
+                        <a:srgbClr val="D6DAE0"/>
+                      </a:solidFill>
+                      <a:prstDash val="solid"/>
+                      <a:round/>
+                      <a:headEnd type="none" w="med" len="med"/>
+                      <a:tailEnd type="none" w="med" len="med"/>
+                    </a:lnB>
+                  </a:tcPr>
+                </a:tc>
+              </a:tr>
+              <a:tr h="384048">
+                <a:tc>
+                  <a:txBody>
+                    <a:bodyPr/>
+                    <a:lstStyle/>
+                    <a:p>
+                      <a:pPr indent="0" marL="0">
+                        <a:buNone/>
+                      </a:pPr>
+                      <a:r>
+                        <a:rPr lang="en-US" sz="1050" dirty="0">
+                          <a:solidFill>
+                            <a:srgbClr val="16181D"/>
+                          </a:solidFill>
+                          <a:latin typeface="Arial" pitchFamily="34" charset="0"/>
+                          <a:ea typeface="Arial" pitchFamily="34" charset="-122"/>
+                          <a:cs typeface="Arial" pitchFamily="34" charset="-120"/>
+                        </a:rPr>
+                        <a:t>Kavach flat fill</a:t>
+                      </a:r>
+                      <a:endParaRPr lang="en-US" sz="1050" dirty="0">
+                        <a:latin typeface="Arial" charset="0"/>
+                        <a:ea typeface="Arial" charset="0"/>
+                        <a:cs typeface="Arial" charset="0"/>
+                      </a:endParaRPr>
+                    </a:p>
+                  </a:txBody>
+                  <a:tcPr marL="91440" marR="91440" marT="45720" marB="45720" anchor="ctr">
+                    <a:lnL w="6350" cap="flat" cmpd="sng" algn="ctr">
+                      <a:solidFill>
+                        <a:srgbClr val="D6DAE0"/>
+                      </a:solidFill>
+                      <a:prstDash val="solid"/>
+                      <a:round/>
+                      <a:headEnd type="none" w="med" len="med"/>
+                      <a:tailEnd type="none" w="med" len="med"/>
+                    </a:lnL>
+                    <a:lnR w="6350" cap="flat" cmpd="sng" algn="ctr">
+                      <a:solidFill>
+                        <a:srgbClr val="D6DAE0"/>
+                      </a:solidFill>
+                      <a:prstDash val="solid"/>
+                      <a:round/>
+                      <a:headEnd type="none" w="med" len="med"/>
+                      <a:tailEnd type="none" w="med" len="med"/>
+                    </a:lnR>
+                    <a:lnT w="6350" cap="flat" cmpd="sng" algn="ctr">
+                      <a:solidFill>
+                        <a:srgbClr val="D6DAE0"/>
+                      </a:solidFill>
+                      <a:prstDash val="solid"/>
+                      <a:round/>
+                      <a:headEnd type="none" w="med" len="med"/>
+                      <a:tailEnd type="none" w="med" len="med"/>
+                    </a:lnT>
+                    <a:lnB w="6350" cap="flat" cmpd="sng" algn="ctr">
+                      <a:solidFill>
+                        <a:srgbClr val="D6DAE0"/>
+                      </a:solidFill>
+                      <a:prstDash val="solid"/>
+                      <a:round/>
+                      <a:headEnd type="none" w="med" len="med"/>
+                      <a:tailEnd type="none" w="med" len="med"/>
+                    </a:lnB>
+                  </a:tcPr>
+                </a:tc>
+                <a:tc>
+                  <a:txBody>
+                    <a:bodyPr/>
+                    <a:lstStyle/>
+                    <a:p>
+                      <a:pPr indent="0" marL="0">
+                        <a:buNone/>
+                      </a:pPr>
+                      <a:r>
+                        <a:rPr lang="en-US" sz="1050" b="1" dirty="0">
+                          <a:solidFill>
+                            <a:srgbClr val="3D5A3D"/>
+                          </a:solidFill>
+                          <a:latin typeface="Arial" pitchFamily="34" charset="0"/>
+                          <a:ea typeface="Arial" pitchFamily="34" charset="-122"/>
+                          <a:cs typeface="Arial" pitchFamily="34" charset="-120"/>
+                        </a:rPr>
+                        <a:t>1 / 16 (chance)</a:t>
                       </a:r>
                       <a:endParaRPr lang="en-US" sz="1050" dirty="0">
                         <a:latin typeface="Arial" charset="0"/>
@@ -7363,7 +9486,7 @@
                           <a:ea typeface="Arial" pitchFamily="34" charset="-122"/>
                           <a:cs typeface="Arial" pitchFamily="34" charset="-120"/>
                         </a:rPr>
-                        <a:t>0.47 ms</a:t>
+                        <a:t>zero plaintext info</a:t>
                       </a:r>
                       <a:endParaRPr lang="en-US" sz="1050" dirty="0">
                         <a:latin typeface="Arial" charset="0"/>
@@ -7412,7 +9535,214 @@
                   </a:tcPr>
                 </a:tc>
               </a:tr>
-              <a:tr h="411480">
+            </a:tbl>
+          </a:graphicData>
+        </a:graphic>
+      </p:graphicFrame>
+      <p:sp>
+        <p:nvSpPr>
+          <p:cNvPr id="7" name="Text 3"/>
+          <p:cNvSpPr/>
+          <p:nvPr/>
+        </p:nvSpPr>
+        <p:spPr>
+          <a:xfrm>
+            <a:off x="6629400" y="2971800"/>
+            <a:ext cx="5029200" cy="274320"/>
+          </a:xfrm>
+          <a:prstGeom prst="rect">
+            <a:avLst/>
+          </a:prstGeom>
+          <a:noFill/>
+          <a:ln/>
+        </p:spPr>
+        <p:txBody>
+          <a:bodyPr wrap="square" rtlCol="0" anchor="ctr"/>
+          <a:lstStyle/>
+          <a:p>
+            <a:pPr indent="0" marL="0">
+              <a:buNone/>
+            </a:pPr>
+            <a:r>
+              <a:rPr lang="en-US" sz="1200" b="1" dirty="0">
+                <a:solidFill>
+                  <a:srgbClr val="1F4E79"/>
+                </a:solidFill>
+                <a:latin typeface="Arial" pitchFamily="34" charset="0"/>
+                <a:ea typeface="Arial" pitchFamily="34" charset="-122"/>
+                <a:cs typeface="Arial" pitchFamily="34" charset="-120"/>
+              </a:rPr>
+              <a:t>Red team (report section 6.3, executable)</a:t>
+            </a:r>
+            <a:endParaRPr lang="en-US" sz="1200" dirty="0"/>
+          </a:p>
+        </p:txBody>
+      </p:sp>
+      <p:graphicFrame>
+        <p:nvGraphicFramePr>
+          <p:cNvPr id="39" name="Table 1"/>
+          <p:cNvGraphicFramePr>
+            <a:graphicFrameLocks noGrp="1"/>
+          </p:cNvGraphicFramePr>
+          <p:nvPr>
+            <p:extLst>
+              <p:ext uri="{D42A27DB-BD31-4B8C-83A1-F6EECF244321}">
+                <p14:modId xmlns:p14="http://schemas.microsoft.com/office/powerpoint/2010/main" val="1579011935"/>
+              </p:ext>
+            </p:extLst>
+          </p:nvPr>
+        </p:nvGraphicFramePr>
+        <p:xfrm>
+          <a:off x="6629400" y="3291840"/>
+          <a:ext cx="5029200" cy="914400"/>
+        </p:xfrm>
+        <a:graphic>
+          <a:graphicData uri="http://schemas.openxmlformats.org/drawingml/2006/table">
+            <a:tbl>
+              <a:tblPr/>
+              <a:tblGrid>
+                <a:gridCol w="3291840"/>
+                <a:gridCol w="1737360"/>
+              </a:tblGrid>
+              <a:tr h="320040">
+                <a:tc>
+                  <a:txBody>
+                    <a:bodyPr/>
+                    <a:lstStyle/>
+                    <a:p>
+                      <a:pPr indent="0" marL="0">
+                        <a:buNone/>
+                      </a:pPr>
+                      <a:r>
+                        <a:rPr lang="en-US" sz="1100" b="1" dirty="0">
+                          <a:solidFill>
+                            <a:srgbClr val="FFFFFF"/>
+                          </a:solidFill>
+                          <a:latin typeface="Arial" pitchFamily="34" charset="0"/>
+                          <a:ea typeface="Arial" pitchFamily="34" charset="-122"/>
+                          <a:cs typeface="Arial" pitchFamily="34" charset="-120"/>
+                        </a:rPr>
+                        <a:t>Attack</a:t>
+                      </a:r>
+                      <a:endParaRPr lang="en-US" sz="1100" dirty="0">
+                        <a:latin typeface="Arial" charset="0"/>
+                        <a:ea typeface="Arial" charset="0"/>
+                        <a:cs typeface="Arial" charset="0"/>
+                      </a:endParaRPr>
+                    </a:p>
+                  </a:txBody>
+                  <a:tcPr marL="91440" marR="91440" marT="45720" marB="45720" anchor="ctr">
+                    <a:lnL w="6350" cap="flat" cmpd="sng" algn="ctr">
+                      <a:solidFill>
+                        <a:srgbClr val="D6DAE0"/>
+                      </a:solidFill>
+                      <a:prstDash val="solid"/>
+                      <a:round/>
+                      <a:headEnd type="none" w="med" len="med"/>
+                      <a:tailEnd type="none" w="med" len="med"/>
+                    </a:lnL>
+                    <a:lnR w="6350" cap="flat" cmpd="sng" algn="ctr">
+                      <a:solidFill>
+                        <a:srgbClr val="D6DAE0"/>
+                      </a:solidFill>
+                      <a:prstDash val="solid"/>
+                      <a:round/>
+                      <a:headEnd type="none" w="med" len="med"/>
+                      <a:tailEnd type="none" w="med" len="med"/>
+                    </a:lnR>
+                    <a:lnT w="6350" cap="flat" cmpd="sng" algn="ctr">
+                      <a:solidFill>
+                        <a:srgbClr val="D6DAE0"/>
+                      </a:solidFill>
+                      <a:prstDash val="solid"/>
+                      <a:round/>
+                      <a:headEnd type="none" w="med" len="med"/>
+                      <a:tailEnd type="none" w="med" len="med"/>
+                    </a:lnT>
+                    <a:lnB w="6350" cap="flat" cmpd="sng" algn="ctr">
+                      <a:solidFill>
+                        <a:srgbClr val="D6DAE0"/>
+                      </a:solidFill>
+                      <a:prstDash val="solid"/>
+                      <a:round/>
+                      <a:headEnd type="none" w="med" len="med"/>
+                      <a:tailEnd type="none" w="med" len="med"/>
+                    </a:lnB>
+                    <a:solidFill>
+                      <a:srgbClr val="1F4E79"/>
+                    </a:solidFill>
+                  </a:tcPr>
+                </a:tc>
+                <a:tc>
+                  <a:txBody>
+                    <a:bodyPr/>
+                    <a:lstStyle/>
+                    <a:p>
+                      <a:pPr indent="0" marL="0">
+                        <a:buNone/>
+                      </a:pPr>
+                      <a:r>
+                        <a:rPr lang="en-US" sz="1100" b="1" dirty="0">
+                          <a:solidFill>
+                            <a:srgbClr val="FFFFFF"/>
+                          </a:solidFill>
+                          <a:latin typeface="Arial" pitchFamily="34" charset="0"/>
+                          <a:ea typeface="Arial" pitchFamily="34" charset="-122"/>
+                          <a:cs typeface="Arial" pitchFamily="34" charset="-120"/>
+                        </a:rPr>
+                        <a:t>Result</a:t>
+                      </a:r>
+                      <a:endParaRPr lang="en-US" sz="1100" dirty="0">
+                        <a:latin typeface="Arial" charset="0"/>
+                        <a:ea typeface="Arial" charset="0"/>
+                        <a:cs typeface="Arial" charset="0"/>
+                      </a:endParaRPr>
+                    </a:p>
+                  </a:txBody>
+                  <a:tcPr marL="91440" marR="91440" marT="45720" marB="45720" anchor="ctr">
+                    <a:lnL w="6350" cap="flat" cmpd="sng" algn="ctr">
+                      <a:solidFill>
+                        <a:srgbClr val="D6DAE0"/>
+                      </a:solidFill>
+                      <a:prstDash val="solid"/>
+                      <a:round/>
+                      <a:headEnd type="none" w="med" len="med"/>
+                      <a:tailEnd type="none" w="med" len="med"/>
+                    </a:lnL>
+                    <a:lnR w="6350" cap="flat" cmpd="sng" algn="ctr">
+                      <a:solidFill>
+                        <a:srgbClr val="D6DAE0"/>
+                      </a:solidFill>
+                      <a:prstDash val="solid"/>
+                      <a:round/>
+                      <a:headEnd type="none" w="med" len="med"/>
+                      <a:tailEnd type="none" w="med" len="med"/>
+                    </a:lnR>
+                    <a:lnT w="6350" cap="flat" cmpd="sng" algn="ctr">
+                      <a:solidFill>
+                        <a:srgbClr val="D6DAE0"/>
+                      </a:solidFill>
+                      <a:prstDash val="solid"/>
+                      <a:round/>
+                      <a:headEnd type="none" w="med" len="med"/>
+                      <a:tailEnd type="none" w="med" len="med"/>
+                    </a:lnT>
+                    <a:lnB w="6350" cap="flat" cmpd="sng" algn="ctr">
+                      <a:solidFill>
+                        <a:srgbClr val="D6DAE0"/>
+                      </a:solidFill>
+                      <a:prstDash val="solid"/>
+                      <a:round/>
+                      <a:headEnd type="none" w="med" len="med"/>
+                      <a:tailEnd type="none" w="med" len="med"/>
+                    </a:lnB>
+                    <a:solidFill>
+                      <a:srgbClr val="1F4E79"/>
+                    </a:solidFill>
+                  </a:tcPr>
+                </a:tc>
+              </a:tr>
+              <a:tr h="320040">
                 <a:tc>
                   <a:txBody>
                     <a:bodyPr/>
@@ -7430,7 +9760,7 @@
                           <a:ea typeface="Arial" pitchFamily="34" charset="-122"/>
                           <a:cs typeface="Arial" pitchFamily="34" charset="-120"/>
                         </a:rPr>
-                        <a:t>Egress gate: validate + tripwire + vault + guard</a:t>
+                        <a:t>PII split across adjacent DOM nodes</a:t>
                       </a:r>
                       <a:endParaRPr lang="en-US" sz="1050" dirty="0">
                         <a:latin typeface="Arial" charset="0"/>
@@ -7478,6 +9808,73 @@
                     </a:lnB>
                   </a:tcPr>
                 </a:tc>
+                <a:tc>
+                  <a:txBody>
+                    <a:bodyPr/>
+                    <a:lstStyle/>
+                    <a:p>
+                      <a:pPr indent="0" marL="0">
+                        <a:buNone/>
+                      </a:pPr>
+                      <a:r>
+                        <a:rPr lang="en-US" sz="1050" b="1" dirty="0">
+                          <a:solidFill>
+                            <a:srgbClr val="3D5A3D"/>
+                          </a:solidFill>
+                          <a:latin typeface="Arial" pitchFamily="34" charset="0"/>
+                          <a:ea typeface="Arial" pitchFamily="34" charset="-122"/>
+                          <a:cs typeface="Arial" pitchFamily="34" charset="-120"/>
+                        </a:rPr>
+                        <a:t>caught, reassembled</a:t>
+                      </a:r>
+                      <a:endParaRPr lang="en-US" sz="1050" dirty="0">
+                        <a:latin typeface="Arial" charset="0"/>
+                        <a:ea typeface="Arial" charset="0"/>
+                        <a:cs typeface="Arial" charset="0"/>
+                      </a:endParaRPr>
+                    </a:p>
+                  </a:txBody>
+                  <a:tcPr marL="91440" marR="91440" marT="45720" marB="45720" anchor="ctr">
+                    <a:lnL w="6350" cap="flat" cmpd="sng" algn="ctr">
+                      <a:solidFill>
+                        <a:srgbClr val="D6DAE0"/>
+                      </a:solidFill>
+                      <a:prstDash val="solid"/>
+                      <a:round/>
+                      <a:headEnd type="none" w="med" len="med"/>
+                      <a:tailEnd type="none" w="med" len="med"/>
+                    </a:lnL>
+                    <a:lnR w="6350" cap="flat" cmpd="sng" algn="ctr">
+                      <a:solidFill>
+                        <a:srgbClr val="D6DAE0"/>
+                      </a:solidFill>
+                      <a:prstDash val="solid"/>
+                      <a:round/>
+                      <a:headEnd type="none" w="med" len="med"/>
+                      <a:tailEnd type="none" w="med" len="med"/>
+                    </a:lnR>
+                    <a:lnT w="6350" cap="flat" cmpd="sng" algn="ctr">
+                      <a:solidFill>
+                        <a:srgbClr val="D6DAE0"/>
+                      </a:solidFill>
+                      <a:prstDash val="solid"/>
+                      <a:round/>
+                      <a:headEnd type="none" w="med" len="med"/>
+                      <a:tailEnd type="none" w="med" len="med"/>
+                    </a:lnT>
+                    <a:lnB w="6350" cap="flat" cmpd="sng" algn="ctr">
+                      <a:solidFill>
+                        <a:srgbClr val="D6DAE0"/>
+                      </a:solidFill>
+                      <a:prstDash val="solid"/>
+                      <a:round/>
+                      <a:headEnd type="none" w="med" len="med"/>
+                      <a:tailEnd type="none" w="med" len="med"/>
+                    </a:lnB>
+                  </a:tcPr>
+                </a:tc>
+              </a:tr>
+              <a:tr h="320040">
                 <a:tc>
                   <a:txBody>
                     <a:bodyPr/>
@@ -7495,7 +9892,7 @@
                           <a:ea typeface="Arial" pitchFamily="34" charset="-122"/>
                           <a:cs typeface="Arial" pitchFamily="34" charset="-120"/>
                         </a:rPr>
-                        <a:t>0.14 ms</a:t>
+                        <a:t>Prompt injection in page content</a:t>
                       </a:r>
                       <a:endParaRPr lang="en-US" sz="1050" dirty="0">
                         <a:latin typeface="Arial" charset="0"/>
@@ -7543,6 +9940,73 @@
                     </a:lnB>
                   </a:tcPr>
                 </a:tc>
+                <a:tc>
+                  <a:txBody>
+                    <a:bodyPr/>
+                    <a:lstStyle/>
+                    <a:p>
+                      <a:pPr indent="0" marL="0">
+                        <a:buNone/>
+                      </a:pPr>
+                      <a:r>
+                        <a:rPr lang="en-US" sz="1050" b="1" dirty="0">
+                          <a:solidFill>
+                            <a:srgbClr val="3D5A3D"/>
+                          </a:solidFill>
+                          <a:latin typeface="Arial" pitchFamily="34" charset="0"/>
+                          <a:ea typeface="Arial" pitchFamily="34" charset="-122"/>
+                          <a:cs typeface="Arial" pitchFamily="34" charset="-120"/>
+                        </a:rPr>
+                        <a:t>quarantined</a:t>
+                      </a:r>
+                      <a:endParaRPr lang="en-US" sz="1050" dirty="0">
+                        <a:latin typeface="Arial" charset="0"/>
+                        <a:ea typeface="Arial" charset="0"/>
+                        <a:cs typeface="Arial" charset="0"/>
+                      </a:endParaRPr>
+                    </a:p>
+                  </a:txBody>
+                  <a:tcPr marL="91440" marR="91440" marT="45720" marB="45720" anchor="ctr">
+                    <a:lnL w="6350" cap="flat" cmpd="sng" algn="ctr">
+                      <a:solidFill>
+                        <a:srgbClr val="D6DAE0"/>
+                      </a:solidFill>
+                      <a:prstDash val="solid"/>
+                      <a:round/>
+                      <a:headEnd type="none" w="med" len="med"/>
+                      <a:tailEnd type="none" w="med" len="med"/>
+                    </a:lnL>
+                    <a:lnR w="6350" cap="flat" cmpd="sng" algn="ctr">
+                      <a:solidFill>
+                        <a:srgbClr val="D6DAE0"/>
+                      </a:solidFill>
+                      <a:prstDash val="solid"/>
+                      <a:round/>
+                      <a:headEnd type="none" w="med" len="med"/>
+                      <a:tailEnd type="none" w="med" len="med"/>
+                    </a:lnR>
+                    <a:lnT w="6350" cap="flat" cmpd="sng" algn="ctr">
+                      <a:solidFill>
+                        <a:srgbClr val="D6DAE0"/>
+                      </a:solidFill>
+                      <a:prstDash val="solid"/>
+                      <a:round/>
+                      <a:headEnd type="none" w="med" len="med"/>
+                      <a:tailEnd type="none" w="med" len="med"/>
+                    </a:lnT>
+                    <a:lnB w="6350" cap="flat" cmpd="sng" algn="ctr">
+                      <a:solidFill>
+                        <a:srgbClr val="D6DAE0"/>
+                      </a:solidFill>
+                      <a:prstDash val="solid"/>
+                      <a:round/>
+                      <a:headEnd type="none" w="med" len="med"/>
+                      <a:tailEnd type="none" w="med" len="med"/>
+                    </a:lnB>
+                  </a:tcPr>
+                </a:tc>
+              </a:tr>
+              <a:tr h="320040">
                 <a:tc>
                   <a:txBody>
                     <a:bodyPr/>
@@ -7560,7 +10024,7 @@
                           <a:ea typeface="Arial" pitchFamily="34" charset="-122"/>
                           <a:cs typeface="Arial" pitchFamily="34" charset="-120"/>
                         </a:rPr>
-                        <a:t>0.29 ms</a:t>
+                        <a:t>Compromised server names foreign element</a:t>
                       </a:r>
                       <a:endParaRPr lang="en-US" sz="1050" dirty="0">
                         <a:latin typeface="Arial" charset="0"/>
@@ -7608,8 +10072,73 @@
                     </a:lnB>
                   </a:tcPr>
                 </a:tc>
+                <a:tc>
+                  <a:txBody>
+                    <a:bodyPr/>
+                    <a:lstStyle/>
+                    <a:p>
+                      <a:pPr indent="0" marL="0">
+                        <a:buNone/>
+                      </a:pPr>
+                      <a:r>
+                        <a:rPr lang="en-US" sz="1050" b="1" dirty="0">
+                          <a:solidFill>
+                            <a:srgbClr val="3D5A3D"/>
+                          </a:solidFill>
+                          <a:latin typeface="Arial" pitchFamily="34" charset="0"/>
+                          <a:ea typeface="Arial" pitchFamily="34" charset="-122"/>
+                          <a:cs typeface="Arial" pitchFamily="34" charset="-120"/>
+                        </a:rPr>
+                        <a:t>plan rejected</a:t>
+                      </a:r>
+                      <a:endParaRPr lang="en-US" sz="1050" dirty="0">
+                        <a:latin typeface="Arial" charset="0"/>
+                        <a:ea typeface="Arial" charset="0"/>
+                        <a:cs typeface="Arial" charset="0"/>
+                      </a:endParaRPr>
+                    </a:p>
+                  </a:txBody>
+                  <a:tcPr marL="91440" marR="91440" marT="45720" marB="45720" anchor="ctr">
+                    <a:lnL w="6350" cap="flat" cmpd="sng" algn="ctr">
+                      <a:solidFill>
+                        <a:srgbClr val="D6DAE0"/>
+                      </a:solidFill>
+                      <a:prstDash val="solid"/>
+                      <a:round/>
+                      <a:headEnd type="none" w="med" len="med"/>
+                      <a:tailEnd type="none" w="med" len="med"/>
+                    </a:lnL>
+                    <a:lnR w="6350" cap="flat" cmpd="sng" algn="ctr">
+                      <a:solidFill>
+                        <a:srgbClr val="D6DAE0"/>
+                      </a:solidFill>
+                      <a:prstDash val="solid"/>
+                      <a:round/>
+                      <a:headEnd type="none" w="med" len="med"/>
+                      <a:tailEnd type="none" w="med" len="med"/>
+                    </a:lnR>
+                    <a:lnT w="6350" cap="flat" cmpd="sng" algn="ctr">
+                      <a:solidFill>
+                        <a:srgbClr val="D6DAE0"/>
+                      </a:solidFill>
+                      <a:prstDash val="solid"/>
+                      <a:round/>
+                      <a:headEnd type="none" w="med" len="med"/>
+                      <a:tailEnd type="none" w="med" len="med"/>
+                    </a:lnT>
+                    <a:lnB w="6350" cap="flat" cmpd="sng" algn="ctr">
+                      <a:solidFill>
+                        <a:srgbClr val="D6DAE0"/>
+                      </a:solidFill>
+                      <a:prstDash val="solid"/>
+                      <a:round/>
+                      <a:headEnd type="none" w="med" len="med"/>
+                      <a:tailEnd type="none" w="med" len="med"/>
+                    </a:lnB>
+                  </a:tcPr>
+                </a:tc>
               </a:tr>
-              <a:tr h="411480">
+              <a:tr h="320040">
                 <a:tc>
                   <a:txBody>
                     <a:bodyPr/>
@@ -7627,7 +10156,7 @@
                           <a:ea typeface="Arial" pitchFamily="34" charset="-122"/>
                           <a:cs typeface="Arial" pitchFamily="34" charset="-120"/>
                         </a:rPr>
-                        <a:t>Tile hashing (dirty-region skip), 1024x580</a:t>
+                        <a:t>PII smuggled via notes / history fields</a:t>
                       </a:r>
                       <a:endParaRPr lang="en-US" sz="1050" dirty="0">
                         <a:latin typeface="Arial" charset="0"/>
@@ -7675,6 +10204,73 @@
                     </a:lnB>
                   </a:tcPr>
                 </a:tc>
+                <a:tc>
+                  <a:txBody>
+                    <a:bodyPr/>
+                    <a:lstStyle/>
+                    <a:p>
+                      <a:pPr indent="0" marL="0">
+                        <a:buNone/>
+                      </a:pPr>
+                      <a:r>
+                        <a:rPr lang="en-US" sz="1050" b="1" dirty="0">
+                          <a:solidFill>
+                            <a:srgbClr val="3D5A3D"/>
+                          </a:solidFill>
+                          <a:latin typeface="Arial" pitchFamily="34" charset="0"/>
+                          <a:ea typeface="Arial" pitchFamily="34" charset="-122"/>
+                          <a:cs typeface="Arial" pitchFamily="34" charset="-120"/>
+                        </a:rPr>
+                        <a:t>gate blocks</a:t>
+                      </a:r>
+                      <a:endParaRPr lang="en-US" sz="1050" dirty="0">
+                        <a:latin typeface="Arial" charset="0"/>
+                        <a:ea typeface="Arial" charset="0"/>
+                        <a:cs typeface="Arial" charset="0"/>
+                      </a:endParaRPr>
+                    </a:p>
+                  </a:txBody>
+                  <a:tcPr marL="91440" marR="91440" marT="45720" marB="45720" anchor="ctr">
+                    <a:lnL w="6350" cap="flat" cmpd="sng" algn="ctr">
+                      <a:solidFill>
+                        <a:srgbClr val="D6DAE0"/>
+                      </a:solidFill>
+                      <a:prstDash val="solid"/>
+                      <a:round/>
+                      <a:headEnd type="none" w="med" len="med"/>
+                      <a:tailEnd type="none" w="med" len="med"/>
+                    </a:lnL>
+                    <a:lnR w="6350" cap="flat" cmpd="sng" algn="ctr">
+                      <a:solidFill>
+                        <a:srgbClr val="D6DAE0"/>
+                      </a:solidFill>
+                      <a:prstDash val="solid"/>
+                      <a:round/>
+                      <a:headEnd type="none" w="med" len="med"/>
+                      <a:tailEnd type="none" w="med" len="med"/>
+                    </a:lnR>
+                    <a:lnT w="6350" cap="flat" cmpd="sng" algn="ctr">
+                      <a:solidFill>
+                        <a:srgbClr val="D6DAE0"/>
+                      </a:solidFill>
+                      <a:prstDash val="solid"/>
+                      <a:round/>
+                      <a:headEnd type="none" w="med" len="med"/>
+                      <a:tailEnd type="none" w="med" len="med"/>
+                    </a:lnT>
+                    <a:lnB w="6350" cap="flat" cmpd="sng" algn="ctr">
+                      <a:solidFill>
+                        <a:srgbClr val="D6DAE0"/>
+                      </a:solidFill>
+                      <a:prstDash val="solid"/>
+                      <a:round/>
+                      <a:headEnd type="none" w="med" len="med"/>
+                      <a:tailEnd type="none" w="med" len="med"/>
+                    </a:lnB>
+                  </a:tcPr>
+                </a:tc>
+              </a:tr>
+              <a:tr h="320040">
                 <a:tc>
                   <a:txBody>
                     <a:bodyPr/>
@@ -7692,7 +10288,7 @@
                           <a:ea typeface="Arial" pitchFamily="34" charset="-122"/>
                           <a:cs typeface="Arial" pitchFamily="34" charset="-120"/>
                         </a:rPr>
-                        <a:t>0.21 ms</a:t>
+                        <a:t>Leaky packet sent straight to server</a:t>
                       </a:r>
                       <a:endParaRPr lang="en-US" sz="1050" dirty="0">
                         <a:latin typeface="Arial" charset="0"/>
@@ -7740,6 +10336,73 @@
                     </a:lnB>
                   </a:tcPr>
                 </a:tc>
+                <a:tc>
+                  <a:txBody>
+                    <a:bodyPr/>
+                    <a:lstStyle/>
+                    <a:p>
+                      <a:pPr indent="0" marL="0">
+                        <a:buNone/>
+                      </a:pPr>
+                      <a:r>
+                        <a:rPr lang="en-US" sz="1050" b="1" dirty="0">
+                          <a:solidFill>
+                            <a:srgbClr val="3D5A3D"/>
+                          </a:solidFill>
+                          <a:latin typeface="Arial" pitchFamily="34" charset="0"/>
+                          <a:ea typeface="Arial" pitchFamily="34" charset="-122"/>
+                          <a:cs typeface="Arial" pitchFamily="34" charset="-120"/>
+                        </a:rPr>
+                        <a:t>422, never processed</a:t>
+                      </a:r>
+                      <a:endParaRPr lang="en-US" sz="1050" dirty="0">
+                        <a:latin typeface="Arial" charset="0"/>
+                        <a:ea typeface="Arial" charset="0"/>
+                        <a:cs typeface="Arial" charset="0"/>
+                      </a:endParaRPr>
+                    </a:p>
+                  </a:txBody>
+                  <a:tcPr marL="91440" marR="91440" marT="45720" marB="45720" anchor="ctr">
+                    <a:lnL w="6350" cap="flat" cmpd="sng" algn="ctr">
+                      <a:solidFill>
+                        <a:srgbClr val="D6DAE0"/>
+                      </a:solidFill>
+                      <a:prstDash val="solid"/>
+                      <a:round/>
+                      <a:headEnd type="none" w="med" len="med"/>
+                      <a:tailEnd type="none" w="med" len="med"/>
+                    </a:lnL>
+                    <a:lnR w="6350" cap="flat" cmpd="sng" algn="ctr">
+                      <a:solidFill>
+                        <a:srgbClr val="D6DAE0"/>
+                      </a:solidFill>
+                      <a:prstDash val="solid"/>
+                      <a:round/>
+                      <a:headEnd type="none" w="med" len="med"/>
+                      <a:tailEnd type="none" w="med" len="med"/>
+                    </a:lnR>
+                    <a:lnT w="6350" cap="flat" cmpd="sng" algn="ctr">
+                      <a:solidFill>
+                        <a:srgbClr val="D6DAE0"/>
+                      </a:solidFill>
+                      <a:prstDash val="solid"/>
+                      <a:round/>
+                      <a:headEnd type="none" w="med" len="med"/>
+                      <a:tailEnd type="none" w="med" len="med"/>
+                    </a:lnT>
+                    <a:lnB w="6350" cap="flat" cmpd="sng" algn="ctr">
+                      <a:solidFill>
+                        <a:srgbClr val="D6DAE0"/>
+                      </a:solidFill>
+                      <a:prstDash val="solid"/>
+                      <a:round/>
+                      <a:headEnd type="none" w="med" len="med"/>
+                      <a:tailEnd type="none" w="med" len="med"/>
+                    </a:lnB>
+                  </a:tcPr>
+                </a:tc>
+              </a:tr>
+              <a:tr h="320040">
                 <a:tc>
                   <a:txBody>
                     <a:bodyPr/>
@@ -7757,7 +10420,7 @@
                           <a:ea typeface="Arial" pitchFamily="34" charset="-122"/>
                           <a:cs typeface="Arial" pitchFamily="34" charset="-120"/>
                         </a:rPr>
-                        <a:t>0.75 ms</a:t>
+                        <a:t>700-element packet / 1000-region page</a:t>
                       </a:r>
                       <a:endParaRPr lang="en-US" sz="1050" dirty="0">
                         <a:latin typeface="Arial" charset="0"/>
@@ -7805,8 +10468,73 @@
                     </a:lnB>
                   </a:tcPr>
                 </a:tc>
+                <a:tc>
+                  <a:txBody>
+                    <a:bodyPr/>
+                    <a:lstStyle/>
+                    <a:p>
+                      <a:pPr indent="0" marL="0">
+                        <a:buNone/>
+                      </a:pPr>
+                      <a:r>
+                        <a:rPr lang="en-US" sz="1050" b="1" dirty="0">
+                          <a:solidFill>
+                            <a:srgbClr val="3D5A3D"/>
+                          </a:solidFill>
+                          <a:latin typeface="Arial" pitchFamily="34" charset="0"/>
+                          <a:ea typeface="Arial" pitchFamily="34" charset="-122"/>
+                          <a:cs typeface="Arial" pitchFamily="34" charset="-120"/>
+                        </a:rPr>
+                        <a:t>capped, bounded</a:t>
+                      </a:r>
+                      <a:endParaRPr lang="en-US" sz="1050" dirty="0">
+                        <a:latin typeface="Arial" charset="0"/>
+                        <a:ea typeface="Arial" charset="0"/>
+                        <a:cs typeface="Arial" charset="0"/>
+                      </a:endParaRPr>
+                    </a:p>
+                  </a:txBody>
+                  <a:tcPr marL="91440" marR="91440" marT="45720" marB="45720" anchor="ctr">
+                    <a:lnL w="6350" cap="flat" cmpd="sng" algn="ctr">
+                      <a:solidFill>
+                        <a:srgbClr val="D6DAE0"/>
+                      </a:solidFill>
+                      <a:prstDash val="solid"/>
+                      <a:round/>
+                      <a:headEnd type="none" w="med" len="med"/>
+                      <a:tailEnd type="none" w="med" len="med"/>
+                    </a:lnL>
+                    <a:lnR w="6350" cap="flat" cmpd="sng" algn="ctr">
+                      <a:solidFill>
+                        <a:srgbClr val="D6DAE0"/>
+                      </a:solidFill>
+                      <a:prstDash val="solid"/>
+                      <a:round/>
+                      <a:headEnd type="none" w="med" len="med"/>
+                      <a:tailEnd type="none" w="med" len="med"/>
+                    </a:lnR>
+                    <a:lnT w="6350" cap="flat" cmpd="sng" algn="ctr">
+                      <a:solidFill>
+                        <a:srgbClr val="D6DAE0"/>
+                      </a:solidFill>
+                      <a:prstDash val="solid"/>
+                      <a:round/>
+                      <a:headEnd type="none" w="med" len="med"/>
+                      <a:tailEnd type="none" w="med" len="med"/>
+                    </a:lnT>
+                    <a:lnB w="6350" cap="flat" cmpd="sng" algn="ctr">
+                      <a:solidFill>
+                        <a:srgbClr val="D6DAE0"/>
+                      </a:solidFill>
+                      <a:prstDash val="solid"/>
+                      <a:round/>
+                      <a:headEnd type="none" w="med" len="med"/>
+                      <a:tailEnd type="none" w="med" len="med"/>
+                    </a:lnB>
+                  </a:tcPr>
+                </a:tc>
               </a:tr>
-              <a:tr h="411480">
+              <a:tr h="320040">
                 <a:tc>
                   <a:txBody>
                     <a:bodyPr/>
@@ -7824,401 +10552,7 @@
                           <a:ea typeface="Arial" pitchFamily="34" charset="-122"/>
                           <a:cs typeface="Arial" pitchFamily="34" charset="-120"/>
                         </a:rPr>
-                        <a:t>Compose + pixel self-check (8 redactions)</a:t>
-                      </a:r>
-                      <a:endParaRPr lang="en-US" sz="1050" dirty="0">
-                        <a:latin typeface="Arial" charset="0"/>
-                        <a:ea typeface="Arial" charset="0"/>
-                        <a:cs typeface="Arial" charset="0"/>
-                      </a:endParaRPr>
-                    </a:p>
-                  </a:txBody>
-                  <a:tcPr marL="91440" marR="91440" marT="45720" marB="45720" anchor="ctr">
-                    <a:lnL w="6350" cap="flat" cmpd="sng" algn="ctr">
-                      <a:solidFill>
-                        <a:srgbClr val="D6DAE0"/>
-                      </a:solidFill>
-                      <a:prstDash val="solid"/>
-                      <a:round/>
-                      <a:headEnd type="none" w="med" len="med"/>
-                      <a:tailEnd type="none" w="med" len="med"/>
-                    </a:lnL>
-                    <a:lnR w="6350" cap="flat" cmpd="sng" algn="ctr">
-                      <a:solidFill>
-                        <a:srgbClr val="D6DAE0"/>
-                      </a:solidFill>
-                      <a:prstDash val="solid"/>
-                      <a:round/>
-                      <a:headEnd type="none" w="med" len="med"/>
-                      <a:tailEnd type="none" w="med" len="med"/>
-                    </a:lnR>
-                    <a:lnT w="6350" cap="flat" cmpd="sng" algn="ctr">
-                      <a:solidFill>
-                        <a:srgbClr val="D6DAE0"/>
-                      </a:solidFill>
-                      <a:prstDash val="solid"/>
-                      <a:round/>
-                      <a:headEnd type="none" w="med" len="med"/>
-                      <a:tailEnd type="none" w="med" len="med"/>
-                    </a:lnT>
-                    <a:lnB w="6350" cap="flat" cmpd="sng" algn="ctr">
-                      <a:solidFill>
-                        <a:srgbClr val="D6DAE0"/>
-                      </a:solidFill>
-                      <a:prstDash val="solid"/>
-                      <a:round/>
-                      <a:headEnd type="none" w="med" len="med"/>
-                      <a:tailEnd type="none" w="med" len="med"/>
-                    </a:lnB>
-                  </a:tcPr>
-                </a:tc>
-                <a:tc>
-                  <a:txBody>
-                    <a:bodyPr/>
-                    <a:lstStyle/>
-                    <a:p>
-                      <a:pPr indent="0" marL="0">
-                        <a:buNone/>
-                      </a:pPr>
-                      <a:r>
-                        <a:rPr lang="en-US" sz="1050" dirty="0">
-                          <a:solidFill>
-                            <a:srgbClr val="16181D"/>
-                          </a:solidFill>
-                          <a:latin typeface="Arial" pitchFamily="34" charset="0"/>
-                          <a:ea typeface="Arial" pitchFamily="34" charset="-122"/>
-                          <a:cs typeface="Arial" pitchFamily="34" charset="-120"/>
-                        </a:rPr>
-                        <a:t>1.88 ms</a:t>
-                      </a:r>
-                      <a:endParaRPr lang="en-US" sz="1050" dirty="0">
-                        <a:latin typeface="Arial" charset="0"/>
-                        <a:ea typeface="Arial" charset="0"/>
-                        <a:cs typeface="Arial" charset="0"/>
-                      </a:endParaRPr>
-                    </a:p>
-                  </a:txBody>
-                  <a:tcPr marL="91440" marR="91440" marT="45720" marB="45720" anchor="ctr">
-                    <a:lnL w="6350" cap="flat" cmpd="sng" algn="ctr">
-                      <a:solidFill>
-                        <a:srgbClr val="D6DAE0"/>
-                      </a:solidFill>
-                      <a:prstDash val="solid"/>
-                      <a:round/>
-                      <a:headEnd type="none" w="med" len="med"/>
-                      <a:tailEnd type="none" w="med" len="med"/>
-                    </a:lnL>
-                    <a:lnR w="6350" cap="flat" cmpd="sng" algn="ctr">
-                      <a:solidFill>
-                        <a:srgbClr val="D6DAE0"/>
-                      </a:solidFill>
-                      <a:prstDash val="solid"/>
-                      <a:round/>
-                      <a:headEnd type="none" w="med" len="med"/>
-                      <a:tailEnd type="none" w="med" len="med"/>
-                    </a:lnR>
-                    <a:lnT w="6350" cap="flat" cmpd="sng" algn="ctr">
-                      <a:solidFill>
-                        <a:srgbClr val="D6DAE0"/>
-                      </a:solidFill>
-                      <a:prstDash val="solid"/>
-                      <a:round/>
-                      <a:headEnd type="none" w="med" len="med"/>
-                      <a:tailEnd type="none" w="med" len="med"/>
-                    </a:lnT>
-                    <a:lnB w="6350" cap="flat" cmpd="sng" algn="ctr">
-                      <a:solidFill>
-                        <a:srgbClr val="D6DAE0"/>
-                      </a:solidFill>
-                      <a:prstDash val="solid"/>
-                      <a:round/>
-                      <a:headEnd type="none" w="med" len="med"/>
-                      <a:tailEnd type="none" w="med" len="med"/>
-                    </a:lnB>
-                  </a:tcPr>
-                </a:tc>
-                <a:tc>
-                  <a:txBody>
-                    <a:bodyPr/>
-                    <a:lstStyle/>
-                    <a:p>
-                      <a:pPr indent="0" marL="0">
-                        <a:buNone/>
-                      </a:pPr>
-                      <a:r>
-                        <a:rPr lang="en-US" sz="1050" dirty="0">
-                          <a:solidFill>
-                            <a:srgbClr val="16181D"/>
-                          </a:solidFill>
-                          <a:latin typeface="Arial" pitchFamily="34" charset="0"/>
-                          <a:ea typeface="Arial" pitchFamily="34" charset="-122"/>
-                          <a:cs typeface="Arial" pitchFamily="34" charset="-120"/>
-                        </a:rPr>
-                        <a:t>3.57 ms</a:t>
-                      </a:r>
-                      <a:endParaRPr lang="en-US" sz="1050" dirty="0">
-                        <a:latin typeface="Arial" charset="0"/>
-                        <a:ea typeface="Arial" charset="0"/>
-                        <a:cs typeface="Arial" charset="0"/>
-                      </a:endParaRPr>
-                    </a:p>
-                  </a:txBody>
-                  <a:tcPr marL="91440" marR="91440" marT="45720" marB="45720" anchor="ctr">
-                    <a:lnL w="6350" cap="flat" cmpd="sng" algn="ctr">
-                      <a:solidFill>
-                        <a:srgbClr val="D6DAE0"/>
-                      </a:solidFill>
-                      <a:prstDash val="solid"/>
-                      <a:round/>
-                      <a:headEnd type="none" w="med" len="med"/>
-                      <a:tailEnd type="none" w="med" len="med"/>
-                    </a:lnL>
-                    <a:lnR w="6350" cap="flat" cmpd="sng" algn="ctr">
-                      <a:solidFill>
-                        <a:srgbClr val="D6DAE0"/>
-                      </a:solidFill>
-                      <a:prstDash val="solid"/>
-                      <a:round/>
-                      <a:headEnd type="none" w="med" len="med"/>
-                      <a:tailEnd type="none" w="med" len="med"/>
-                    </a:lnR>
-                    <a:lnT w="6350" cap="flat" cmpd="sng" algn="ctr">
-                      <a:solidFill>
-                        <a:srgbClr val="D6DAE0"/>
-                      </a:solidFill>
-                      <a:prstDash val="solid"/>
-                      <a:round/>
-                      <a:headEnd type="none" w="med" len="med"/>
-                      <a:tailEnd type="none" w="med" len="med"/>
-                    </a:lnT>
-                    <a:lnB w="6350" cap="flat" cmpd="sng" algn="ctr">
-                      <a:solidFill>
-                        <a:srgbClr val="D6DAE0"/>
-                      </a:solidFill>
-                      <a:prstDash val="solid"/>
-                      <a:round/>
-                      <a:headEnd type="none" w="med" len="med"/>
-                      <a:tailEnd type="none" w="med" len="med"/>
-                    </a:lnB>
-                  </a:tcPr>
-                </a:tc>
-              </a:tr>
-              <a:tr h="411480">
-                <a:tc>
-                  <a:txBody>
-                    <a:bodyPr/>
-                    <a:lstStyle/>
-                    <a:p>
-                      <a:pPr indent="0" marL="0">
-                        <a:buNone/>
-                      </a:pPr>
-                      <a:r>
-                        <a:rPr lang="en-US" sz="1050" dirty="0">
-                          <a:solidFill>
-                            <a:srgbClr val="16181D"/>
-                          </a:solidFill>
-                          <a:latin typeface="Arial" pitchFamily="34" charset="0"/>
-                          <a:ea typeface="Arial" pitchFamily="34" charset="-122"/>
-                          <a:cs typeface="Arial" pitchFamily="34" charset="-120"/>
-                        </a:rPr>
-                        <a:t>Face preprocess (resize + normalize)</a:t>
-                      </a:r>
-                      <a:endParaRPr lang="en-US" sz="1050" dirty="0">
-                        <a:latin typeface="Arial" charset="0"/>
-                        <a:ea typeface="Arial" charset="0"/>
-                        <a:cs typeface="Arial" charset="0"/>
-                      </a:endParaRPr>
-                    </a:p>
-                  </a:txBody>
-                  <a:tcPr marL="91440" marR="91440" marT="45720" marB="45720" anchor="ctr">
-                    <a:lnL w="6350" cap="flat" cmpd="sng" algn="ctr">
-                      <a:solidFill>
-                        <a:srgbClr val="D6DAE0"/>
-                      </a:solidFill>
-                      <a:prstDash val="solid"/>
-                      <a:round/>
-                      <a:headEnd type="none" w="med" len="med"/>
-                      <a:tailEnd type="none" w="med" len="med"/>
-                    </a:lnL>
-                    <a:lnR w="6350" cap="flat" cmpd="sng" algn="ctr">
-                      <a:solidFill>
-                        <a:srgbClr val="D6DAE0"/>
-                      </a:solidFill>
-                      <a:prstDash val="solid"/>
-                      <a:round/>
-                      <a:headEnd type="none" w="med" len="med"/>
-                      <a:tailEnd type="none" w="med" len="med"/>
-                    </a:lnR>
-                    <a:lnT w="6350" cap="flat" cmpd="sng" algn="ctr">
-                      <a:solidFill>
-                        <a:srgbClr val="D6DAE0"/>
-                      </a:solidFill>
-                      <a:prstDash val="solid"/>
-                      <a:round/>
-                      <a:headEnd type="none" w="med" len="med"/>
-                      <a:tailEnd type="none" w="med" len="med"/>
-                    </a:lnT>
-                    <a:lnB w="6350" cap="flat" cmpd="sng" algn="ctr">
-                      <a:solidFill>
-                        <a:srgbClr val="D6DAE0"/>
-                      </a:solidFill>
-                      <a:prstDash val="solid"/>
-                      <a:round/>
-                      <a:headEnd type="none" w="med" len="med"/>
-                      <a:tailEnd type="none" w="med" len="med"/>
-                    </a:lnB>
-                  </a:tcPr>
-                </a:tc>
-                <a:tc>
-                  <a:txBody>
-                    <a:bodyPr/>
-                    <a:lstStyle/>
-                    <a:p>
-                      <a:pPr indent="0" marL="0">
-                        <a:buNone/>
-                      </a:pPr>
-                      <a:r>
-                        <a:rPr lang="en-US" sz="1050" dirty="0">
-                          <a:solidFill>
-                            <a:srgbClr val="16181D"/>
-                          </a:solidFill>
-                          <a:latin typeface="Arial" pitchFamily="34" charset="0"/>
-                          <a:ea typeface="Arial" pitchFamily="34" charset="-122"/>
-                          <a:cs typeface="Arial" pitchFamily="34" charset="-120"/>
-                        </a:rPr>
-                        <a:t>1.01 ms</a:t>
-                      </a:r>
-                      <a:endParaRPr lang="en-US" sz="1050" dirty="0">
-                        <a:latin typeface="Arial" charset="0"/>
-                        <a:ea typeface="Arial" charset="0"/>
-                        <a:cs typeface="Arial" charset="0"/>
-                      </a:endParaRPr>
-                    </a:p>
-                  </a:txBody>
-                  <a:tcPr marL="91440" marR="91440" marT="45720" marB="45720" anchor="ctr">
-                    <a:lnL w="6350" cap="flat" cmpd="sng" algn="ctr">
-                      <a:solidFill>
-                        <a:srgbClr val="D6DAE0"/>
-                      </a:solidFill>
-                      <a:prstDash val="solid"/>
-                      <a:round/>
-                      <a:headEnd type="none" w="med" len="med"/>
-                      <a:tailEnd type="none" w="med" len="med"/>
-                    </a:lnL>
-                    <a:lnR w="6350" cap="flat" cmpd="sng" algn="ctr">
-                      <a:solidFill>
-                        <a:srgbClr val="D6DAE0"/>
-                      </a:solidFill>
-                      <a:prstDash val="solid"/>
-                      <a:round/>
-                      <a:headEnd type="none" w="med" len="med"/>
-                      <a:tailEnd type="none" w="med" len="med"/>
-                    </a:lnR>
-                    <a:lnT w="6350" cap="flat" cmpd="sng" algn="ctr">
-                      <a:solidFill>
-                        <a:srgbClr val="D6DAE0"/>
-                      </a:solidFill>
-                      <a:prstDash val="solid"/>
-                      <a:round/>
-                      <a:headEnd type="none" w="med" len="med"/>
-                      <a:tailEnd type="none" w="med" len="med"/>
-                    </a:lnT>
-                    <a:lnB w="6350" cap="flat" cmpd="sng" algn="ctr">
-                      <a:solidFill>
-                        <a:srgbClr val="D6DAE0"/>
-                      </a:solidFill>
-                      <a:prstDash val="solid"/>
-                      <a:round/>
-                      <a:headEnd type="none" w="med" len="med"/>
-                      <a:tailEnd type="none" w="med" len="med"/>
-                    </a:lnB>
-                  </a:tcPr>
-                </a:tc>
-                <a:tc>
-                  <a:txBody>
-                    <a:bodyPr/>
-                    <a:lstStyle/>
-                    <a:p>
-                      <a:pPr indent="0" marL="0">
-                        <a:buNone/>
-                      </a:pPr>
-                      <a:r>
-                        <a:rPr lang="en-US" sz="1050" dirty="0">
-                          <a:solidFill>
-                            <a:srgbClr val="16181D"/>
-                          </a:solidFill>
-                          <a:latin typeface="Arial" pitchFamily="34" charset="0"/>
-                          <a:ea typeface="Arial" pitchFamily="34" charset="-122"/>
-                          <a:cs typeface="Arial" pitchFamily="34" charset="-120"/>
-                        </a:rPr>
-                        <a:t>1.13 ms</a:t>
-                      </a:r>
-                      <a:endParaRPr lang="en-US" sz="1050" dirty="0">
-                        <a:latin typeface="Arial" charset="0"/>
-                        <a:ea typeface="Arial" charset="0"/>
-                        <a:cs typeface="Arial" charset="0"/>
-                      </a:endParaRPr>
-                    </a:p>
-                  </a:txBody>
-                  <a:tcPr marL="91440" marR="91440" marT="45720" marB="45720" anchor="ctr">
-                    <a:lnL w="6350" cap="flat" cmpd="sng" algn="ctr">
-                      <a:solidFill>
-                        <a:srgbClr val="D6DAE0"/>
-                      </a:solidFill>
-                      <a:prstDash val="solid"/>
-                      <a:round/>
-                      <a:headEnd type="none" w="med" len="med"/>
-                      <a:tailEnd type="none" w="med" len="med"/>
-                    </a:lnL>
-                    <a:lnR w="6350" cap="flat" cmpd="sng" algn="ctr">
-                      <a:solidFill>
-                        <a:srgbClr val="D6DAE0"/>
-                      </a:solidFill>
-                      <a:prstDash val="solid"/>
-                      <a:round/>
-                      <a:headEnd type="none" w="med" len="med"/>
-                      <a:tailEnd type="none" w="med" len="med"/>
-                    </a:lnR>
-                    <a:lnT w="6350" cap="flat" cmpd="sng" algn="ctr">
-                      <a:solidFill>
-                        <a:srgbClr val="D6DAE0"/>
-                      </a:solidFill>
-                      <a:prstDash val="solid"/>
-                      <a:round/>
-                      <a:headEnd type="none" w="med" len="med"/>
-                      <a:tailEnd type="none" w="med" len="med"/>
-                    </a:lnT>
-                    <a:lnB w="6350" cap="flat" cmpd="sng" algn="ctr">
-                      <a:solidFill>
-                        <a:srgbClr val="D6DAE0"/>
-                      </a:solidFill>
-                      <a:prstDash val="solid"/>
-                      <a:round/>
-                      <a:headEnd type="none" w="med" len="med"/>
-                      <a:tailEnd type="none" w="med" len="med"/>
-                    </a:lnB>
-                  </a:tcPr>
-                </a:tc>
-              </a:tr>
-              <a:tr h="411480">
-                <a:tc>
-                  <a:txBody>
-                    <a:bodyPr/>
-                    <a:lstStyle/>
-                    <a:p>
-                      <a:pPr indent="0" marL="0">
-                        <a:buNone/>
-                      </a:pPr>
-                      <a:r>
-                        <a:rPr lang="en-US" sz="1050" b="1" dirty="0">
-                          <a:solidFill>
-                            <a:srgbClr val="16181D"/>
-                          </a:solidFill>
-                          <a:latin typeface="Arial" pitchFamily="34" charset="0"/>
-                          <a:ea typeface="Arial" pitchFamily="34" charset="-122"/>
-                          <a:cs typeface="Arial" pitchFamily="34" charset="-120"/>
-                        </a:rPr>
-                        <a:t>Face inference (UltraFace, single-thread WASM)</a:t>
+                        <a:t>Checksum-invalid lookalikes (order ids)</a:t>
                       </a:r>
                       <a:endParaRPr lang="en-US" sz="1050" dirty="0">
                         <a:latin typeface="Arial" charset="0"/>
@@ -8277,13 +10611,13 @@
                       <a:r>
                         <a:rPr lang="en-US" sz="1050" b="1" dirty="0">
                           <a:solidFill>
-                            <a:srgbClr val="16181D"/>
+                            <a:srgbClr val="3D5A3D"/>
                           </a:solidFill>
                           <a:latin typeface="Arial" pitchFamily="34" charset="0"/>
                           <a:ea typeface="Arial" pitchFamily="34" charset="-122"/>
                           <a:cs typeface="Arial" pitchFamily="34" charset="-120"/>
                         </a:rPr>
-                        <a:t>12.91 ms</a:t>
+                        <a:t>NOT masked</a:t>
                       </a:r>
                       <a:endParaRPr lang="en-US" sz="1050" dirty="0">
                         <a:latin typeface="Arial" charset="0"/>
@@ -8331,268 +10665,6 @@
                     </a:lnB>
                   </a:tcPr>
                 </a:tc>
-                <a:tc>
-                  <a:txBody>
-                    <a:bodyPr/>
-                    <a:lstStyle/>
-                    <a:p>
-                      <a:pPr indent="0" marL="0">
-                        <a:buNone/>
-                      </a:pPr>
-                      <a:r>
-                        <a:rPr lang="en-US" sz="1050" dirty="0">
-                          <a:solidFill>
-                            <a:srgbClr val="16181D"/>
-                          </a:solidFill>
-                          <a:latin typeface="Arial" pitchFamily="34" charset="0"/>
-                          <a:ea typeface="Arial" pitchFamily="34" charset="-122"/>
-                          <a:cs typeface="Arial" pitchFamily="34" charset="-120"/>
-                        </a:rPr>
-                        <a:t>13.22 ms</a:t>
-                      </a:r>
-                      <a:endParaRPr lang="en-US" sz="1050" dirty="0">
-                        <a:latin typeface="Arial" charset="0"/>
-                        <a:ea typeface="Arial" charset="0"/>
-                        <a:cs typeface="Arial" charset="0"/>
-                      </a:endParaRPr>
-                    </a:p>
-                  </a:txBody>
-                  <a:tcPr marL="91440" marR="91440" marT="45720" marB="45720" anchor="ctr">
-                    <a:lnL w="6350" cap="flat" cmpd="sng" algn="ctr">
-                      <a:solidFill>
-                        <a:srgbClr val="D6DAE0"/>
-                      </a:solidFill>
-                      <a:prstDash val="solid"/>
-                      <a:round/>
-                      <a:headEnd type="none" w="med" len="med"/>
-                      <a:tailEnd type="none" w="med" len="med"/>
-                    </a:lnL>
-                    <a:lnR w="6350" cap="flat" cmpd="sng" algn="ctr">
-                      <a:solidFill>
-                        <a:srgbClr val="D6DAE0"/>
-                      </a:solidFill>
-                      <a:prstDash val="solid"/>
-                      <a:round/>
-                      <a:headEnd type="none" w="med" len="med"/>
-                      <a:tailEnd type="none" w="med" len="med"/>
-                    </a:lnR>
-                    <a:lnT w="6350" cap="flat" cmpd="sng" algn="ctr">
-                      <a:solidFill>
-                        <a:srgbClr val="D6DAE0"/>
-                      </a:solidFill>
-                      <a:prstDash val="solid"/>
-                      <a:round/>
-                      <a:headEnd type="none" w="med" len="med"/>
-                      <a:tailEnd type="none" w="med" len="med"/>
-                    </a:lnT>
-                    <a:lnB w="6350" cap="flat" cmpd="sng" algn="ctr">
-                      <a:solidFill>
-                        <a:srgbClr val="D6DAE0"/>
-                      </a:solidFill>
-                      <a:prstDash val="solid"/>
-                      <a:round/>
-                      <a:headEnd type="none" w="med" len="med"/>
-                      <a:tailEnd type="none" w="med" len="med"/>
-                    </a:lnB>
-                  </a:tcPr>
-                </a:tc>
-              </a:tr>
-              <a:tr h="411480">
-                <a:tc>
-                  <a:txBody>
-                    <a:bodyPr/>
-                    <a:lstStyle/>
-                    <a:p>
-                      <a:pPr indent="0" marL="0">
-                        <a:buNone/>
-                      </a:pPr>
-                      <a:r>
-                        <a:rPr lang="en-US" sz="1050" dirty="0">
-                          <a:solidFill>
-                            <a:srgbClr val="16181D"/>
-                          </a:solidFill>
-                          <a:latin typeface="Arial" pitchFamily="34" charset="0"/>
-                          <a:ea typeface="Arial" pitchFamily="34" charset="-122"/>
-                          <a:cs typeface="Arial" pitchFamily="34" charset="-120"/>
-                        </a:rPr>
-                        <a:t>Face postprocess (filter + NMS)</a:t>
-                      </a:r>
-                      <a:endParaRPr lang="en-US" sz="1050" dirty="0">
-                        <a:latin typeface="Arial" charset="0"/>
-                        <a:ea typeface="Arial" charset="0"/>
-                        <a:cs typeface="Arial" charset="0"/>
-                      </a:endParaRPr>
-                    </a:p>
-                  </a:txBody>
-                  <a:tcPr marL="91440" marR="91440" marT="45720" marB="45720" anchor="ctr">
-                    <a:lnL w="6350" cap="flat" cmpd="sng" algn="ctr">
-                      <a:solidFill>
-                        <a:srgbClr val="D6DAE0"/>
-                      </a:solidFill>
-                      <a:prstDash val="solid"/>
-                      <a:round/>
-                      <a:headEnd type="none" w="med" len="med"/>
-                      <a:tailEnd type="none" w="med" len="med"/>
-                    </a:lnL>
-                    <a:lnR w="6350" cap="flat" cmpd="sng" algn="ctr">
-                      <a:solidFill>
-                        <a:srgbClr val="D6DAE0"/>
-                      </a:solidFill>
-                      <a:prstDash val="solid"/>
-                      <a:round/>
-                      <a:headEnd type="none" w="med" len="med"/>
-                      <a:tailEnd type="none" w="med" len="med"/>
-                    </a:lnR>
-                    <a:lnT w="6350" cap="flat" cmpd="sng" algn="ctr">
-                      <a:solidFill>
-                        <a:srgbClr val="D6DAE0"/>
-                      </a:solidFill>
-                      <a:prstDash val="solid"/>
-                      <a:round/>
-                      <a:headEnd type="none" w="med" len="med"/>
-                      <a:tailEnd type="none" w="med" len="med"/>
-                    </a:lnT>
-                    <a:lnB w="6350" cap="flat" cmpd="sng" algn="ctr">
-                      <a:solidFill>
-                        <a:srgbClr val="D6DAE0"/>
-                      </a:solidFill>
-                      <a:prstDash val="solid"/>
-                      <a:round/>
-                      <a:headEnd type="none" w="med" len="med"/>
-                      <a:tailEnd type="none" w="med" len="med"/>
-                    </a:lnB>
-                  </a:tcPr>
-                </a:tc>
-                <a:tc>
-                  <a:txBody>
-                    <a:bodyPr/>
-                    <a:lstStyle/>
-                    <a:p>
-                      <a:pPr indent="0" marL="0">
-                        <a:buNone/>
-                      </a:pPr>
-                      <a:r>
-                        <a:rPr lang="en-US" sz="1050" dirty="0">
-                          <a:solidFill>
-                            <a:srgbClr val="16181D"/>
-                          </a:solidFill>
-                          <a:latin typeface="Arial" pitchFamily="34" charset="0"/>
-                          <a:ea typeface="Arial" pitchFamily="34" charset="-122"/>
-                          <a:cs typeface="Arial" pitchFamily="34" charset="-120"/>
-                        </a:rPr>
-                        <a:t>0.01 ms</a:t>
-                      </a:r>
-                      <a:endParaRPr lang="en-US" sz="1050" dirty="0">
-                        <a:latin typeface="Arial" charset="0"/>
-                        <a:ea typeface="Arial" charset="0"/>
-                        <a:cs typeface="Arial" charset="0"/>
-                      </a:endParaRPr>
-                    </a:p>
-                  </a:txBody>
-                  <a:tcPr marL="91440" marR="91440" marT="45720" marB="45720" anchor="ctr">
-                    <a:lnL w="6350" cap="flat" cmpd="sng" algn="ctr">
-                      <a:solidFill>
-                        <a:srgbClr val="D6DAE0"/>
-                      </a:solidFill>
-                      <a:prstDash val="solid"/>
-                      <a:round/>
-                      <a:headEnd type="none" w="med" len="med"/>
-                      <a:tailEnd type="none" w="med" len="med"/>
-                    </a:lnL>
-                    <a:lnR w="6350" cap="flat" cmpd="sng" algn="ctr">
-                      <a:solidFill>
-                        <a:srgbClr val="D6DAE0"/>
-                      </a:solidFill>
-                      <a:prstDash val="solid"/>
-                      <a:round/>
-                      <a:headEnd type="none" w="med" len="med"/>
-                      <a:tailEnd type="none" w="med" len="med"/>
-                    </a:lnR>
-                    <a:lnT w="6350" cap="flat" cmpd="sng" algn="ctr">
-                      <a:solidFill>
-                        <a:srgbClr val="D6DAE0"/>
-                      </a:solidFill>
-                      <a:prstDash val="solid"/>
-                      <a:round/>
-                      <a:headEnd type="none" w="med" len="med"/>
-                      <a:tailEnd type="none" w="med" len="med"/>
-                    </a:lnT>
-                    <a:lnB w="6350" cap="flat" cmpd="sng" algn="ctr">
-                      <a:solidFill>
-                        <a:srgbClr val="D6DAE0"/>
-                      </a:solidFill>
-                      <a:prstDash val="solid"/>
-                      <a:round/>
-                      <a:headEnd type="none" w="med" len="med"/>
-                      <a:tailEnd type="none" w="med" len="med"/>
-                    </a:lnB>
-                  </a:tcPr>
-                </a:tc>
-                <a:tc>
-                  <a:txBody>
-                    <a:bodyPr/>
-                    <a:lstStyle/>
-                    <a:p>
-                      <a:pPr indent="0" marL="0">
-                        <a:buNone/>
-                      </a:pPr>
-                      <a:r>
-                        <a:rPr lang="en-US" sz="1050" dirty="0">
-                          <a:solidFill>
-                            <a:srgbClr val="16181D"/>
-                          </a:solidFill>
-                          <a:latin typeface="Arial" pitchFamily="34" charset="0"/>
-                          <a:ea typeface="Arial" pitchFamily="34" charset="-122"/>
-                          <a:cs typeface="Arial" pitchFamily="34" charset="-120"/>
-                        </a:rPr>
-                        <a:t>0.02 ms</a:t>
-                      </a:r>
-                      <a:endParaRPr lang="en-US" sz="1050" dirty="0">
-                        <a:latin typeface="Arial" charset="0"/>
-                        <a:ea typeface="Arial" charset="0"/>
-                        <a:cs typeface="Arial" charset="0"/>
-                      </a:endParaRPr>
-                    </a:p>
-                  </a:txBody>
-                  <a:tcPr marL="91440" marR="91440" marT="45720" marB="45720" anchor="ctr">
-                    <a:lnL w="6350" cap="flat" cmpd="sng" algn="ctr">
-                      <a:solidFill>
-                        <a:srgbClr val="D6DAE0"/>
-                      </a:solidFill>
-                      <a:prstDash val="solid"/>
-                      <a:round/>
-                      <a:headEnd type="none" w="med" len="med"/>
-                      <a:tailEnd type="none" w="med" len="med"/>
-                    </a:lnL>
-                    <a:lnR w="6350" cap="flat" cmpd="sng" algn="ctr">
-                      <a:solidFill>
-                        <a:srgbClr val="D6DAE0"/>
-                      </a:solidFill>
-                      <a:prstDash val="solid"/>
-                      <a:round/>
-                      <a:headEnd type="none" w="med" len="med"/>
-                      <a:tailEnd type="none" w="med" len="med"/>
-                    </a:lnR>
-                    <a:lnT w="6350" cap="flat" cmpd="sng" algn="ctr">
-                      <a:solidFill>
-                        <a:srgbClr val="D6DAE0"/>
-                      </a:solidFill>
-                      <a:prstDash val="solid"/>
-                      <a:round/>
-                      <a:headEnd type="none" w="med" len="med"/>
-                      <a:tailEnd type="none" w="med" len="med"/>
-                    </a:lnT>
-                    <a:lnB w="6350" cap="flat" cmpd="sng" algn="ctr">
-                      <a:solidFill>
-                        <a:srgbClr val="D6DAE0"/>
-                      </a:solidFill>
-                      <a:prstDash val="solid"/>
-                      <a:round/>
-                      <a:headEnd type="none" w="med" len="med"/>
-                      <a:tailEnd type="none" w="med" len="med"/>
-                    </a:lnB>
-                  </a:tcPr>
-                </a:tc>
               </a:tr>
             </a:tbl>
           </a:graphicData>
@@ -8600,39 +10672,14 @@
       </p:graphicFrame>
       <p:sp>
         <p:nvSpPr>
-          <p:cNvPr id="5" name="Shape 2"/>
+          <p:cNvPr id="9" name="Text 4"/>
           <p:cNvSpPr/>
           <p:nvPr/>
         </p:nvSpPr>
         <p:spPr>
           <a:xfrm>
-            <a:off x="8321040" y="1463040"/>
-            <a:ext cx="3383280" cy="2377440"/>
-          </a:xfrm>
-          <a:prstGeom prst="rect">
-            <a:avLst/>
-          </a:prstGeom>
-          <a:solidFill>
-            <a:srgbClr val="EEF3F8"/>
-          </a:solidFill>
-          <a:ln w="9525">
-            <a:solidFill>
-              <a:srgbClr val="D6DAE0"/>
-            </a:solidFill>
-            <a:prstDash val="solid"/>
-          </a:ln>
-        </p:spPr>
-      </p:sp>
-      <p:sp>
-        <p:nvSpPr>
-          <p:cNvPr id="6" name="Text 3"/>
-          <p:cNvSpPr/>
-          <p:nvPr/>
-        </p:nvSpPr>
-        <p:spPr>
-          <a:xfrm>
-            <a:off x="8503920" y="1645920"/>
-            <a:ext cx="3017520" cy="2103120"/>
+            <a:off x="6629400" y="5715000"/>
+            <a:ext cx="5029200" cy="914400"/>
           </a:xfrm>
           <a:prstGeom prst="rect">
             <a:avLst/>
@@ -8641,105 +10688,24 @@
           <a:ln/>
         </p:spPr>
         <p:txBody>
-          <a:bodyPr wrap="square" rtlCol="0" anchor="t"/>
+          <a:bodyPr wrap="square" rtlCol="0" anchor="ctr"/>
           <a:lstStyle/>
           <a:p>
             <a:pPr indent="0" marL="0">
               <a:buNone/>
             </a:pPr>
             <a:r>
-              <a:rPr lang="en-US" sz="4000" b="1" dirty="0">
-                <a:solidFill>
-                  <a:srgbClr val="1F4E79"/>
+              <a:rPr lang="en-US" sz="950" i="1" dirty="0">
+                <a:solidFill>
+                  <a:srgbClr val="5A6470"/>
                 </a:solidFill>
                 <a:latin typeface="Arial" pitchFamily="34" charset="0"/>
                 <a:ea typeface="Arial" pitchFamily="34" charset="-122"/>
                 <a:cs typeface="Arial" pitchFamily="34" charset="-120"/>
               </a:rPr>
-              <a:t>16.2 ms</a:t>
-            </a:r>
-            <a:endParaRPr lang="en-US" sz="4000" dirty="0"/>
-          </a:p>
-          <a:p>
-            <a:pPr indent="0" marL="0">
-              <a:buNone/>
-            </a:pPr>
-            <a:r>
-              <a:rPr lang="en-US" sz="1150" dirty="0">
-                <a:solidFill>
-                  <a:srgbClr val="16181D"/>
-                </a:solidFill>
-                <a:latin typeface="Arial" pitchFamily="34" charset="0"/>
-                <a:ea typeface="Arial" pitchFamily="34" charset="-122"/>
-                <a:cs typeface="Arial" pitchFamily="34" charset="-120"/>
-              </a:rPr>
-              <a:t>summed single-frame local p50, vs the 175 ms design budget. A 10x margin on the conservative WASM path; WebGPU is faster.</a:t>
-            </a:r>
-            <a:endParaRPr lang="en-US" sz="4000" dirty="0"/>
-          </a:p>
-        </p:txBody>
-      </p:sp>
-      <p:sp>
-        <p:nvSpPr>
-          <p:cNvPr id="7" name="Text 4"/>
-          <p:cNvSpPr/>
-          <p:nvPr/>
-        </p:nvSpPr>
-        <p:spPr>
-          <a:xfrm>
-            <a:off x="502920" y="4892040"/>
-            <a:ext cx="11155680" cy="1463040"/>
-          </a:xfrm>
-          <a:prstGeom prst="rect">
-            <a:avLst/>
-          </a:prstGeom>
-          <a:noFill/>
-          <a:ln/>
-        </p:spPr>
-        <p:txBody>
-          <a:bodyPr wrap="square" rtlCol="0" anchor="t"/>
-          <a:lstStyle/>
-          <a:p>
-            <a:pPr marL="152400" indent="-152400">
-              <a:lnSpc>
-                <a:spcPct val="118000"/>
-              </a:lnSpc>
-              <a:buSzPct val="100000"/>
-              <a:buChar char="•"/>
-            </a:pPr>
-            <a:r>
-              <a:rPr lang="en-US" sz="1200" b="1" dirty="0">
-                <a:solidFill>
-                  <a:srgbClr val="16181D"/>
-                </a:solidFill>
-                <a:latin typeface="Arial" pitchFamily="34" charset="0"/>
-                <a:ea typeface="Arial" pitchFamily="34" charset="-122"/>
-                <a:cs typeface="Arial" pitchFamily="34" charset="-120"/>
-              </a:rPr>
-              <a:t>End-to-end latency is dominated by the remote planner, exactly as designed: the privacy layer costs milliseconds. Dirty-region tiling skips the whole visual pipeline on unchanged frames.</a:t>
-            </a:r>
-            <a:endParaRPr lang="en-US" sz="1200" dirty="0"/>
-          </a:p>
-          <a:p>
-            <a:pPr marL="152400" indent="-152400">
-              <a:lnSpc>
-                <a:spcPct val="118000"/>
-              </a:lnSpc>
-              <a:buSzPct val="100000"/>
-              <a:buChar char="•"/>
-            </a:pPr>
-            <a:r>
-              <a:rPr lang="en-US" sz="1200" dirty="0">
-                <a:solidFill>
-                  <a:srgbClr val="16181D"/>
-                </a:solidFill>
-                <a:latin typeface="Arial" pitchFamily="34" charset="0"/>
-                <a:ea typeface="Arial" pitchFamily="34" charset="-122"/>
-                <a:cs typeface="Arial" pitchFamily="34" charset="-120"/>
-              </a:rPr>
-              <a:t>Reproduce on any machine: npm run bench:latency (writes machine context with the numbers).</a:t>
-            </a:r>
-            <a:endParaRPr lang="en-US" sz="1200" dirty="0"/>
+              <a:t>Suite footprint: 193 automated tests · model 1.27 MB, SHA-pinned (provenance is a test) · corpus: 12 slices, 35 annotated instances + declared negatives · numbers regenerate with npm run bench and npm run bench:latency</a:t>
+            </a:r>
+            <a:endParaRPr lang="en-US" sz="950" dirty="0"/>
           </a:p>
         </p:txBody>
       </p:sp>
@@ -11367,7 +13333,7 @@
                           <a:ea typeface="Arial" pitchFamily="34" charset="-122"/>
                           <a:cs typeface="Arial" pitchFamily="34" charset="-120"/>
                         </a:rPr>
-                        <a:t>16.2 ms local p50 vs 175 ms budget, measured and reproducible</a:t>
+                        <a:t>15.9 ms local p50 vs 175 ms budget, measured and reproducible</a:t>
                       </a:r>
                       <a:endParaRPr lang="en-US" sz="1050" dirty="0">
                         <a:latin typeface="Arial" charset="0"/>

--- a/docs/Kavach-SIH2026-Deck.pptx
+++ b/docs/Kavach-SIH2026-Deck.pptx
@@ -3099,7 +3099,7 @@
                 <a:ea typeface="Arial" pitchFamily="34" charset="-122"/>
                 <a:cs typeface="Arial" pitchFamily="34" charset="-120"/>
               </a:rPr>
-              <a:t>Working prototype  |  github.com/BhoomiAgrawal12/browser-vision-agent  |  193 automated tests</a:t>
+              <a:t>Working prototype  |  github.com/BhoomiAgrawal12/browser-vision-agent  |  194 automated tests</a:t>
             </a:r>
             <a:endParaRPr lang="en-US" sz="1200" dirty="0"/>
           </a:p>
@@ -6223,7 +6223,7 @@
                 <a:ea typeface="Arial" pitchFamily="34" charset="-122"/>
                 <a:cs typeface="Arial" pitchFamily="34" charset="-120"/>
               </a:rPr>
-              <a:t>Detection quality (RedactBench-Web, Shield tier)</a:t>
+              <a:t>Detection quality (RedactBench-Web adversarial corpus, Shield tier)</a:t>
             </a:r>
             <a:endParaRPr lang="en-US" sz="1200" dirty="0"/>
           </a:p>
@@ -6549,7 +6549,7 @@
                           <a:ea typeface="Arial" pitchFamily="34" charset="-122"/>
                           <a:cs typeface="Arial" pitchFamily="34" charset="-120"/>
                         </a:rPr>
-                        <a:t>Govt IDs: Aadhaar, PAN, GSTIN (checksums)</a:t>
+                        <a:t>Checksummed IDs: Aadhaar, PAN, GSTIN</a:t>
                       </a:r>
                       <a:endParaRPr lang="en-US" sz="1050" dirty="0">
                         <a:latin typeface="Arial" charset="0"/>
@@ -6614,7 +6614,7 @@
                           <a:ea typeface="Arial" pitchFamily="34" charset="-122"/>
                           <a:cs typeface="Arial" pitchFamily="34" charset="-120"/>
                         </a:rPr>
-                        <a:t>7</a:t>
+                        <a:t>14</a:t>
                       </a:r>
                       <a:endParaRPr lang="en-US" sz="1050" dirty="0">
                         <a:latin typeface="Arial" charset="0"/>
@@ -6876,7 +6876,7 @@
                           <a:ea typeface="Arial" pitchFamily="34" charset="-122"/>
                           <a:cs typeface="Arial" pitchFamily="34" charset="-120"/>
                         </a:rPr>
-                        <a:t>8</a:t>
+                        <a:t>13</a:t>
                       </a:r>
                       <a:endParaRPr lang="en-US" sz="1050" dirty="0">
                         <a:latin typeface="Arial" charset="0"/>
@@ -7073,7 +7073,7 @@
                           <a:ea typeface="Arial" pitchFamily="34" charset="-122"/>
                           <a:cs typeface="Arial" pitchFamily="34" charset="-120"/>
                         </a:rPr>
-                        <a:t>Contact: email, phone (IN)</a:t>
+                        <a:t>Phone (IN), incl. spaced-digit evasion</a:t>
                       </a:r>
                       <a:endParaRPr lang="en-US" sz="1050" dirty="0">
                         <a:latin typeface="Arial" charset="0"/>
@@ -7138,7 +7138,7 @@
                           <a:ea typeface="Arial" pitchFamily="34" charset="-122"/>
                           <a:cs typeface="Arial" pitchFamily="34" charset="-120"/>
                         </a:rPr>
-                        <a:t>9</a:t>
+                        <a:t>6</a:t>
                       </a:r>
                       <a:endParaRPr lang="en-US" sz="1050" dirty="0">
                         <a:latin typeface="Arial" charset="0"/>
@@ -7400,7 +7400,7 @@
                           <a:ea typeface="Arial" pitchFamily="34" charset="-122"/>
                           <a:cs typeface="Arial" pitchFamily="34" charset="-120"/>
                         </a:rPr>
-                        <a:t>5</a:t>
+                        <a:t>8</a:t>
                       </a:r>
                       <a:endParaRPr lang="en-US" sz="1050" dirty="0">
                         <a:latin typeface="Arial" charset="0"/>
@@ -7597,7 +7597,269 @@
                           <a:ea typeface="Arial" pitchFamily="34" charset="-122"/>
                           <a:cs typeface="Arial" pitchFamily="34" charset="-120"/>
                         </a:rPr>
-                        <a:t>DOB, vehicle registration</a:t>
+                        <a:t>Email (obfuscated [at]/[dot]: known gap)</a:t>
+                      </a:r>
+                      <a:endParaRPr lang="en-US" sz="1050" dirty="0">
+                        <a:latin typeface="Arial" charset="0"/>
+                        <a:ea typeface="Arial" charset="0"/>
+                        <a:cs typeface="Arial" charset="0"/>
+                      </a:endParaRPr>
+                    </a:p>
+                  </a:txBody>
+                  <a:tcPr marL="91440" marR="91440" marT="45720" marB="45720" anchor="ctr">
+                    <a:lnL w="6350" cap="flat" cmpd="sng" algn="ctr">
+                      <a:solidFill>
+                        <a:srgbClr val="D6DAE0"/>
+                      </a:solidFill>
+                      <a:prstDash val="solid"/>
+                      <a:round/>
+                      <a:headEnd type="none" w="med" len="med"/>
+                      <a:tailEnd type="none" w="med" len="med"/>
+                    </a:lnL>
+                    <a:lnR w="6350" cap="flat" cmpd="sng" algn="ctr">
+                      <a:solidFill>
+                        <a:srgbClr val="D6DAE0"/>
+                      </a:solidFill>
+                      <a:prstDash val="solid"/>
+                      <a:round/>
+                      <a:headEnd type="none" w="med" len="med"/>
+                      <a:tailEnd type="none" w="med" len="med"/>
+                    </a:lnR>
+                    <a:lnT w="6350" cap="flat" cmpd="sng" algn="ctr">
+                      <a:solidFill>
+                        <a:srgbClr val="D6DAE0"/>
+                      </a:solidFill>
+                      <a:prstDash val="solid"/>
+                      <a:round/>
+                      <a:headEnd type="none" w="med" len="med"/>
+                      <a:tailEnd type="none" w="med" len="med"/>
+                    </a:lnT>
+                    <a:lnB w="6350" cap="flat" cmpd="sng" algn="ctr">
+                      <a:solidFill>
+                        <a:srgbClr val="D6DAE0"/>
+                      </a:solidFill>
+                      <a:prstDash val="solid"/>
+                      <a:round/>
+                      <a:headEnd type="none" w="med" len="med"/>
+                      <a:tailEnd type="none" w="med" len="med"/>
+                    </a:lnB>
+                  </a:tcPr>
+                </a:tc>
+                <a:tc>
+                  <a:txBody>
+                    <a:bodyPr/>
+                    <a:lstStyle/>
+                    <a:p>
+                      <a:pPr indent="0" marL="0">
+                        <a:buNone/>
+                      </a:pPr>
+                      <a:r>
+                        <a:rPr lang="en-US" sz="1050" dirty="0">
+                          <a:solidFill>
+                            <a:srgbClr val="16181D"/>
+                          </a:solidFill>
+                          <a:latin typeface="Arial" pitchFamily="34" charset="0"/>
+                          <a:ea typeface="Arial" pitchFamily="34" charset="-122"/>
+                          <a:cs typeface="Arial" pitchFamily="34" charset="-120"/>
+                        </a:rPr>
+                        <a:t>6</a:t>
+                      </a:r>
+                      <a:endParaRPr lang="en-US" sz="1050" dirty="0">
+                        <a:latin typeface="Arial" charset="0"/>
+                        <a:ea typeface="Arial" charset="0"/>
+                        <a:cs typeface="Arial" charset="0"/>
+                      </a:endParaRPr>
+                    </a:p>
+                  </a:txBody>
+                  <a:tcPr marL="91440" marR="91440" marT="45720" marB="45720" anchor="ctr">
+                    <a:lnL w="6350" cap="flat" cmpd="sng" algn="ctr">
+                      <a:solidFill>
+                        <a:srgbClr val="D6DAE0"/>
+                      </a:solidFill>
+                      <a:prstDash val="solid"/>
+                      <a:round/>
+                      <a:headEnd type="none" w="med" len="med"/>
+                      <a:tailEnd type="none" w="med" len="med"/>
+                    </a:lnL>
+                    <a:lnR w="6350" cap="flat" cmpd="sng" algn="ctr">
+                      <a:solidFill>
+                        <a:srgbClr val="D6DAE0"/>
+                      </a:solidFill>
+                      <a:prstDash val="solid"/>
+                      <a:round/>
+                      <a:headEnd type="none" w="med" len="med"/>
+                      <a:tailEnd type="none" w="med" len="med"/>
+                    </a:lnR>
+                    <a:lnT w="6350" cap="flat" cmpd="sng" algn="ctr">
+                      <a:solidFill>
+                        <a:srgbClr val="D6DAE0"/>
+                      </a:solidFill>
+                      <a:prstDash val="solid"/>
+                      <a:round/>
+                      <a:headEnd type="none" w="med" len="med"/>
+                      <a:tailEnd type="none" w="med" len="med"/>
+                    </a:lnT>
+                    <a:lnB w="6350" cap="flat" cmpd="sng" algn="ctr">
+                      <a:solidFill>
+                        <a:srgbClr val="D6DAE0"/>
+                      </a:solidFill>
+                      <a:prstDash val="solid"/>
+                      <a:round/>
+                      <a:headEnd type="none" w="med" len="med"/>
+                      <a:tailEnd type="none" w="med" len="med"/>
+                    </a:lnB>
+                  </a:tcPr>
+                </a:tc>
+                <a:tc>
+                  <a:txBody>
+                    <a:bodyPr/>
+                    <a:lstStyle/>
+                    <a:p>
+                      <a:pPr indent="0" marL="0">
+                        <a:buNone/>
+                      </a:pPr>
+                      <a:r>
+                        <a:rPr lang="en-US" sz="1050" dirty="0">
+                          <a:solidFill>
+                            <a:srgbClr val="16181D"/>
+                          </a:solidFill>
+                          <a:latin typeface="Arial" pitchFamily="34" charset="0"/>
+                          <a:ea typeface="Arial" pitchFamily="34" charset="-122"/>
+                          <a:cs typeface="Arial" pitchFamily="34" charset="-120"/>
+                        </a:rPr>
+                        <a:t>100%</a:t>
+                      </a:r>
+                      <a:endParaRPr lang="en-US" sz="1050" dirty="0">
+                        <a:latin typeface="Arial" charset="0"/>
+                        <a:ea typeface="Arial" charset="0"/>
+                        <a:cs typeface="Arial" charset="0"/>
+                      </a:endParaRPr>
+                    </a:p>
+                  </a:txBody>
+                  <a:tcPr marL="91440" marR="91440" marT="45720" marB="45720" anchor="ctr">
+                    <a:lnL w="6350" cap="flat" cmpd="sng" algn="ctr">
+                      <a:solidFill>
+                        <a:srgbClr val="D6DAE0"/>
+                      </a:solidFill>
+                      <a:prstDash val="solid"/>
+                      <a:round/>
+                      <a:headEnd type="none" w="med" len="med"/>
+                      <a:tailEnd type="none" w="med" len="med"/>
+                    </a:lnL>
+                    <a:lnR w="6350" cap="flat" cmpd="sng" algn="ctr">
+                      <a:solidFill>
+                        <a:srgbClr val="D6DAE0"/>
+                      </a:solidFill>
+                      <a:prstDash val="solid"/>
+                      <a:round/>
+                      <a:headEnd type="none" w="med" len="med"/>
+                      <a:tailEnd type="none" w="med" len="med"/>
+                    </a:lnR>
+                    <a:lnT w="6350" cap="flat" cmpd="sng" algn="ctr">
+                      <a:solidFill>
+                        <a:srgbClr val="D6DAE0"/>
+                      </a:solidFill>
+                      <a:prstDash val="solid"/>
+                      <a:round/>
+                      <a:headEnd type="none" w="med" len="med"/>
+                      <a:tailEnd type="none" w="med" len="med"/>
+                    </a:lnT>
+                    <a:lnB w="6350" cap="flat" cmpd="sng" algn="ctr">
+                      <a:solidFill>
+                        <a:srgbClr val="D6DAE0"/>
+                      </a:solidFill>
+                      <a:prstDash val="solid"/>
+                      <a:round/>
+                      <a:headEnd type="none" w="med" len="med"/>
+                      <a:tailEnd type="none" w="med" len="med"/>
+                    </a:lnB>
+                  </a:tcPr>
+                </a:tc>
+                <a:tc>
+                  <a:txBody>
+                    <a:bodyPr/>
+                    <a:lstStyle/>
+                    <a:p>
+                      <a:pPr indent="0" marL="0">
+                        <a:buNone/>
+                      </a:pPr>
+                      <a:r>
+                        <a:rPr lang="en-US" sz="1050" dirty="0">
+                          <a:solidFill>
+                            <a:srgbClr val="16181D"/>
+                          </a:solidFill>
+                          <a:latin typeface="Arial" pitchFamily="34" charset="0"/>
+                          <a:ea typeface="Arial" pitchFamily="34" charset="-122"/>
+                          <a:cs typeface="Arial" pitchFamily="34" charset="-120"/>
+                        </a:rPr>
+                        <a:t>83.3%</a:t>
+                      </a:r>
+                      <a:endParaRPr lang="en-US" sz="1050" dirty="0">
+                        <a:latin typeface="Arial" charset="0"/>
+                        <a:ea typeface="Arial" charset="0"/>
+                        <a:cs typeface="Arial" charset="0"/>
+                      </a:endParaRPr>
+                    </a:p>
+                  </a:txBody>
+                  <a:tcPr marL="91440" marR="91440" marT="45720" marB="45720" anchor="ctr">
+                    <a:lnL w="6350" cap="flat" cmpd="sng" algn="ctr">
+                      <a:solidFill>
+                        <a:srgbClr val="D6DAE0"/>
+                      </a:solidFill>
+                      <a:prstDash val="solid"/>
+                      <a:round/>
+                      <a:headEnd type="none" w="med" len="med"/>
+                      <a:tailEnd type="none" w="med" len="med"/>
+                    </a:lnL>
+                    <a:lnR w="6350" cap="flat" cmpd="sng" algn="ctr">
+                      <a:solidFill>
+                        <a:srgbClr val="D6DAE0"/>
+                      </a:solidFill>
+                      <a:prstDash val="solid"/>
+                      <a:round/>
+                      <a:headEnd type="none" w="med" len="med"/>
+                      <a:tailEnd type="none" w="med" len="med"/>
+                    </a:lnR>
+                    <a:lnT w="6350" cap="flat" cmpd="sng" algn="ctr">
+                      <a:solidFill>
+                        <a:srgbClr val="D6DAE0"/>
+                      </a:solidFill>
+                      <a:prstDash val="solid"/>
+                      <a:round/>
+                      <a:headEnd type="none" w="med" len="med"/>
+                      <a:tailEnd type="none" w="med" len="med"/>
+                    </a:lnT>
+                    <a:lnB w="6350" cap="flat" cmpd="sng" algn="ctr">
+                      <a:solidFill>
+                        <a:srgbClr val="D6DAE0"/>
+                      </a:solidFill>
+                      <a:prstDash val="solid"/>
+                      <a:round/>
+                      <a:headEnd type="none" w="med" len="med"/>
+                      <a:tailEnd type="none" w="med" len="med"/>
+                    </a:lnB>
+                  </a:tcPr>
+                </a:tc>
+              </a:tr>
+              <a:tr h="365760">
+                <a:tc>
+                  <a:txBody>
+                    <a:bodyPr/>
+                    <a:lstStyle/>
+                    <a:p>
+                      <a:pPr indent="0" marL="0">
+                        <a:buNone/>
+                      </a:pPr>
+                      <a:r>
+                        <a:rPr lang="en-US" sz="1050" dirty="0">
+                          <a:solidFill>
+                            <a:srgbClr val="16181D"/>
+                          </a:solidFill>
+                          <a:latin typeface="Arial" pitchFamily="34" charset="0"/>
+                          <a:ea typeface="Arial" pitchFamily="34" charset="-122"/>
+                          <a:cs typeface="Arial" pitchFamily="34" charset="-120"/>
+                        </a:rPr>
+                        <a:t>DOB (table-cell context: Fortress catches)</a:t>
                       </a:r>
                       <a:endParaRPr lang="en-US" sz="1050" dirty="0">
                         <a:latin typeface="Arial" charset="0"/>
@@ -7719,9 +7981,9 @@
                         <a:buNone/>
                       </a:pPr>
                       <a:r>
-                        <a:rPr lang="en-US" sz="1050" b="1" dirty="0">
+                        <a:rPr lang="en-US" sz="1050" dirty="0">
                           <a:solidFill>
-                            <a:srgbClr val="3D5A3D"/>
+                            <a:srgbClr val="16181D"/>
                           </a:solidFill>
                           <a:latin typeface="Arial" pitchFamily="34" charset="0"/>
                           <a:ea typeface="Arial" pitchFamily="34" charset="-122"/>
@@ -7784,15 +8046,15 @@
                         <a:buNone/>
                       </a:pPr>
                       <a:r>
-                        <a:rPr lang="en-US" sz="1050" b="1" dirty="0">
+                        <a:rPr lang="en-US" sz="1050" dirty="0">
                           <a:solidFill>
-                            <a:srgbClr val="3D5A3D"/>
+                            <a:srgbClr val="16181D"/>
                           </a:solidFill>
                           <a:latin typeface="Arial" pitchFamily="34" charset="0"/>
                           <a:ea typeface="Arial" pitchFamily="34" charset="-122"/>
                           <a:cs typeface="Arial" pitchFamily="34" charset="-120"/>
                         </a:rPr>
-                        <a:t>100%</a:t>
+                        <a:t>50%</a:t>
                       </a:r>
                       <a:endParaRPr lang="en-US" sz="1050" dirty="0">
                         <a:latin typeface="Arial" charset="0"/>
@@ -8121,7 +8383,7 @@
                           <a:ea typeface="Arial" pitchFamily="34" charset="-122"/>
                           <a:cs typeface="Arial" pitchFamily="34" charset="-120"/>
                         </a:rPr>
-                        <a:t>Bare names, PIN code (documented gaps)</a:t>
+                        <a:t>Names, PIN code (documented gaps)</a:t>
                       </a:r>
                       <a:endParaRPr lang="en-US" sz="1050" dirty="0">
                         <a:latin typeface="Arial" charset="0"/>
@@ -8186,7 +8448,7 @@
                           <a:ea typeface="Arial" pitchFamily="34" charset="-122"/>
                           <a:cs typeface="Arial" pitchFamily="34" charset="-120"/>
                         </a:rPr>
-                        <a:t>2</a:t>
+                        <a:t>3</a:t>
                       </a:r>
                       <a:endParaRPr lang="en-US" sz="1050" dirty="0">
                         <a:latin typeface="Arial" charset="0"/>
@@ -8317,6 +8579,268 @@
                           <a:cs typeface="Arial" pitchFamily="34" charset="-120"/>
                         </a:rPr>
                         <a:t>0%</a:t>
+                      </a:r>
+                      <a:endParaRPr lang="en-US" sz="1050" dirty="0">
+                        <a:latin typeface="Arial" charset="0"/>
+                        <a:ea typeface="Arial" charset="0"/>
+                        <a:cs typeface="Arial" charset="0"/>
+                      </a:endParaRPr>
+                    </a:p>
+                  </a:txBody>
+                  <a:tcPr marL="91440" marR="91440" marT="45720" marB="45720" anchor="ctr">
+                    <a:lnL w="6350" cap="flat" cmpd="sng" algn="ctr">
+                      <a:solidFill>
+                        <a:srgbClr val="D6DAE0"/>
+                      </a:solidFill>
+                      <a:prstDash val="solid"/>
+                      <a:round/>
+                      <a:headEnd type="none" w="med" len="med"/>
+                      <a:tailEnd type="none" w="med" len="med"/>
+                    </a:lnL>
+                    <a:lnR w="6350" cap="flat" cmpd="sng" algn="ctr">
+                      <a:solidFill>
+                        <a:srgbClr val="D6DAE0"/>
+                      </a:solidFill>
+                      <a:prstDash val="solid"/>
+                      <a:round/>
+                      <a:headEnd type="none" w="med" len="med"/>
+                      <a:tailEnd type="none" w="med" len="med"/>
+                    </a:lnR>
+                    <a:lnT w="6350" cap="flat" cmpd="sng" algn="ctr">
+                      <a:solidFill>
+                        <a:srgbClr val="D6DAE0"/>
+                      </a:solidFill>
+                      <a:prstDash val="solid"/>
+                      <a:round/>
+                      <a:headEnd type="none" w="med" len="med"/>
+                      <a:tailEnd type="none" w="med" len="med"/>
+                    </a:lnT>
+                    <a:lnB w="6350" cap="flat" cmpd="sng" algn="ctr">
+                      <a:solidFill>
+                        <a:srgbClr val="D6DAE0"/>
+                      </a:solidFill>
+                      <a:prstDash val="solid"/>
+                      <a:round/>
+                      <a:headEnd type="none" w="med" len="med"/>
+                      <a:tailEnd type="none" w="med" len="med"/>
+                    </a:lnB>
+                  </a:tcPr>
+                </a:tc>
+              </a:tr>
+              <a:tr h="365760">
+                <a:tc>
+                  <a:txBody>
+                    <a:bodyPr/>
+                    <a:lstStyle/>
+                    <a:p>
+                      <a:pPr indent="0" marL="0">
+                        <a:buNone/>
+                      </a:pPr>
+                      <a:r>
+                        <a:rPr lang="en-US" sz="1050" dirty="0">
+                          <a:solidFill>
+                            <a:srgbClr val="16181D"/>
+                          </a:solidFill>
+                          <a:latin typeface="Arial" pitchFamily="34" charset="0"/>
+                          <a:ea typeface="Arial" pitchFamily="34" charset="-122"/>
+                          <a:cs typeface="Arial" pitchFamily="34" charset="-120"/>
+                        </a:rPr>
+                        <a:t>Vehicle registration</a:t>
+                      </a:r>
+                      <a:endParaRPr lang="en-US" sz="1050" dirty="0">
+                        <a:latin typeface="Arial" charset="0"/>
+                        <a:ea typeface="Arial" charset="0"/>
+                        <a:cs typeface="Arial" charset="0"/>
+                      </a:endParaRPr>
+                    </a:p>
+                  </a:txBody>
+                  <a:tcPr marL="91440" marR="91440" marT="45720" marB="45720" anchor="ctr">
+                    <a:lnL w="6350" cap="flat" cmpd="sng" algn="ctr">
+                      <a:solidFill>
+                        <a:srgbClr val="D6DAE0"/>
+                      </a:solidFill>
+                      <a:prstDash val="solid"/>
+                      <a:round/>
+                      <a:headEnd type="none" w="med" len="med"/>
+                      <a:tailEnd type="none" w="med" len="med"/>
+                    </a:lnL>
+                    <a:lnR w="6350" cap="flat" cmpd="sng" algn="ctr">
+                      <a:solidFill>
+                        <a:srgbClr val="D6DAE0"/>
+                      </a:solidFill>
+                      <a:prstDash val="solid"/>
+                      <a:round/>
+                      <a:headEnd type="none" w="med" len="med"/>
+                      <a:tailEnd type="none" w="med" len="med"/>
+                    </a:lnR>
+                    <a:lnT w="6350" cap="flat" cmpd="sng" algn="ctr">
+                      <a:solidFill>
+                        <a:srgbClr val="D6DAE0"/>
+                      </a:solidFill>
+                      <a:prstDash val="solid"/>
+                      <a:round/>
+                      <a:headEnd type="none" w="med" len="med"/>
+                      <a:tailEnd type="none" w="med" len="med"/>
+                    </a:lnT>
+                    <a:lnB w="6350" cap="flat" cmpd="sng" algn="ctr">
+                      <a:solidFill>
+                        <a:srgbClr val="D6DAE0"/>
+                      </a:solidFill>
+                      <a:prstDash val="solid"/>
+                      <a:round/>
+                      <a:headEnd type="none" w="med" len="med"/>
+                      <a:tailEnd type="none" w="med" len="med"/>
+                    </a:lnB>
+                  </a:tcPr>
+                </a:tc>
+                <a:tc>
+                  <a:txBody>
+                    <a:bodyPr/>
+                    <a:lstStyle/>
+                    <a:p>
+                      <a:pPr indent="0" marL="0">
+                        <a:buNone/>
+                      </a:pPr>
+                      <a:r>
+                        <a:rPr lang="en-US" sz="1050" dirty="0">
+                          <a:solidFill>
+                            <a:srgbClr val="16181D"/>
+                          </a:solidFill>
+                          <a:latin typeface="Arial" pitchFamily="34" charset="0"/>
+                          <a:ea typeface="Arial" pitchFamily="34" charset="-122"/>
+                          <a:cs typeface="Arial" pitchFamily="34" charset="-120"/>
+                        </a:rPr>
+                        <a:t>1</a:t>
+                      </a:r>
+                      <a:endParaRPr lang="en-US" sz="1050" dirty="0">
+                        <a:latin typeface="Arial" charset="0"/>
+                        <a:ea typeface="Arial" charset="0"/>
+                        <a:cs typeface="Arial" charset="0"/>
+                      </a:endParaRPr>
+                    </a:p>
+                  </a:txBody>
+                  <a:tcPr marL="91440" marR="91440" marT="45720" marB="45720" anchor="ctr">
+                    <a:lnL w="6350" cap="flat" cmpd="sng" algn="ctr">
+                      <a:solidFill>
+                        <a:srgbClr val="D6DAE0"/>
+                      </a:solidFill>
+                      <a:prstDash val="solid"/>
+                      <a:round/>
+                      <a:headEnd type="none" w="med" len="med"/>
+                      <a:tailEnd type="none" w="med" len="med"/>
+                    </a:lnL>
+                    <a:lnR w="6350" cap="flat" cmpd="sng" algn="ctr">
+                      <a:solidFill>
+                        <a:srgbClr val="D6DAE0"/>
+                      </a:solidFill>
+                      <a:prstDash val="solid"/>
+                      <a:round/>
+                      <a:headEnd type="none" w="med" len="med"/>
+                      <a:tailEnd type="none" w="med" len="med"/>
+                    </a:lnR>
+                    <a:lnT w="6350" cap="flat" cmpd="sng" algn="ctr">
+                      <a:solidFill>
+                        <a:srgbClr val="D6DAE0"/>
+                      </a:solidFill>
+                      <a:prstDash val="solid"/>
+                      <a:round/>
+                      <a:headEnd type="none" w="med" len="med"/>
+                      <a:tailEnd type="none" w="med" len="med"/>
+                    </a:lnT>
+                    <a:lnB w="6350" cap="flat" cmpd="sng" algn="ctr">
+                      <a:solidFill>
+                        <a:srgbClr val="D6DAE0"/>
+                      </a:solidFill>
+                      <a:prstDash val="solid"/>
+                      <a:round/>
+                      <a:headEnd type="none" w="med" len="med"/>
+                      <a:tailEnd type="none" w="med" len="med"/>
+                    </a:lnB>
+                  </a:tcPr>
+                </a:tc>
+                <a:tc>
+                  <a:txBody>
+                    <a:bodyPr/>
+                    <a:lstStyle/>
+                    <a:p>
+                      <a:pPr indent="0" marL="0">
+                        <a:buNone/>
+                      </a:pPr>
+                      <a:r>
+                        <a:rPr lang="en-US" sz="1050" b="1" dirty="0">
+                          <a:solidFill>
+                            <a:srgbClr val="3D5A3D"/>
+                          </a:solidFill>
+                          <a:latin typeface="Arial" pitchFamily="34" charset="0"/>
+                          <a:ea typeface="Arial" pitchFamily="34" charset="-122"/>
+                          <a:cs typeface="Arial" pitchFamily="34" charset="-120"/>
+                        </a:rPr>
+                        <a:t>100%</a:t>
+                      </a:r>
+                      <a:endParaRPr lang="en-US" sz="1050" dirty="0">
+                        <a:latin typeface="Arial" charset="0"/>
+                        <a:ea typeface="Arial" charset="0"/>
+                        <a:cs typeface="Arial" charset="0"/>
+                      </a:endParaRPr>
+                    </a:p>
+                  </a:txBody>
+                  <a:tcPr marL="91440" marR="91440" marT="45720" marB="45720" anchor="ctr">
+                    <a:lnL w="6350" cap="flat" cmpd="sng" algn="ctr">
+                      <a:solidFill>
+                        <a:srgbClr val="D6DAE0"/>
+                      </a:solidFill>
+                      <a:prstDash val="solid"/>
+                      <a:round/>
+                      <a:headEnd type="none" w="med" len="med"/>
+                      <a:tailEnd type="none" w="med" len="med"/>
+                    </a:lnL>
+                    <a:lnR w="6350" cap="flat" cmpd="sng" algn="ctr">
+                      <a:solidFill>
+                        <a:srgbClr val="D6DAE0"/>
+                      </a:solidFill>
+                      <a:prstDash val="solid"/>
+                      <a:round/>
+                      <a:headEnd type="none" w="med" len="med"/>
+                      <a:tailEnd type="none" w="med" len="med"/>
+                    </a:lnR>
+                    <a:lnT w="6350" cap="flat" cmpd="sng" algn="ctr">
+                      <a:solidFill>
+                        <a:srgbClr val="D6DAE0"/>
+                      </a:solidFill>
+                      <a:prstDash val="solid"/>
+                      <a:round/>
+                      <a:headEnd type="none" w="med" len="med"/>
+                      <a:tailEnd type="none" w="med" len="med"/>
+                    </a:lnT>
+                    <a:lnB w="6350" cap="flat" cmpd="sng" algn="ctr">
+                      <a:solidFill>
+                        <a:srgbClr val="D6DAE0"/>
+                      </a:solidFill>
+                      <a:prstDash val="solid"/>
+                      <a:round/>
+                      <a:headEnd type="none" w="med" len="med"/>
+                      <a:tailEnd type="none" w="med" len="med"/>
+                    </a:lnB>
+                  </a:tcPr>
+                </a:tc>
+                <a:tc>
+                  <a:txBody>
+                    <a:bodyPr/>
+                    <a:lstStyle/>
+                    <a:p>
+                      <a:pPr indent="0" marL="0">
+                        <a:buNone/>
+                      </a:pPr>
+                      <a:r>
+                        <a:rPr lang="en-US" sz="1050" b="1" dirty="0">
+                          <a:solidFill>
+                            <a:srgbClr val="3D5A3D"/>
+                          </a:solidFill>
+                          <a:latin typeface="Arial" pitchFamily="34" charset="0"/>
+                          <a:ea typeface="Arial" pitchFamily="34" charset="-122"/>
+                          <a:cs typeface="Arial" pitchFamily="34" charset="-120"/>
+                        </a:rPr>
+                        <a:t>100%</a:t>
                       </a:r>
                       <a:endParaRPr lang="en-US" sz="1050" dirty="0">
                         <a:latin typeface="Arial" charset="0"/>
@@ -8448,7 +8972,7 @@
                           <a:ea typeface="Arial" pitchFamily="34" charset="-122"/>
                           <a:cs typeface="Arial" pitchFamily="34" charset="-120"/>
                         </a:rPr>
-                        <a:t>35</a:t>
+                        <a:t>55</a:t>
                       </a:r>
                       <a:endParaRPr lang="en-US" sz="1050" dirty="0">
                         <a:latin typeface="Arial" charset="0"/>
@@ -8578,7 +9102,7 @@
                           <a:ea typeface="Arial" pitchFamily="34" charset="-122"/>
                           <a:cs typeface="Arial" pitchFamily="34" charset="-120"/>
                         </a:rPr>
-                        <a:t>91.4%</a:t>
+                        <a:t>89.1%</a:t>
                       </a:r>
                       <a:endParaRPr lang="en-US" sz="1050" dirty="0">
                         <a:latin typeface="Arial" charset="0"/>
@@ -8664,7 +9188,7 @@
                 <a:ea typeface="Arial" pitchFamily="34" charset="-122"/>
                 <a:cs typeface="Arial" pitchFamily="34" charset="-120"/>
               </a:rPr>
-              <a:t>Fortress mode: recall 94.3% (catches the PIN code) at the cost of one bounded false alarm. Negatives (order ids, helplines, appointment dates) must NOT be masked, and are not. Reproduce: npm run bench</a:t>
+              <a:t>Fortress mode: recall 94.5% (catches PIN codes and table-cell DOB) at the cost of one bounded false alarm. Adversarial negatives (en-dash lookalikes, Luhn-fail cards, spaced order ids, employee ids) must NOT be masked, and are not. Reproduce: npm run bench</a:t>
             </a:r>
             <a:endParaRPr lang="en-US" sz="950" dirty="0"/>
           </a:p>
@@ -10703,7 +11227,7 @@
                 <a:ea typeface="Arial" pitchFamily="34" charset="-122"/>
                 <a:cs typeface="Arial" pitchFamily="34" charset="-120"/>
               </a:rPr>
-              <a:t>Suite footprint: 193 automated tests · model 1.27 MB, SHA-pinned (provenance is a test) · corpus: 12 slices, 35 annotated instances + declared negatives · numbers regenerate with npm run bench and npm run bench:latency</a:t>
+              <a:t>Suite footprint: 194 automated tests · model 1.27 MB, SHA-pinned (provenance is a test) · corpus: 18 captures, 55 annotated positives + adversarial lookalike negatives (unicode dashes, digit-spacing evasions, Hindi labels, table splits) · regenerate: npm run bench, npm run bench:latency</a:t>
             </a:r>
             <a:endParaRPr lang="en-US" sz="950" dirty="0"/>
           </a:p>
@@ -12102,7 +12626,7 @@
                 <a:ea typeface="Arial" pitchFamily="34" charset="-122"/>
                 <a:cs typeface="Arial" pitchFamily="34" charset="-120"/>
               </a:rPr>
-              <a:t>193 automated tests across schema, detectors, policy, vault, gate, fusion, perception, server, benchmark and red team.</a:t>
+              <a:t>194 automated tests across schema, detectors, policy, vault, gate, fusion, perception, server, benchmark and red team.</a:t>
             </a:r>
             <a:endParaRPr lang="en-US" sz="1350" dirty="0"/>
           </a:p>
@@ -12937,7 +13461,7 @@
                           <a:ea typeface="Arial" pitchFamily="34" charset="-122"/>
                           <a:cs typeface="Arial" pitchFamily="34" charset="-120"/>
                         </a:rPr>
-                        <a:t>Measured: 100% precision, 0 invariant leaks, checksum-perfect Indian IDs, published gap list</a:t>
+                        <a:t>Measured on an adversarial corpus: 100% precision, 0 invariant leaks, checksum-perfect IDs, published gap list</a:t>
                       </a:r>
                       <a:endParaRPr lang="en-US" sz="1050" dirty="0">
                         <a:latin typeface="Arial" charset="0"/>

--- a/docs/Kavach-SIH2026-Deck.pptx
+++ b/docs/Kavach-SIH2026-Deck.pptx
@@ -3099,7 +3099,7 @@
                 <a:ea typeface="Arial" pitchFamily="34" charset="-122"/>
                 <a:cs typeface="Arial" pitchFamily="34" charset="-120"/>
               </a:rPr>
-              <a:t>Working prototype  |  github.com/BhoomiAgrawal12/browser-vision-agent  |  194 automated tests</a:t>
+              <a:t>Working prototype  |  github.com/BhoomiAgrawal12/browser-vision-agent  |  203 automated tests</a:t>
             </a:r>
             <a:endParaRPr lang="en-US" sz="1200" dirty="0"/>
           </a:p>
@@ -11227,7 +11227,7 @@
                 <a:ea typeface="Arial" pitchFamily="34" charset="-122"/>
                 <a:cs typeface="Arial" pitchFamily="34" charset="-120"/>
               </a:rPr>
-              <a:t>Suite footprint: 194 automated tests · model 1.27 MB, SHA-pinned (provenance is a test) · corpus: 18 captures, 55 annotated positives + adversarial lookalike negatives (unicode dashes, digit-spacing evasions, Hindi labels, table splits) · regenerate: npm run bench, npm run bench:latency</a:t>
+              <a:t>Suite footprint: 203 automated tests · model 1.27 MB, SHA-pinned (provenance is a test) · corpus: 18 captures, 55 annotated positives + adversarial lookalike negatives (unicode dashes, digit-spacing evasions, Hindi labels, table splits) · regenerate: npm run bench, npm run bench:latency</a:t>
             </a:r>
             <a:endParaRPr lang="en-US" sz="950" dirty="0"/>
           </a:p>
@@ -12626,7 +12626,7 @@
                 <a:ea typeface="Arial" pitchFamily="34" charset="-122"/>
                 <a:cs typeface="Arial" pitchFamily="34" charset="-120"/>
               </a:rPr>
-              <a:t>194 automated tests across schema, detectors, policy, vault, gate, fusion, perception, server, benchmark and red team.</a:t>
+              <a:t>203 automated tests across schema, detectors, policy, vault, gate, fusion, perception, server, benchmark and red team.</a:t>
             </a:r>
             <a:endParaRPr lang="en-US" sz="1350" dirty="0"/>
           </a:p>
